--- a/00-01_han-ai/training-materials/course05_jissen_claude_code.pptx
+++ b/00-01_han-ai/training-materials/course05_jissen_claude_code.pptx
@@ -12,11 +12,11 @@
     <p:sldId id="260" r:id="rId11"/>
     <p:sldId id="261" r:id="rId12"/>
     <p:sldId id="262" r:id="rId13"/>
-    <p:sldId id="263" r:id="rId14"/>
-    <p:sldId id="264" r:id="rId15"/>
     <p:sldId id="265" r:id="rId16"/>
     <p:sldId id="266" r:id="rId17"/>
     <p:sldId id="267" r:id="rId18"/>
+    <p:sldId id="263" r:id="rId14"/>
+    <p:sldId id="264" r:id="rId15"/>
     <p:sldId id="268" r:id="rId19"/>
     <p:sldId id="269" r:id="rId20"/>
     <p:sldId id="270" r:id="rId21"/>
@@ -3338,14 +3338,6 @@
 <file path=ppt/slides/slide10.xml><?xml version="1.0" encoding="utf-8"?>
 <p:sld xmlns:a="http://schemas.openxmlformats.org/drawingml/2006/main" xmlns:p="http://schemas.openxmlformats.org/presentationml/2006/main" xmlns:r="http://schemas.openxmlformats.org/officeDocument/2006/relationships">
   <p:cSld>
-    <p:bg>
-      <p:bgPr>
-        <a:solidFill>
-          <a:srgbClr val="1E40AF"/>
-        </a:solidFill>
-        <a:effectLst/>
-      </p:bgPr>
-    </p:bg>
     <p:spTree>
       <p:nvGrpSpPr>
         <p:cNvPr id="1" name=""/>
@@ -3361,14 +3353,14 @@
         </p:nvSpPr>
         <p:spPr>
           <a:xfrm>
-            <a:off x="548640" y="822960"/>
-            <a:ext cx="1097280" cy="1097280"/>
+            <a:off x="0" y="0"/>
+            <a:ext cx="9144000" cy="594360"/>
           </a:xfrm>
           <a:prstGeom prst="rect">
             <a:avLst/>
           </a:prstGeom>
           <a:solidFill>
-            <a:srgbClr val="DA7756"/>
+            <a:srgbClr val="1E40AF"/>
           </a:solidFill>
           <a:ln>
             <a:noFill/>
@@ -3404,203 +3396,6 @@
         </p:nvSpPr>
         <p:spPr>
           <a:xfrm>
-            <a:off x="548640" y="868680"/>
-            <a:ext cx="1097280" cy="1005840"/>
-          </a:xfrm>
-          <a:prstGeom prst="rect">
-            <a:avLst/>
-          </a:prstGeom>
-          <a:noFill/>
-        </p:spPr>
-        <p:txBody>
-          <a:bodyPr wrap="square">
-            <a:spAutoFit/>
-          </a:bodyPr>
-          <a:lstStyle/>
-          <a:p>
-            <a:pPr algn="ctr"/>
-            <a:r>
-              <a:rPr sz="3800" b="1" i="0">
-                <a:solidFill>
-                  <a:srgbClr val="FFFFFF"/>
-                </a:solidFill>
-              </a:rPr>
-              <a:t>3</a:t>
-            </a:r>
-          </a:p>
-        </p:txBody>
-      </p:sp>
-      <p:sp>
-        <p:nvSpPr>
-          <p:cNvPr id="4" name="TextBox 3"/>
-          <p:cNvSpPr txBox="1"/>
-          <p:nvPr/>
-        </p:nvSpPr>
-        <p:spPr>
-          <a:xfrm>
-            <a:off x="2011680" y="960120"/>
-            <a:ext cx="6858000" cy="914400"/>
-          </a:xfrm>
-          <a:prstGeom prst="rect">
-            <a:avLst/>
-          </a:prstGeom>
-          <a:noFill/>
-        </p:spPr>
-        <p:txBody>
-          <a:bodyPr wrap="square">
-            <a:spAutoFit/>
-          </a:bodyPr>
-          <a:lstStyle/>
-          <a:p>
-            <a:pPr algn="l"/>
-            <a:r>
-              <a:rPr sz="3000" b="1" i="0">
-                <a:solidFill>
-                  <a:srgbClr val="FFFFFF"/>
-                </a:solidFill>
-              </a:rPr>
-              <a:t>ユースケース</a:t>
-            </a:r>
-          </a:p>
-        </p:txBody>
-      </p:sp>
-      <p:sp>
-        <p:nvSpPr>
-          <p:cNvPr id="5" name="TextBox 4"/>
-          <p:cNvSpPr txBox="1"/>
-          <p:nvPr/>
-        </p:nvSpPr>
-        <p:spPr>
-          <a:xfrm>
-            <a:off x="2011680" y="1920240"/>
-            <a:ext cx="4572000" cy="457200"/>
-          </a:xfrm>
-          <a:prstGeom prst="rect">
-            <a:avLst/>
-          </a:prstGeom>
-          <a:noFill/>
-        </p:spPr>
-        <p:txBody>
-          <a:bodyPr wrap="square">
-            <a:spAutoFit/>
-          </a:bodyPr>
-          <a:lstStyle/>
-          <a:p>
-            <a:pPr algn="l"/>
-            <a:r>
-              <a:rPr sz="1400" b="0" i="0">
-                <a:solidFill>
-                  <a:srgbClr val="93C5FD"/>
-                </a:solidFill>
-              </a:rPr>
-              <a:t>[10分]</a:t>
-            </a:r>
-          </a:p>
-        </p:txBody>
-      </p:sp>
-      <p:sp>
-        <p:nvSpPr>
-          <p:cNvPr id="6" name="TextBox 5"/>
-          <p:cNvSpPr txBox="1"/>
-          <p:nvPr/>
-        </p:nvSpPr>
-        <p:spPr>
-          <a:xfrm>
-            <a:off x="2011680" y="2468880"/>
-            <a:ext cx="6858000" cy="914400"/>
-          </a:xfrm>
-          <a:prstGeom prst="rect">
-            <a:avLst/>
-          </a:prstGeom>
-          <a:noFill/>
-        </p:spPr>
-        <p:txBody>
-          <a:bodyPr wrap="square">
-            <a:spAutoFit/>
-          </a:bodyPr>
-          <a:lstStyle/>
-          <a:p>
-            <a:pPr algn="l"/>
-            <a:r>
-              <a:rPr sz="1500" b="0" i="0">
-                <a:solidFill>
-                  <a:srgbClr val="BFDBFE"/>
-                </a:solidFill>
-              </a:rPr>
-              <a:t>3つの実用シーンを各3分でデモ体験</a:t>
-            </a:r>
-          </a:p>
-        </p:txBody>
-      </p:sp>
-    </p:spTree>
-  </p:cSld>
-  <p:clrMapOvr>
-    <a:masterClrMapping/>
-  </p:clrMapOvr>
-</p:sld>
-</file>
-
-<file path=ppt/slides/slide11.xml><?xml version="1.0" encoding="utf-8"?>
-<p:sld xmlns:a="http://schemas.openxmlformats.org/drawingml/2006/main" xmlns:p="http://schemas.openxmlformats.org/presentationml/2006/main" xmlns:r="http://schemas.openxmlformats.org/officeDocument/2006/relationships">
-  <p:cSld>
-    <p:spTree>
-      <p:nvGrpSpPr>
-        <p:cNvPr id="1" name=""/>
-        <p:cNvGrpSpPr/>
-        <p:nvPr/>
-      </p:nvGrpSpPr>
-      <p:grpSpPr/>
-      <p:sp>
-        <p:nvSpPr>
-          <p:cNvPr id="2" name="Rectangle 1"/>
-          <p:cNvSpPr/>
-          <p:nvPr/>
-        </p:nvSpPr>
-        <p:spPr>
-          <a:xfrm>
-            <a:off x="0" y="0"/>
-            <a:ext cx="9144000" cy="594360"/>
-          </a:xfrm>
-          <a:prstGeom prst="rect">
-            <a:avLst/>
-          </a:prstGeom>
-          <a:solidFill>
-            <a:srgbClr val="1E40AF"/>
-          </a:solidFill>
-          <a:ln>
-            <a:noFill/>
-          </a:ln>
-        </p:spPr>
-        <p:style>
-          <a:lnRef idx="1">
-            <a:schemeClr val="accent1"/>
-          </a:lnRef>
-          <a:fillRef idx="3">
-            <a:schemeClr val="accent1"/>
-          </a:fillRef>
-          <a:effectRef idx="2">
-            <a:schemeClr val="accent1"/>
-          </a:effectRef>
-          <a:fontRef idx="minor">
-            <a:schemeClr val="lt1"/>
-          </a:fontRef>
-        </p:style>
-        <p:txBody>
-          <a:bodyPr rtlCol="0" anchor="ctr"/>
-          <a:lstStyle/>
-          <a:p>
-            <a:pPr algn="ctr"/>
-          </a:p>
-        </p:txBody>
-      </p:sp>
-      <p:sp>
-        <p:nvSpPr>
-          <p:cNvPr id="3" name="TextBox 2"/>
-          <p:cNvSpPr txBox="1"/>
-          <p:nvPr/>
-        </p:nvSpPr>
-        <p:spPr>
-          <a:xfrm>
             <a:off x="274320" y="64008"/>
             <a:ext cx="7772400" cy="502920"/>
           </a:xfrm>
@@ -3622,358 +3417,7 @@
                   <a:srgbClr val="FFFFFF"/>
                 </a:solidFill>
               </a:rPr>
-              <a:t>ユースケース ①：フォルダ整理</a:t>
-            </a:r>
-          </a:p>
-        </p:txBody>
-      </p:sp>
-      <p:sp>
-        <p:nvSpPr>
-          <p:cNvPr id="4" name="TextBox 3"/>
-          <p:cNvSpPr txBox="1"/>
-          <p:nvPr/>
-        </p:nvSpPr>
-        <p:spPr>
-          <a:xfrm>
-            <a:off x="7132320" y="91440"/>
-            <a:ext cx="1828800" cy="457200"/>
-          </a:xfrm>
-          <a:prstGeom prst="rect">
-            <a:avLst/>
-          </a:prstGeom>
-          <a:noFill/>
-        </p:spPr>
-        <p:txBody>
-          <a:bodyPr wrap="square">
-            <a:spAutoFit/>
-          </a:bodyPr>
-          <a:lstStyle/>
-          <a:p>
-            <a:pPr algn="r"/>
-            <a:r>
-              <a:rPr sz="1200" b="0" i="0">
-                <a:solidFill>
-                  <a:srgbClr val="93C5FD"/>
-                </a:solidFill>
-              </a:rPr>
-              <a:t>[約3分]</a:t>
-            </a:r>
-          </a:p>
-        </p:txBody>
-      </p:sp>
-      <p:sp>
-        <p:nvSpPr>
-          <p:cNvPr id="5" name="Rectangle 4"/>
-          <p:cNvSpPr/>
-          <p:nvPr/>
-        </p:nvSpPr>
-        <p:spPr>
-          <a:xfrm>
-            <a:off x="457200" y="777240"/>
-            <a:ext cx="8229600" cy="594360"/>
-          </a:xfrm>
-          <a:prstGeom prst="rect">
-            <a:avLst/>
-          </a:prstGeom>
-          <a:solidFill>
-            <a:srgbClr val="EFF6FF"/>
-          </a:solidFill>
-          <a:ln>
-            <a:noFill/>
-          </a:ln>
-        </p:spPr>
-        <p:style>
-          <a:lnRef idx="1">
-            <a:schemeClr val="accent1"/>
-          </a:lnRef>
-          <a:fillRef idx="3">
-            <a:schemeClr val="accent1"/>
-          </a:fillRef>
-          <a:effectRef idx="2">
-            <a:schemeClr val="accent1"/>
-          </a:effectRef>
-          <a:fontRef idx="minor">
-            <a:schemeClr val="lt1"/>
-          </a:fontRef>
-        </p:style>
-        <p:txBody>
-          <a:bodyPr rtlCol="0" anchor="ctr"/>
-          <a:lstStyle/>
-          <a:p>
-            <a:pPr algn="ctr"/>
-          </a:p>
-        </p:txBody>
-      </p:sp>
-      <p:sp>
-        <p:nvSpPr>
-          <p:cNvPr id="6" name="TextBox 5"/>
-          <p:cNvSpPr txBox="1"/>
-          <p:nvPr/>
-        </p:nvSpPr>
-        <p:spPr>
-          <a:xfrm>
-            <a:off x="594360" y="841248"/>
-            <a:ext cx="7955280" cy="502920"/>
-          </a:xfrm>
-          <a:prstGeom prst="rect">
-            <a:avLst/>
-          </a:prstGeom>
-          <a:noFill/>
-        </p:spPr>
-        <p:txBody>
-          <a:bodyPr wrap="square">
-            <a:spAutoFit/>
-          </a:bodyPr>
-          <a:lstStyle/>
-          <a:p>
-            <a:pPr algn="l"/>
-            <a:r>
-              <a:rPr sz="1400" b="1" i="0">
-                <a:solidFill>
-                  <a:srgbClr val="1E293B"/>
-                </a:solidFill>
-              </a:rPr>
-              <a:t>指示例：「Downloadsにある画像・PDF・Wordを種類ごとにフォルダ分けして」</a:t>
-            </a:r>
-          </a:p>
-        </p:txBody>
-      </p:sp>
-      <p:sp>
-        <p:nvSpPr>
-          <p:cNvPr id="7" name="TextBox 6"/>
-          <p:cNvSpPr txBox="1"/>
-          <p:nvPr/>
-        </p:nvSpPr>
-        <p:spPr>
-          <a:xfrm>
-            <a:off x="457200" y="1508760"/>
-            <a:ext cx="8229600" cy="502920"/>
-          </a:xfrm>
-          <a:prstGeom prst="rect">
-            <a:avLst/>
-          </a:prstGeom>
-          <a:noFill/>
-        </p:spPr>
-        <p:txBody>
-          <a:bodyPr wrap="square">
-            <a:spAutoFit/>
-          </a:bodyPr>
-          <a:lstStyle/>
-          <a:p>
-            <a:pPr algn="l"/>
-            <a:r>
-              <a:rPr sz="1300" b="0" i="1">
-                <a:solidFill>
-                  <a:srgbClr val="64748B"/>
-                </a:solidFill>
-              </a:rPr>
-              <a:t>最初にやる理由：持参PCの自分のフォルダが整理される体験が最もインパクト大でシンプル</a:t>
-            </a:r>
-          </a:p>
-        </p:txBody>
-      </p:sp>
-      <p:sp>
-        <p:nvSpPr>
-          <p:cNvPr id="8" name="TextBox 7"/>
-          <p:cNvSpPr txBox="1"/>
-          <p:nvPr/>
-        </p:nvSpPr>
-        <p:spPr>
-          <a:xfrm>
-            <a:off x="457200" y="2103120"/>
-            <a:ext cx="8229600" cy="502920"/>
-          </a:xfrm>
-          <a:prstGeom prst="rect">
-            <a:avLst/>
-          </a:prstGeom>
-          <a:noFill/>
-        </p:spPr>
-        <p:txBody>
-          <a:bodyPr wrap="square">
-            <a:spAutoFit/>
-          </a:bodyPr>
-          <a:lstStyle/>
-          <a:p>
-            <a:pPr algn="l"/>
-            <a:r>
-              <a:rPr sz="1400" b="0" i="0">
-                <a:solidFill>
-                  <a:srgbClr val="1E293B"/>
-                </a:solidFill>
-              </a:rPr>
-              <a:t>Claude Codeが実際にファイルを動かしてくれる様子を確認してください</a:t>
-            </a:r>
-          </a:p>
-        </p:txBody>
-      </p:sp>
-      <p:sp>
-        <p:nvSpPr>
-          <p:cNvPr id="9" name="Rectangle 8"/>
-          <p:cNvSpPr/>
-          <p:nvPr/>
-        </p:nvSpPr>
-        <p:spPr>
-          <a:xfrm>
-            <a:off x="457200" y="2788920"/>
-            <a:ext cx="8229600" cy="594360"/>
-          </a:xfrm>
-          <a:prstGeom prst="rect">
-            <a:avLst/>
-          </a:prstGeom>
-          <a:solidFill>
-            <a:srgbClr val="EFF6FF"/>
-          </a:solidFill>
-          <a:ln>
-            <a:noFill/>
-          </a:ln>
-        </p:spPr>
-        <p:style>
-          <a:lnRef idx="1">
-            <a:schemeClr val="accent1"/>
-          </a:lnRef>
-          <a:fillRef idx="3">
-            <a:schemeClr val="accent1"/>
-          </a:fillRef>
-          <a:effectRef idx="2">
-            <a:schemeClr val="accent1"/>
-          </a:effectRef>
-          <a:fontRef idx="minor">
-            <a:schemeClr val="lt1"/>
-          </a:fontRef>
-        </p:style>
-        <p:txBody>
-          <a:bodyPr rtlCol="0" anchor="ctr"/>
-          <a:lstStyle/>
-          <a:p>
-            <a:pPr algn="ctr"/>
-          </a:p>
-        </p:txBody>
-      </p:sp>
-      <p:sp>
-        <p:nvSpPr>
-          <p:cNvPr id="10" name="TextBox 9"/>
-          <p:cNvSpPr txBox="1"/>
-          <p:nvPr/>
-        </p:nvSpPr>
-        <p:spPr>
-          <a:xfrm>
-            <a:off x="594360" y="2852928"/>
-            <a:ext cx="7955280" cy="502920"/>
-          </a:xfrm>
-          <a:prstGeom prst="rect">
-            <a:avLst/>
-          </a:prstGeom>
-          <a:noFill/>
-        </p:spPr>
-        <p:txBody>
-          <a:bodyPr wrap="square">
-            <a:spAutoFit/>
-          </a:bodyPr>
-          <a:lstStyle/>
-          <a:p>
-            <a:pPr algn="l"/>
-            <a:r>
-              <a:rPr sz="1300" b="0" i="0">
-                <a:solidFill>
-                  <a:srgbClr val="1E40AF"/>
-                </a:solidFill>
-              </a:rPr>
-              <a:t>確認ポイント：実行前に「どのフォルダを作りますか？」と確認してから動くかどうか</a:t>
-            </a:r>
-          </a:p>
-        </p:txBody>
-      </p:sp>
-    </p:spTree>
-  </p:cSld>
-  <p:clrMapOvr>
-    <a:masterClrMapping/>
-  </p:clrMapOvr>
-</p:sld>
-</file>
-
-<file path=ppt/slides/slide12.xml><?xml version="1.0" encoding="utf-8"?>
-<p:sld xmlns:a="http://schemas.openxmlformats.org/drawingml/2006/main" xmlns:p="http://schemas.openxmlformats.org/presentationml/2006/main" xmlns:r="http://schemas.openxmlformats.org/officeDocument/2006/relationships">
-  <p:cSld>
-    <p:spTree>
-      <p:nvGrpSpPr>
-        <p:cNvPr id="1" name=""/>
-        <p:cNvGrpSpPr/>
-        <p:nvPr/>
-      </p:nvGrpSpPr>
-      <p:grpSpPr/>
-      <p:sp>
-        <p:nvSpPr>
-          <p:cNvPr id="2" name="Rectangle 1"/>
-          <p:cNvSpPr/>
-          <p:nvPr/>
-        </p:nvSpPr>
-        <p:spPr>
-          <a:xfrm>
-            <a:off x="0" y="0"/>
-            <a:ext cx="9144000" cy="594360"/>
-          </a:xfrm>
-          <a:prstGeom prst="rect">
-            <a:avLst/>
-          </a:prstGeom>
-          <a:solidFill>
-            <a:srgbClr val="1E40AF"/>
-          </a:solidFill>
-          <a:ln>
-            <a:noFill/>
-          </a:ln>
-        </p:spPr>
-        <p:style>
-          <a:lnRef idx="1">
-            <a:schemeClr val="accent1"/>
-          </a:lnRef>
-          <a:fillRef idx="3">
-            <a:schemeClr val="accent1"/>
-          </a:fillRef>
-          <a:effectRef idx="2">
-            <a:schemeClr val="accent1"/>
-          </a:effectRef>
-          <a:fontRef idx="minor">
-            <a:schemeClr val="lt1"/>
-          </a:fontRef>
-        </p:style>
-        <p:txBody>
-          <a:bodyPr rtlCol="0" anchor="ctr"/>
-          <a:lstStyle/>
-          <a:p>
-            <a:pPr algn="ctr"/>
-          </a:p>
-        </p:txBody>
-      </p:sp>
-      <p:sp>
-        <p:nvSpPr>
-          <p:cNvPr id="3" name="TextBox 2"/>
-          <p:cNvSpPr txBox="1"/>
-          <p:nvPr/>
-        </p:nvSpPr>
-        <p:spPr>
-          <a:xfrm>
-            <a:off x="274320" y="64008"/>
-            <a:ext cx="7772400" cy="502920"/>
-          </a:xfrm>
-          <a:prstGeom prst="rect">
-            <a:avLst/>
-          </a:prstGeom>
-          <a:noFill/>
-        </p:spPr>
-        <p:txBody>
-          <a:bodyPr wrap="square">
-            <a:spAutoFit/>
-          </a:bodyPr>
-          <a:lstStyle/>
-          <a:p>
-            <a:pPr algn="l"/>
-            <a:r>
-              <a:rPr sz="1800" b="1" i="0">
-                <a:solidFill>
-                  <a:srgbClr val="FFFFFF"/>
-                </a:solidFill>
-              </a:rPr>
-              <a:t>ユースケース ②③：CSV整形 ＆ 定型文書生成</a:t>
+              <a:t>ユースケース ②③：PDF情報抽出 ＆ 定型文書生成</a:t>
             </a:r>
           </a:p>
         </p:txBody>
@@ -4275,6 +3719,717 @@
                 </a:solidFill>
               </a:rPr>
               <a:t>「繰り返し作業」を自動化している。一度指示を覚えれば次回は数秒で完了する</a:t>
+            </a:r>
+          </a:p>
+        </p:txBody>
+      </p:sp>
+    </p:spTree>
+  </p:cSld>
+  <p:clrMapOvr>
+    <a:masterClrMapping/>
+  </p:clrMapOvr>
+</p:sld>
+</file>
+
+<file path=ppt/slides/slide11.xml><?xml version="1.0" encoding="utf-8"?>
+<p:sld xmlns:a="http://schemas.openxmlformats.org/drawingml/2006/main" xmlns:p="http://schemas.openxmlformats.org/presentationml/2006/main" xmlns:r="http://schemas.openxmlformats.org/officeDocument/2006/relationships">
+  <p:cSld>
+    <p:bg>
+      <p:bgPr>
+        <a:solidFill>
+          <a:srgbClr val="1E40AF"/>
+        </a:solidFill>
+        <a:effectLst/>
+      </p:bgPr>
+    </p:bg>
+    <p:spTree>
+      <p:nvGrpSpPr>
+        <p:cNvPr id="1" name=""/>
+        <p:cNvGrpSpPr/>
+        <p:nvPr/>
+      </p:nvGrpSpPr>
+      <p:grpSpPr/>
+      <p:sp>
+        <p:nvSpPr>
+          <p:cNvPr id="2" name="Rectangle 1"/>
+          <p:cNvSpPr/>
+          <p:nvPr/>
+        </p:nvSpPr>
+        <p:spPr>
+          <a:xfrm>
+            <a:off x="548640" y="822960"/>
+            <a:ext cx="1097280" cy="1097280"/>
+          </a:xfrm>
+          <a:prstGeom prst="rect">
+            <a:avLst/>
+          </a:prstGeom>
+          <a:solidFill>
+            <a:srgbClr val="DA7756"/>
+          </a:solidFill>
+          <a:ln>
+            <a:noFill/>
+          </a:ln>
+        </p:spPr>
+        <p:style>
+          <a:lnRef idx="1">
+            <a:schemeClr val="accent1"/>
+          </a:lnRef>
+          <a:fillRef idx="3">
+            <a:schemeClr val="accent1"/>
+          </a:fillRef>
+          <a:effectRef idx="2">
+            <a:schemeClr val="accent1"/>
+          </a:effectRef>
+          <a:fontRef idx="minor">
+            <a:schemeClr val="lt1"/>
+          </a:fontRef>
+        </p:style>
+        <p:txBody>
+          <a:bodyPr rtlCol="0" anchor="ctr"/>
+          <a:lstStyle/>
+          <a:p>
+            <a:pPr algn="ctr"/>
+          </a:p>
+        </p:txBody>
+      </p:sp>
+      <p:sp>
+        <p:nvSpPr>
+          <p:cNvPr id="3" name="TextBox 2"/>
+          <p:cNvSpPr txBox="1"/>
+          <p:nvPr/>
+        </p:nvSpPr>
+        <p:spPr>
+          <a:xfrm>
+            <a:off x="548640" y="868680"/>
+            <a:ext cx="1097280" cy="1005840"/>
+          </a:xfrm>
+          <a:prstGeom prst="rect">
+            <a:avLst/>
+          </a:prstGeom>
+          <a:noFill/>
+        </p:spPr>
+        <p:txBody>
+          <a:bodyPr wrap="square">
+            <a:spAutoFit/>
+          </a:bodyPr>
+          <a:lstStyle/>
+          <a:p>
+            <a:pPr algn="ctr"/>
+            <a:r>
+              <a:rPr sz="3800" b="1" i="0">
+                <a:solidFill>
+                  <a:srgbClr val="FFFFFF"/>
+                </a:solidFill>
+              </a:rPr>
+              <a:t>3</a:t>
+            </a:r>
+          </a:p>
+        </p:txBody>
+      </p:sp>
+      <p:sp>
+        <p:nvSpPr>
+          <p:cNvPr id="4" name="TextBox 3"/>
+          <p:cNvSpPr txBox="1"/>
+          <p:nvPr/>
+        </p:nvSpPr>
+        <p:spPr>
+          <a:xfrm>
+            <a:off x="2011680" y="960120"/>
+            <a:ext cx="6858000" cy="914400"/>
+          </a:xfrm>
+          <a:prstGeom prst="rect">
+            <a:avLst/>
+          </a:prstGeom>
+          <a:noFill/>
+        </p:spPr>
+        <p:txBody>
+          <a:bodyPr wrap="square">
+            <a:spAutoFit/>
+          </a:bodyPr>
+          <a:lstStyle/>
+          <a:p>
+            <a:pPr algn="l"/>
+            <a:r>
+              <a:rPr sz="3000" b="1" i="0">
+                <a:solidFill>
+                  <a:srgbClr val="FFFFFF"/>
+                </a:solidFill>
+              </a:rPr>
+              <a:t>セットアップ確認</a:t>
+            </a:r>
+          </a:p>
+        </p:txBody>
+      </p:sp>
+      <p:sp>
+        <p:nvSpPr>
+          <p:cNvPr id="5" name="TextBox 4"/>
+          <p:cNvSpPr txBox="1"/>
+          <p:nvPr/>
+        </p:nvSpPr>
+        <p:spPr>
+          <a:xfrm>
+            <a:off x="2011680" y="1920240"/>
+            <a:ext cx="4572000" cy="457200"/>
+          </a:xfrm>
+          <a:prstGeom prst="rect">
+            <a:avLst/>
+          </a:prstGeom>
+          <a:noFill/>
+        </p:spPr>
+        <p:txBody>
+          <a:bodyPr wrap="square">
+            <a:spAutoFit/>
+          </a:bodyPr>
+          <a:lstStyle/>
+          <a:p>
+            <a:pPr algn="l"/>
+            <a:r>
+              <a:rPr sz="1400" b="0" i="0">
+                <a:solidFill>
+                  <a:srgbClr val="93C5FD"/>
+                </a:solidFill>
+              </a:rPr>
+              <a:t>[20分]</a:t>
+            </a:r>
+          </a:p>
+        </p:txBody>
+      </p:sp>
+      <p:sp>
+        <p:nvSpPr>
+          <p:cNvPr id="6" name="TextBox 5"/>
+          <p:cNvSpPr txBox="1"/>
+          <p:nvPr/>
+        </p:nvSpPr>
+        <p:spPr>
+          <a:xfrm>
+            <a:off x="2011680" y="2468880"/>
+            <a:ext cx="6858000" cy="914400"/>
+          </a:xfrm>
+          <a:prstGeom prst="rect">
+            <a:avLst/>
+          </a:prstGeom>
+          <a:noFill/>
+        </p:spPr>
+        <p:txBody>
+          <a:bodyPr wrap="square">
+            <a:spAutoFit/>
+          </a:bodyPr>
+          <a:lstStyle/>
+          <a:p>
+            <a:pPr algn="l"/>
+            <a:r>
+              <a:rPr sz="1500" b="0" i="0">
+                <a:solidFill>
+                  <a:srgbClr val="BFDBFE"/>
+                </a:solidFill>
+              </a:rPr>
+              <a:t>デスクトップ版起動・サインイン・動作確認</a:t>
+            </a:r>
+          </a:p>
+        </p:txBody>
+      </p:sp>
+    </p:spTree>
+  </p:cSld>
+  <p:clrMapOvr>
+    <a:masterClrMapping/>
+  </p:clrMapOvr>
+</p:sld>
+</file>
+
+<file path=ppt/slides/slide12.xml><?xml version="1.0" encoding="utf-8"?>
+<p:sld xmlns:a="http://schemas.openxmlformats.org/drawingml/2006/main" xmlns:p="http://schemas.openxmlformats.org/presentationml/2006/main" xmlns:r="http://schemas.openxmlformats.org/officeDocument/2006/relationships">
+  <p:cSld>
+    <p:spTree>
+      <p:nvGrpSpPr>
+        <p:cNvPr id="1" name=""/>
+        <p:cNvGrpSpPr/>
+        <p:nvPr/>
+      </p:nvGrpSpPr>
+      <p:grpSpPr/>
+      <p:sp>
+        <p:nvSpPr>
+          <p:cNvPr id="2" name="Rectangle 1"/>
+          <p:cNvSpPr/>
+          <p:nvPr/>
+        </p:nvSpPr>
+        <p:spPr>
+          <a:xfrm>
+            <a:off x="0" y="0"/>
+            <a:ext cx="9144000" cy="594360"/>
+          </a:xfrm>
+          <a:prstGeom prst="rect">
+            <a:avLst/>
+          </a:prstGeom>
+          <a:solidFill>
+            <a:srgbClr val="1E40AF"/>
+          </a:solidFill>
+          <a:ln>
+            <a:noFill/>
+          </a:ln>
+        </p:spPr>
+        <p:style>
+          <a:lnRef idx="1">
+            <a:schemeClr val="accent1"/>
+          </a:lnRef>
+          <a:fillRef idx="3">
+            <a:schemeClr val="accent1"/>
+          </a:fillRef>
+          <a:effectRef idx="2">
+            <a:schemeClr val="accent1"/>
+          </a:effectRef>
+          <a:fontRef idx="minor">
+            <a:schemeClr val="lt1"/>
+          </a:fontRef>
+        </p:style>
+        <p:txBody>
+          <a:bodyPr rtlCol="0" anchor="ctr"/>
+          <a:lstStyle/>
+          <a:p>
+            <a:pPr algn="ctr"/>
+          </a:p>
+        </p:txBody>
+      </p:sp>
+      <p:sp>
+        <p:nvSpPr>
+          <p:cNvPr id="3" name="TextBox 2"/>
+          <p:cNvSpPr txBox="1"/>
+          <p:nvPr/>
+        </p:nvSpPr>
+        <p:spPr>
+          <a:xfrm>
+            <a:off x="274320" y="64008"/>
+            <a:ext cx="7772400" cy="502920"/>
+          </a:xfrm>
+          <a:prstGeom prst="rect">
+            <a:avLst/>
+          </a:prstGeom>
+          <a:noFill/>
+        </p:spPr>
+        <p:txBody>
+          <a:bodyPr wrap="square">
+            <a:spAutoFit/>
+          </a:bodyPr>
+          <a:lstStyle/>
+          <a:p>
+            <a:pPr algn="l"/>
+            <a:r>
+              <a:rPr sz="1800" b="1" i="0">
+                <a:solidFill>
+                  <a:srgbClr val="FFFFFF"/>
+                </a:solidFill>
+              </a:rPr>
+              <a:t>セットアップ確認 — 全員動作確認まで</a:t>
+            </a:r>
+          </a:p>
+        </p:txBody>
+      </p:sp>
+      <p:sp>
+        <p:nvSpPr>
+          <p:cNvPr id="4" name="TextBox 3"/>
+          <p:cNvSpPr txBox="1"/>
+          <p:nvPr/>
+        </p:nvSpPr>
+        <p:spPr>
+          <a:xfrm>
+            <a:off x="7132320" y="91440"/>
+            <a:ext cx="1828800" cy="457200"/>
+          </a:xfrm>
+          <a:prstGeom prst="rect">
+            <a:avLst/>
+          </a:prstGeom>
+          <a:noFill/>
+        </p:spPr>
+        <p:txBody>
+          <a:bodyPr wrap="square">
+            <a:spAutoFit/>
+          </a:bodyPr>
+          <a:lstStyle/>
+          <a:p>
+            <a:pPr algn="r"/>
+            <a:r>
+              <a:rPr sz="1200" b="0" i="0">
+                <a:solidFill>
+                  <a:srgbClr val="93C5FD"/>
+                </a:solidFill>
+              </a:rPr>
+              <a:t>[20分]</a:t>
+            </a:r>
+          </a:p>
+        </p:txBody>
+      </p:sp>
+      <p:graphicFrame>
+        <p:nvGraphicFramePr>
+          <p:cNvPr id="5" name="Table 4"/>
+          <p:cNvGraphicFramePr>
+            <a:graphicFrameLocks noGrp="1"/>
+          </p:cNvGraphicFramePr>
+          <p:nvPr/>
+        </p:nvGraphicFramePr>
+        <p:xfrm>
+          <a:off x="457200" y="777240"/>
+          <a:ext cx="8229600" cy="3749039"/>
+        </p:xfrm>
+        <a:graphic>
+          <a:graphicData uri="http://schemas.openxmlformats.org/drawingml/2006/table">
+            <a:tbl>
+              <a:tblPr firstRow="1" bandRow="1">
+                <a:tableStyleId>{5C22544A-7EE6-4342-B048-85BDC9FD1C3A}</a:tableStyleId>
+              </a:tblPr>
+              <a:tblGrid>
+                <a:gridCol w="1645920"/>
+                <a:gridCol w="4279392"/>
+                <a:gridCol w="2304288"/>
+              </a:tblGrid>
+              <a:tr h="749807">
+                <a:tc>
+                  <a:txBody>
+                    <a:bodyPr wrap="square"/>
+                    <a:lstStyle/>
+                    <a:p>
+                      <a:pPr algn="ctr"/>
+                      <a:r>
+                        <a:rPr b="1" sz="1200">
+                          <a:solidFill>
+                            <a:srgbClr val="FFFFFF"/>
+                          </a:solidFill>
+                        </a:rPr>
+                        <a:t>Step</a:t>
+                      </a:r>
+                    </a:p>
+                  </a:txBody>
+                  <a:tcPr>
+                    <a:solidFill>
+                      <a:srgbClr val="1E40AF"/>
+                    </a:solidFill>
+                  </a:tcPr>
+                </a:tc>
+                <a:tc>
+                  <a:txBody>
+                    <a:bodyPr wrap="square"/>
+                    <a:lstStyle/>
+                    <a:p>
+                      <a:pPr algn="ctr"/>
+                      <a:r>
+                        <a:rPr b="1" sz="1200">
+                          <a:solidFill>
+                            <a:srgbClr val="FFFFFF"/>
+                          </a:solidFill>
+                        </a:rPr>
+                        <a:t>内容</a:t>
+                      </a:r>
+                    </a:p>
+                  </a:txBody>
+                  <a:tcPr>
+                    <a:solidFill>
+                      <a:srgbClr val="1E40AF"/>
+                    </a:solidFill>
+                  </a:tcPr>
+                </a:tc>
+                <a:tc>
+                  <a:txBody>
+                    <a:bodyPr wrap="square"/>
+                    <a:lstStyle/>
+                    <a:p>
+                      <a:pPr algn="ctr"/>
+                      <a:r>
+                        <a:rPr b="1" sz="1200">
+                          <a:solidFill>
+                            <a:srgbClr val="FFFFFF"/>
+                          </a:solidFill>
+                        </a:rPr>
+                        <a:t>詰まったら</a:t>
+                      </a:r>
+                    </a:p>
+                  </a:txBody>
+                  <a:tcPr>
+                    <a:solidFill>
+                      <a:srgbClr val="1E40AF"/>
+                    </a:solidFill>
+                  </a:tcPr>
+                </a:tc>
+              </a:tr>
+              <a:tr h="749807">
+                <a:tc>
+                  <a:txBody>
+                    <a:bodyPr wrap="square"/>
+                    <a:lstStyle/>
+                    <a:p>
+                      <a:pPr algn="l"/>
+                      <a:r>
+                        <a:rPr sz="1100">
+                          <a:solidFill>
+                            <a:srgbClr val="1E293B"/>
+                          </a:solidFill>
+                        </a:rPr>
+                        <a:t>1 起動</a:t>
+                      </a:r>
+                    </a:p>
+                  </a:txBody>
+                  <a:tcPr/>
+                </a:tc>
+                <a:tc>
+                  <a:txBody>
+                    <a:bodyPr wrap="square"/>
+                    <a:lstStyle/>
+                    <a:p>
+                      <a:pPr algn="l"/>
+                      <a:r>
+                        <a:rPr sz="1100">
+                          <a:solidFill>
+                            <a:srgbClr val="1E293B"/>
+                          </a:solidFill>
+                        </a:rPr>
+                        <a:t>Claude Codeデスクトップ版を起動（未インストールの場合はその場でインストール）</a:t>
+                      </a:r>
+                    </a:p>
+                  </a:txBody>
+                  <a:tcPr/>
+                </a:tc>
+                <a:tc>
+                  <a:txBody>
+                    <a:bodyPr wrap="square"/>
+                    <a:lstStyle/>
+                    <a:p>
+                      <a:pPr algn="l"/>
+                      <a:r>
+                        <a:rPr sz="1100">
+                          <a:solidFill>
+                            <a:srgbClr val="1E293B"/>
+                          </a:solidFill>
+                        </a:rPr>
+                        <a:t>講師が個別サポート</a:t>
+                      </a:r>
+                    </a:p>
+                  </a:txBody>
+                  <a:tcPr/>
+                </a:tc>
+              </a:tr>
+              <a:tr h="749807">
+                <a:tc>
+                  <a:txBody>
+                    <a:bodyPr wrap="square"/>
+                    <a:lstStyle/>
+                    <a:p>
+                      <a:pPr algn="l"/>
+                      <a:r>
+                        <a:rPr sz="1100">
+                          <a:solidFill>
+                            <a:srgbClr val="1E293B"/>
+                          </a:solidFill>
+                        </a:rPr>
+                        <a:t>2 サインイン</a:t>
+                      </a:r>
+                    </a:p>
+                  </a:txBody>
+                  <a:tcPr>
+                    <a:solidFill>
+                      <a:srgbClr val="F8FAFC"/>
+                    </a:solidFill>
+                  </a:tcPr>
+                </a:tc>
+                <a:tc>
+                  <a:txBody>
+                    <a:bodyPr wrap="square"/>
+                    <a:lstStyle/>
+                    <a:p>
+                      <a:pPr algn="l"/>
+                      <a:r>
+                        <a:rPr sz="1100">
+                          <a:solidFill>
+                            <a:srgbClr val="1E293B"/>
+                          </a:solidFill>
+                        </a:rPr>
+                        <a:t>AnthropicアカウントでGoogle または メールアドレスでログイン</a:t>
+                      </a:r>
+                    </a:p>
+                  </a:txBody>
+                  <a:tcPr>
+                    <a:solidFill>
+                      <a:srgbClr val="F8FAFC"/>
+                    </a:solidFill>
+                  </a:tcPr>
+                </a:tc>
+                <a:tc>
+                  <a:txBody>
+                    <a:bodyPr wrap="square"/>
+                    <a:lstStyle/>
+                    <a:p>
+                      <a:pPr algn="l"/>
+                      <a:r>
+                        <a:rPr sz="1100">
+                          <a:solidFill>
+                            <a:srgbClr val="1E293B"/>
+                          </a:solidFill>
+                        </a:rPr>
+                        <a:t>アカウント未作成の場合は作成</a:t>
+                      </a:r>
+                    </a:p>
+                  </a:txBody>
+                  <a:tcPr>
+                    <a:solidFill>
+                      <a:srgbClr val="F8FAFC"/>
+                    </a:solidFill>
+                  </a:tcPr>
+                </a:tc>
+              </a:tr>
+              <a:tr h="749807">
+                <a:tc>
+                  <a:txBody>
+                    <a:bodyPr wrap="square"/>
+                    <a:lstStyle/>
+                    <a:p>
+                      <a:pPr algn="l"/>
+                      <a:r>
+                        <a:rPr sz="1100">
+                          <a:solidFill>
+                            <a:srgbClr val="1E293B"/>
+                          </a:solidFill>
+                        </a:rPr>
+                        <a:t>3 Proプラン確認</a:t>
+                      </a:r>
+                    </a:p>
+                  </a:txBody>
+                  <a:tcPr/>
+                </a:tc>
+                <a:tc>
+                  <a:txBody>
+                    <a:bodyPr wrap="square"/>
+                    <a:lstStyle/>
+                    <a:p>
+                      <a:pPr algn="l"/>
+                      <a:r>
+                        <a:rPr sz="1100">
+                          <a:solidFill>
+                            <a:srgbClr val="1E293B"/>
+                          </a:solidFill>
+                        </a:rPr>
+                        <a:t>設定画面またはプラン情報でProプラン以上が有効か確認</a:t>
+                      </a:r>
+                    </a:p>
+                  </a:txBody>
+                  <a:tcPr/>
+                </a:tc>
+                <a:tc>
+                  <a:txBody>
+                    <a:bodyPr wrap="square"/>
+                    <a:lstStyle/>
+                    <a:p>
+                      <a:pPr algn="l"/>
+                      <a:r>
+                        <a:rPr sz="1100">
+                          <a:solidFill>
+                            <a:srgbClr val="1E293B"/>
+                          </a:solidFill>
+                        </a:rPr>
+                        <a:t>未加入の場合は当日申し込み</a:t>
+                      </a:r>
+                    </a:p>
+                  </a:txBody>
+                  <a:tcPr/>
+                </a:tc>
+              </a:tr>
+              <a:tr h="749811">
+                <a:tc>
+                  <a:txBody>
+                    <a:bodyPr wrap="square"/>
+                    <a:lstStyle/>
+                    <a:p>
+                      <a:pPr algn="l"/>
+                      <a:r>
+                        <a:rPr sz="1100">
+                          <a:solidFill>
+                            <a:srgbClr val="1E293B"/>
+                          </a:solidFill>
+                        </a:rPr>
+                        <a:t>4 動作テスト</a:t>
+                      </a:r>
+                    </a:p>
+                  </a:txBody>
+                  <a:tcPr>
+                    <a:solidFill>
+                      <a:srgbClr val="F8FAFC"/>
+                    </a:solidFill>
+                  </a:tcPr>
+                </a:tc>
+                <a:tc>
+                  <a:txBody>
+                    <a:bodyPr wrap="square"/>
+                    <a:lstStyle/>
+                    <a:p>
+                      <a:pPr algn="l"/>
+                      <a:r>
+                        <a:rPr sz="1100">
+                          <a:solidFill>
+                            <a:srgbClr val="1E293B"/>
+                          </a:solidFill>
+                        </a:rPr>
+                        <a:t>日本語で「こんにちは、今日はよろしくお願いします」と話しかけて返答が来るまで確認</a:t>
+                      </a:r>
+                    </a:p>
+                  </a:txBody>
+                  <a:tcPr>
+                    <a:solidFill>
+                      <a:srgbClr val="F8FAFC"/>
+                    </a:solidFill>
+                  </a:tcPr>
+                </a:tc>
+                <a:tc>
+                  <a:txBody>
+                    <a:bodyPr wrap="square"/>
+                    <a:lstStyle/>
+                    <a:p>
+                      <a:pPr algn="l"/>
+                      <a:r>
+                        <a:rPr sz="1100">
+                          <a:solidFill>
+                            <a:srgbClr val="1E293B"/>
+                          </a:solidFill>
+                        </a:rPr>
+                        <a:t>アプリ再起動 → 再サインイン</a:t>
+                      </a:r>
+                    </a:p>
+                  </a:txBody>
+                  <a:tcPr>
+                    <a:solidFill>
+                      <a:srgbClr val="F8FAFC"/>
+                    </a:solidFill>
+                  </a:tcPr>
+                </a:tc>
+              </a:tr>
+            </a:tbl>
+          </a:graphicData>
+        </a:graphic>
+      </p:graphicFrame>
+      <p:sp>
+        <p:nvSpPr>
+          <p:cNvPr id="6" name="TextBox 5"/>
+          <p:cNvSpPr txBox="1"/>
+          <p:nvPr/>
+        </p:nvSpPr>
+        <p:spPr>
+          <a:xfrm>
+            <a:off x="457200" y="4681728"/>
+            <a:ext cx="8229600" cy="320040"/>
+          </a:xfrm>
+          <a:prstGeom prst="rect">
+            <a:avLst/>
+          </a:prstGeom>
+          <a:noFill/>
+        </p:spPr>
+        <p:txBody>
+          <a:bodyPr wrap="square">
+            <a:spAutoFit/>
+          </a:bodyPr>
+          <a:lstStyle/>
+          <a:p>
+            <a:pPr algn="l"/>
+            <a:r>
+              <a:rPr sz="1200" b="0" i="1">
+                <a:solidFill>
+                  <a:srgbClr val="64748B"/>
+                </a:solidFill>
+              </a:rPr>
+              <a:t>3名以下なので詰まった方を個別サポートします。遠慮なく声をかけてください</a:t>
             </a:r>
           </a:p>
         </p:txBody>
@@ -4505,7 +4660,7 @@
                   <a:srgbClr val="FFFFFF"/>
                 </a:solidFill>
               </a:rPr>
-              <a:t>応用ワーク</a:t>
+              <a:t>実践ワーク</a:t>
             </a:r>
           </a:p>
         </p:txBody>
@@ -4539,7 +4694,7 @@
                   <a:srgbClr val="93C5FD"/>
                 </a:solidFill>
               </a:rPr>
-              <a:t>[40分]</a:t>
+              <a:t>[52分]</a:t>
             </a:r>
           </a:p>
         </p:txBody>
@@ -4573,7 +4728,7 @@
                   <a:srgbClr val="BFDBFE"/>
                 </a:solidFill>
               </a:rPr>
-              <a:t>CLAUDE.md作成 → テンプレート化 → 自社業務試行</a:t>
+              <a:t>CLAUDE.md作成（PDFコピペ）→ AIトラブル対処（2分）→ 自社業務試行（40分）</a:t>
             </a:r>
           </a:p>
         </p:txBody>
@@ -4668,7 +4823,7 @@
                   <a:srgbClr val="FFFFFF"/>
                 </a:solidFill>
               </a:rPr>
-              <a:t>CLAUDE.md とは — 作成実践</a:t>
+              <a:t>CLAUDE.md とは — PDFひな型からコピペで作成</a:t>
             </a:r>
           </a:p>
         </p:txBody>
@@ -4702,7 +4857,7 @@
                   <a:srgbClr val="93C5FD"/>
                 </a:solidFill>
               </a:rPr>
-              <a:t>[15分]</a:t>
+              <a:t>[10分]</a:t>
             </a:r>
           </a:p>
         </p:txBody>
@@ -5159,7 +5314,7 @@
                   <a:srgbClr val="FFFFFF"/>
                 </a:solidFill>
               </a:rPr>
-              <a:t>テンプレート化 ＆ AIが止まるケースと対処</a:t>
+              <a:t>AIが止まるケースと対処</a:t>
             </a:r>
           </a:p>
         </p:txBody>
@@ -5193,7 +5348,7 @@
                   <a:srgbClr val="93C5FD"/>
                 </a:solidFill>
               </a:rPr>
-              <a:t>[5分 + 5分]</a:t>
+              <a:t>[2分]</a:t>
             </a:r>
           </a:p>
         </p:txBody>
@@ -5220,14 +5375,13 @@
           </a:bodyPr>
           <a:lstStyle/>
           <a:p>
-            <a:pPr algn="l"/>
             <a:r>
               <a:rPr sz="1300" b="1" i="0">
                 <a:solidFill>
                   <a:srgbClr val="1E40AF"/>
                 </a:solidFill>
               </a:rPr>
-              <a:t>テンプレート化とは</a:t>
+              <a:t>止まったらこの7パターンのどれかで回復できます（持ち帰り資料を参照）</a:t>
             </a:r>
           </a:p>
         </p:txBody>
@@ -5260,7 +5414,7 @@
                   <a:srgbClr val="1E293B"/>
                 </a:solidFill>
               </a:rPr>
-              <a:t>・よく使う指示文を記録しておく機能</a:t>
+              <a:t>返答が途中で止まった → 「続けてください」と入力</a:t>
             </a:r>
           </a:p>
           <a:p>
@@ -5270,7 +5424,7 @@
                   <a:srgbClr val="1E293B"/>
                 </a:solidFill>
               </a:rPr>
-              <a:t>・同じ作業を対象を変えて使い回せる</a:t>
+              <a:t>「続けてよいですか？」と聞いてきた → 内容確認してOKなら「はい」</a:t>
             </a:r>
           </a:p>
           <a:p>
@@ -5280,7 +5434,47 @@
                   <a:srgbClr val="1E293B"/>
                 </a:solidFill>
               </a:rPr>
-              <a:t>・CLAUDE.mdに入れておけば名前で呼び出せる</a:t>
+              <a:t>意図と違う処理をした → 「待って」→ 意図を正確に伝え直す</a:t>
+            </a:r>
+          </a:p>
+          <a:p>
+            <a:r>
+              <a:rPr sz="1200">
+                <a:solidFill>
+                  <a:srgbClr val="1E293B"/>
+                </a:solidFill>
+              </a:rPr>
+              <a:t>エラーが出た → メッセージをコピーして「これはどういう意味ですか？」</a:t>
+            </a:r>
+          </a:p>
+          <a:p>
+            <a:r>
+              <a:rPr sz="1200">
+                <a:solidFill>
+                  <a:srgbClr val="1E293B"/>
+                </a:solidFill>
+              </a:rPr>
+              <a:t>返答が遅い・繰り返す → 「まとめてください」→ 新規セッションで継続</a:t>
+            </a:r>
+          </a:p>
+          <a:p>
+            <a:r>
+              <a:rPr sz="1200">
+                <a:solidFill>
+                  <a:srgbClr val="1E293B"/>
+                </a:solidFill>
+              </a:rPr>
+              <a:t>応答しない・フリーズ → 数分待ってアプリ再起動</a:t>
+            </a:r>
+          </a:p>
+          <a:p>
+            <a:r>
+              <a:rPr sz="1200">
+                <a:solidFill>
+                  <a:srgbClr val="1E293B"/>
+                </a:solidFill>
+              </a:rPr>
+              <a:t>どうしてもわからない → ブラウザ版Claude（claude.ai）に状況を説明</a:t>
             </a:r>
           </a:p>
         </p:txBody>
@@ -5687,7 +5881,7 @@
                   <a:srgbClr val="93C5FD"/>
                 </a:solidFill>
               </a:rPr>
-              <a:t>[10分]</a:t>
+              <a:t>[40分]</a:t>
             </a:r>
           </a:p>
         </p:txBody>
@@ -6209,7 +6403,7 @@
                   <a:srgbClr val="93C5FD"/>
                 </a:solidFill>
               </a:rPr>
-              <a:t>[10分]</a:t>
+              <a:t>[6分]</a:t>
             </a:r>
           </a:p>
         </p:txBody>
@@ -9935,7 +10129,7 @@
                   <a:srgbClr val="FFFFFF"/>
                 </a:solidFill>
               </a:rPr>
-              <a:t>セットアップ確認</a:t>
+              <a:t>ユースケース</a:t>
             </a:r>
           </a:p>
         </p:txBody>
@@ -9969,7 +10163,7 @@
                   <a:srgbClr val="93C5FD"/>
                 </a:solidFill>
               </a:rPr>
-              <a:t>[30分]</a:t>
+              <a:t>[10分]</a:t>
             </a:r>
           </a:p>
         </p:txBody>
@@ -10003,7 +10197,7 @@
                   <a:srgbClr val="BFDBFE"/>
                 </a:solidFill>
               </a:rPr>
-              <a:t>デスクトップ版起動・サインイン・動作確認</a:t>
+              <a:t>3つの実用シーンを各3分でデモ体験</a:t>
             </a:r>
           </a:p>
         </p:txBody>
@@ -10098,7 +10292,7 @@
                   <a:srgbClr val="FFFFFF"/>
                 </a:solidFill>
               </a:rPr>
-              <a:t>セットアップ確認 — 全員動作確認まで</a:t>
+              <a:t>ユースケース ①：フォルダ整理</a:t>
             </a:r>
           </a:p>
         </p:txBody>
@@ -10132,354 +10326,54 @@
                   <a:srgbClr val="93C5FD"/>
                 </a:solidFill>
               </a:rPr>
-              <a:t>[30分]</a:t>
-            </a:r>
-          </a:p>
-        </p:txBody>
-      </p:sp>
-      <p:graphicFrame>
-        <p:nvGraphicFramePr>
-          <p:cNvPr id="5" name="Table 4"/>
-          <p:cNvGraphicFramePr>
-            <a:graphicFrameLocks noGrp="1"/>
-          </p:cNvGraphicFramePr>
+              <a:t>[約3分]</a:t>
+            </a:r>
+          </a:p>
+        </p:txBody>
+      </p:sp>
+      <p:sp>
+        <p:nvSpPr>
+          <p:cNvPr id="5" name="Rectangle 4"/>
+          <p:cNvSpPr/>
           <p:nvPr/>
-        </p:nvGraphicFramePr>
-        <p:xfrm>
-          <a:off x="457200" y="777240"/>
-          <a:ext cx="8229600" cy="3749039"/>
-        </p:xfrm>
-        <a:graphic>
-          <a:graphicData uri="http://schemas.openxmlformats.org/drawingml/2006/table">
-            <a:tbl>
-              <a:tblPr firstRow="1" bandRow="1">
-                <a:tableStyleId>{5C22544A-7EE6-4342-B048-85BDC9FD1C3A}</a:tableStyleId>
-              </a:tblPr>
-              <a:tblGrid>
-                <a:gridCol w="1645920"/>
-                <a:gridCol w="4279392"/>
-                <a:gridCol w="2304288"/>
-              </a:tblGrid>
-              <a:tr h="749807">
-                <a:tc>
-                  <a:txBody>
-                    <a:bodyPr wrap="square"/>
-                    <a:lstStyle/>
-                    <a:p>
-                      <a:pPr algn="ctr"/>
-                      <a:r>
-                        <a:rPr b="1" sz="1200">
-                          <a:solidFill>
-                            <a:srgbClr val="FFFFFF"/>
-                          </a:solidFill>
-                        </a:rPr>
-                        <a:t>Step</a:t>
-                      </a:r>
-                    </a:p>
-                  </a:txBody>
-                  <a:tcPr>
-                    <a:solidFill>
-                      <a:srgbClr val="1E40AF"/>
-                    </a:solidFill>
-                  </a:tcPr>
-                </a:tc>
-                <a:tc>
-                  <a:txBody>
-                    <a:bodyPr wrap="square"/>
-                    <a:lstStyle/>
-                    <a:p>
-                      <a:pPr algn="ctr"/>
-                      <a:r>
-                        <a:rPr b="1" sz="1200">
-                          <a:solidFill>
-                            <a:srgbClr val="FFFFFF"/>
-                          </a:solidFill>
-                        </a:rPr>
-                        <a:t>内容</a:t>
-                      </a:r>
-                    </a:p>
-                  </a:txBody>
-                  <a:tcPr>
-                    <a:solidFill>
-                      <a:srgbClr val="1E40AF"/>
-                    </a:solidFill>
-                  </a:tcPr>
-                </a:tc>
-                <a:tc>
-                  <a:txBody>
-                    <a:bodyPr wrap="square"/>
-                    <a:lstStyle/>
-                    <a:p>
-                      <a:pPr algn="ctr"/>
-                      <a:r>
-                        <a:rPr b="1" sz="1200">
-                          <a:solidFill>
-                            <a:srgbClr val="FFFFFF"/>
-                          </a:solidFill>
-                        </a:rPr>
-                        <a:t>詰まったら</a:t>
-                      </a:r>
-                    </a:p>
-                  </a:txBody>
-                  <a:tcPr>
-                    <a:solidFill>
-                      <a:srgbClr val="1E40AF"/>
-                    </a:solidFill>
-                  </a:tcPr>
-                </a:tc>
-              </a:tr>
-              <a:tr h="749807">
-                <a:tc>
-                  <a:txBody>
-                    <a:bodyPr wrap="square"/>
-                    <a:lstStyle/>
-                    <a:p>
-                      <a:pPr algn="l"/>
-                      <a:r>
-                        <a:rPr sz="1100">
-                          <a:solidFill>
-                            <a:srgbClr val="1E293B"/>
-                          </a:solidFill>
-                        </a:rPr>
-                        <a:t>1 起動</a:t>
-                      </a:r>
-                    </a:p>
-                  </a:txBody>
-                  <a:tcPr/>
-                </a:tc>
-                <a:tc>
-                  <a:txBody>
-                    <a:bodyPr wrap="square"/>
-                    <a:lstStyle/>
-                    <a:p>
-                      <a:pPr algn="l"/>
-                      <a:r>
-                        <a:rPr sz="1100">
-                          <a:solidFill>
-                            <a:srgbClr val="1E293B"/>
-                          </a:solidFill>
-                        </a:rPr>
-                        <a:t>Claude Codeデスクトップ版を起動（未インストールの場合はその場でインストール）</a:t>
-                      </a:r>
-                    </a:p>
-                  </a:txBody>
-                  <a:tcPr/>
-                </a:tc>
-                <a:tc>
-                  <a:txBody>
-                    <a:bodyPr wrap="square"/>
-                    <a:lstStyle/>
-                    <a:p>
-                      <a:pPr algn="l"/>
-                      <a:r>
-                        <a:rPr sz="1100">
-                          <a:solidFill>
-                            <a:srgbClr val="1E293B"/>
-                          </a:solidFill>
-                        </a:rPr>
-                        <a:t>講師が個別サポート</a:t>
-                      </a:r>
-                    </a:p>
-                  </a:txBody>
-                  <a:tcPr/>
-                </a:tc>
-              </a:tr>
-              <a:tr h="749807">
-                <a:tc>
-                  <a:txBody>
-                    <a:bodyPr wrap="square"/>
-                    <a:lstStyle/>
-                    <a:p>
-                      <a:pPr algn="l"/>
-                      <a:r>
-                        <a:rPr sz="1100">
-                          <a:solidFill>
-                            <a:srgbClr val="1E293B"/>
-                          </a:solidFill>
-                        </a:rPr>
-                        <a:t>2 サインイン</a:t>
-                      </a:r>
-                    </a:p>
-                  </a:txBody>
-                  <a:tcPr>
-                    <a:solidFill>
-                      <a:srgbClr val="F8FAFC"/>
-                    </a:solidFill>
-                  </a:tcPr>
-                </a:tc>
-                <a:tc>
-                  <a:txBody>
-                    <a:bodyPr wrap="square"/>
-                    <a:lstStyle/>
-                    <a:p>
-                      <a:pPr algn="l"/>
-                      <a:r>
-                        <a:rPr sz="1100">
-                          <a:solidFill>
-                            <a:srgbClr val="1E293B"/>
-                          </a:solidFill>
-                        </a:rPr>
-                        <a:t>AnthropicアカウントでGoogle または メールアドレスでログイン</a:t>
-                      </a:r>
-                    </a:p>
-                  </a:txBody>
-                  <a:tcPr>
-                    <a:solidFill>
-                      <a:srgbClr val="F8FAFC"/>
-                    </a:solidFill>
-                  </a:tcPr>
-                </a:tc>
-                <a:tc>
-                  <a:txBody>
-                    <a:bodyPr wrap="square"/>
-                    <a:lstStyle/>
-                    <a:p>
-                      <a:pPr algn="l"/>
-                      <a:r>
-                        <a:rPr sz="1100">
-                          <a:solidFill>
-                            <a:srgbClr val="1E293B"/>
-                          </a:solidFill>
-                        </a:rPr>
-                        <a:t>アカウント未作成の場合は作成</a:t>
-                      </a:r>
-                    </a:p>
-                  </a:txBody>
-                  <a:tcPr>
-                    <a:solidFill>
-                      <a:srgbClr val="F8FAFC"/>
-                    </a:solidFill>
-                  </a:tcPr>
-                </a:tc>
-              </a:tr>
-              <a:tr h="749807">
-                <a:tc>
-                  <a:txBody>
-                    <a:bodyPr wrap="square"/>
-                    <a:lstStyle/>
-                    <a:p>
-                      <a:pPr algn="l"/>
-                      <a:r>
-                        <a:rPr sz="1100">
-                          <a:solidFill>
-                            <a:srgbClr val="1E293B"/>
-                          </a:solidFill>
-                        </a:rPr>
-                        <a:t>3 Proプラン確認</a:t>
-                      </a:r>
-                    </a:p>
-                  </a:txBody>
-                  <a:tcPr/>
-                </a:tc>
-                <a:tc>
-                  <a:txBody>
-                    <a:bodyPr wrap="square"/>
-                    <a:lstStyle/>
-                    <a:p>
-                      <a:pPr algn="l"/>
-                      <a:r>
-                        <a:rPr sz="1100">
-                          <a:solidFill>
-                            <a:srgbClr val="1E293B"/>
-                          </a:solidFill>
-                        </a:rPr>
-                        <a:t>設定画面またはプラン情報でProプラン以上が有効か確認</a:t>
-                      </a:r>
-                    </a:p>
-                  </a:txBody>
-                  <a:tcPr/>
-                </a:tc>
-                <a:tc>
-                  <a:txBody>
-                    <a:bodyPr wrap="square"/>
-                    <a:lstStyle/>
-                    <a:p>
-                      <a:pPr algn="l"/>
-                      <a:r>
-                        <a:rPr sz="1100">
-                          <a:solidFill>
-                            <a:srgbClr val="1E293B"/>
-                          </a:solidFill>
-                        </a:rPr>
-                        <a:t>未加入の場合は当日申し込み</a:t>
-                      </a:r>
-                    </a:p>
-                  </a:txBody>
-                  <a:tcPr/>
-                </a:tc>
-              </a:tr>
-              <a:tr h="749811">
-                <a:tc>
-                  <a:txBody>
-                    <a:bodyPr wrap="square"/>
-                    <a:lstStyle/>
-                    <a:p>
-                      <a:pPr algn="l"/>
-                      <a:r>
-                        <a:rPr sz="1100">
-                          <a:solidFill>
-                            <a:srgbClr val="1E293B"/>
-                          </a:solidFill>
-                        </a:rPr>
-                        <a:t>4 動作テスト</a:t>
-                      </a:r>
-                    </a:p>
-                  </a:txBody>
-                  <a:tcPr>
-                    <a:solidFill>
-                      <a:srgbClr val="F8FAFC"/>
-                    </a:solidFill>
-                  </a:tcPr>
-                </a:tc>
-                <a:tc>
-                  <a:txBody>
-                    <a:bodyPr wrap="square"/>
-                    <a:lstStyle/>
-                    <a:p>
-                      <a:pPr algn="l"/>
-                      <a:r>
-                        <a:rPr sz="1100">
-                          <a:solidFill>
-                            <a:srgbClr val="1E293B"/>
-                          </a:solidFill>
-                        </a:rPr>
-                        <a:t>日本語で「こんにちは、今日はよろしくお願いします」と話しかけて返答が来るまで確認</a:t>
-                      </a:r>
-                    </a:p>
-                  </a:txBody>
-                  <a:tcPr>
-                    <a:solidFill>
-                      <a:srgbClr val="F8FAFC"/>
-                    </a:solidFill>
-                  </a:tcPr>
-                </a:tc>
-                <a:tc>
-                  <a:txBody>
-                    <a:bodyPr wrap="square"/>
-                    <a:lstStyle/>
-                    <a:p>
-                      <a:pPr algn="l"/>
-                      <a:r>
-                        <a:rPr sz="1100">
-                          <a:solidFill>
-                            <a:srgbClr val="1E293B"/>
-                          </a:solidFill>
-                        </a:rPr>
-                        <a:t>アプリ再起動 → 再サインイン</a:t>
-                      </a:r>
-                    </a:p>
-                  </a:txBody>
-                  <a:tcPr>
-                    <a:solidFill>
-                      <a:srgbClr val="F8FAFC"/>
-                    </a:solidFill>
-                  </a:tcPr>
-                </a:tc>
-              </a:tr>
-            </a:tbl>
-          </a:graphicData>
-        </a:graphic>
-      </p:graphicFrame>
+        </p:nvSpPr>
+        <p:spPr>
+          <a:xfrm>
+            <a:off x="457200" y="777240"/>
+            <a:ext cx="8229600" cy="594360"/>
+          </a:xfrm>
+          <a:prstGeom prst="rect">
+            <a:avLst/>
+          </a:prstGeom>
+          <a:solidFill>
+            <a:srgbClr val="EFF6FF"/>
+          </a:solidFill>
+          <a:ln>
+            <a:noFill/>
+          </a:ln>
+        </p:spPr>
+        <p:style>
+          <a:lnRef idx="1">
+            <a:schemeClr val="accent1"/>
+          </a:lnRef>
+          <a:fillRef idx="3">
+            <a:schemeClr val="accent1"/>
+          </a:fillRef>
+          <a:effectRef idx="2">
+            <a:schemeClr val="accent1"/>
+          </a:effectRef>
+          <a:fontRef idx="minor">
+            <a:schemeClr val="lt1"/>
+          </a:fontRef>
+        </p:style>
+        <p:txBody>
+          <a:bodyPr rtlCol="0" anchor="ctr"/>
+          <a:lstStyle/>
+          <a:p>
+            <a:pPr algn="ctr"/>
+          </a:p>
+        </p:txBody>
+      </p:sp>
       <p:sp>
         <p:nvSpPr>
           <p:cNvPr id="6" name="TextBox 5"/>
@@ -10488,8 +10382,8 @@
         </p:nvSpPr>
         <p:spPr>
           <a:xfrm>
-            <a:off x="457200" y="4681728"/>
-            <a:ext cx="8229600" cy="320040"/>
+            <a:off x="594360" y="841248"/>
+            <a:ext cx="7955280" cy="502920"/>
           </a:xfrm>
           <a:prstGeom prst="rect">
             <a:avLst/>
@@ -10504,12 +10398,157 @@
           <a:p>
             <a:pPr algn="l"/>
             <a:r>
-              <a:rPr sz="1200" b="0" i="1">
+              <a:rPr sz="1400" b="1" i="0">
+                <a:solidFill>
+                  <a:srgbClr val="1E293B"/>
+                </a:solidFill>
+              </a:rPr>
+              <a:t>指示例：「Downloadsにある画像・PDF・Wordを種類ごとにフォルダ分けして」</a:t>
+            </a:r>
+          </a:p>
+        </p:txBody>
+      </p:sp>
+      <p:sp>
+        <p:nvSpPr>
+          <p:cNvPr id="7" name="TextBox 6"/>
+          <p:cNvSpPr txBox="1"/>
+          <p:nvPr/>
+        </p:nvSpPr>
+        <p:spPr>
+          <a:xfrm>
+            <a:off x="457200" y="1508760"/>
+            <a:ext cx="8229600" cy="502920"/>
+          </a:xfrm>
+          <a:prstGeom prst="rect">
+            <a:avLst/>
+          </a:prstGeom>
+          <a:noFill/>
+        </p:spPr>
+        <p:txBody>
+          <a:bodyPr wrap="square">
+            <a:spAutoFit/>
+          </a:bodyPr>
+          <a:lstStyle/>
+          <a:p>
+            <a:pPr algn="l"/>
+            <a:r>
+              <a:rPr sz="1300" b="0" i="1">
                 <a:solidFill>
                   <a:srgbClr val="64748B"/>
                 </a:solidFill>
               </a:rPr>
-              <a:t>3名以下なので詰まった方を個別サポートします。遠慮なく声をかけてください</a:t>
+              <a:t>最初にやる理由：持参PCの自分のフォルダが整理される体験が最もインパクト大でシンプル</a:t>
+            </a:r>
+          </a:p>
+        </p:txBody>
+      </p:sp>
+      <p:sp>
+        <p:nvSpPr>
+          <p:cNvPr id="8" name="TextBox 7"/>
+          <p:cNvSpPr txBox="1"/>
+          <p:nvPr/>
+        </p:nvSpPr>
+        <p:spPr>
+          <a:xfrm>
+            <a:off x="457200" y="2103120"/>
+            <a:ext cx="8229600" cy="502920"/>
+          </a:xfrm>
+          <a:prstGeom prst="rect">
+            <a:avLst/>
+          </a:prstGeom>
+          <a:noFill/>
+        </p:spPr>
+        <p:txBody>
+          <a:bodyPr wrap="square">
+            <a:spAutoFit/>
+          </a:bodyPr>
+          <a:lstStyle/>
+          <a:p>
+            <a:pPr algn="l"/>
+            <a:r>
+              <a:rPr sz="1400" b="0" i="0">
+                <a:solidFill>
+                  <a:srgbClr val="1E293B"/>
+                </a:solidFill>
+              </a:rPr>
+              <a:t>Claude Codeが実際にファイルを動かしてくれる様子を確認してください</a:t>
+            </a:r>
+          </a:p>
+        </p:txBody>
+      </p:sp>
+      <p:sp>
+        <p:nvSpPr>
+          <p:cNvPr id="9" name="Rectangle 8"/>
+          <p:cNvSpPr/>
+          <p:nvPr/>
+        </p:nvSpPr>
+        <p:spPr>
+          <a:xfrm>
+            <a:off x="457200" y="2788920"/>
+            <a:ext cx="8229600" cy="594360"/>
+          </a:xfrm>
+          <a:prstGeom prst="rect">
+            <a:avLst/>
+          </a:prstGeom>
+          <a:solidFill>
+            <a:srgbClr val="EFF6FF"/>
+          </a:solidFill>
+          <a:ln>
+            <a:noFill/>
+          </a:ln>
+        </p:spPr>
+        <p:style>
+          <a:lnRef idx="1">
+            <a:schemeClr val="accent1"/>
+          </a:lnRef>
+          <a:fillRef idx="3">
+            <a:schemeClr val="accent1"/>
+          </a:fillRef>
+          <a:effectRef idx="2">
+            <a:schemeClr val="accent1"/>
+          </a:effectRef>
+          <a:fontRef idx="minor">
+            <a:schemeClr val="lt1"/>
+          </a:fontRef>
+        </p:style>
+        <p:txBody>
+          <a:bodyPr rtlCol="0" anchor="ctr"/>
+          <a:lstStyle/>
+          <a:p>
+            <a:pPr algn="ctr"/>
+          </a:p>
+        </p:txBody>
+      </p:sp>
+      <p:sp>
+        <p:nvSpPr>
+          <p:cNvPr id="10" name="TextBox 9"/>
+          <p:cNvSpPr txBox="1"/>
+          <p:nvPr/>
+        </p:nvSpPr>
+        <p:spPr>
+          <a:xfrm>
+            <a:off x="594360" y="2852928"/>
+            <a:ext cx="7955280" cy="502920"/>
+          </a:xfrm>
+          <a:prstGeom prst="rect">
+            <a:avLst/>
+          </a:prstGeom>
+          <a:noFill/>
+        </p:spPr>
+        <p:txBody>
+          <a:bodyPr wrap="square">
+            <a:spAutoFit/>
+          </a:bodyPr>
+          <a:lstStyle/>
+          <a:p>
+            <a:pPr algn="l"/>
+            <a:r>
+              <a:rPr sz="1300" b="0" i="0">
+                <a:solidFill>
+                  <a:srgbClr val="1E40AF"/>
+                </a:solidFill>
+              </a:rPr>
+              <a:t>確認ポイント：実行前に「どのフォルダを作りますか？」と確認してから動くかどうか</a:t>
             </a:r>
           </a:p>
         </p:txBody>

--- a/00-01_han-ai/training-materials/course05_jissen_claude_code.pptx
+++ b/00-01_han-ai/training-materials/course05_jissen_claude_code.pptx
@@ -3102,7 +3102,7 @@
     <p:bg>
       <p:bgPr>
         <a:solidFill>
-          <a:srgbClr val="1E40AF"/>
+          <a:srgbClr val="1C1C1C"/>
         </a:solidFill>
         <a:effectLst/>
       </p:bgPr>
@@ -3183,7 +3183,7 @@
             <a:r>
               <a:rPr sz="1300" b="0" i="0">
                 <a:solidFill>
-                  <a:srgbClr val="93C5FD"/>
+                  <a:srgbClr val="DA7756"/>
                 </a:solidFill>
               </a:rPr>
               <a:t>ざつね屋</a:t>
@@ -3217,7 +3217,7 @@
             <a:r>
               <a:rPr sz="1800" b="0" i="0">
                 <a:solidFill>
-                  <a:srgbClr val="BFDBFE"/>
+                  <a:srgbClr val="B8A99A"/>
                 </a:solidFill>
               </a:rPr>
               <a:t>コース ⑤</a:t>
@@ -3285,7 +3285,7 @@
             <a:r>
               <a:rPr sz="1500" b="0" i="0">
                 <a:solidFill>
-                  <a:srgbClr val="BFDBFE"/>
+                  <a:srgbClr val="B8A99A"/>
                 </a:solidFill>
               </a:rPr>
               <a:t>コード経験不要。社内の困りごとをAIで解決する仕組みを自分で作る 120分</a:t>
@@ -3319,7 +3319,7 @@
             <a:r>
               <a:rPr sz="1300" b="0" i="0">
                 <a:solidFill>
-                  <a:srgbClr val="93C5FD"/>
+                  <a:srgbClr val="DA7756"/>
                 </a:solidFill>
               </a:rPr>
               <a:t>ツール：Claude Code デスクトップ版　｜　定員：個別1名 / グループMAX3名</a:t>
@@ -3338,6 +3338,14 @@
 <file path=ppt/slides/slide10.xml><?xml version="1.0" encoding="utf-8"?>
 <p:sld xmlns:a="http://schemas.openxmlformats.org/drawingml/2006/main" xmlns:p="http://schemas.openxmlformats.org/presentationml/2006/main" xmlns:r="http://schemas.openxmlformats.org/officeDocument/2006/relationships">
   <p:cSld>
+    <p:bg>
+      <p:bgPr>
+        <a:solidFill>
+          <a:srgbClr val="1C1C1C"/>
+        </a:solidFill>
+        <a:effectLst/>
+      </p:bgPr>
+    </p:bg>
     <p:spTree>
       <p:nvGrpSpPr>
         <p:cNvPr id="1" name=""/>
@@ -3360,7 +3368,7 @@
             <a:avLst/>
           </a:prstGeom>
           <a:solidFill>
-            <a:srgbClr val="1E40AF"/>
+            <a:srgbClr val="252525"/>
           </a:solidFill>
           <a:ln>
             <a:noFill/>
@@ -3448,7 +3456,7 @@
             <a:r>
               <a:rPr sz="1200" b="0" i="0">
                 <a:solidFill>
-                  <a:srgbClr val="93C5FD"/>
+                  <a:srgbClr val="DA7756"/>
                 </a:solidFill>
               </a:rPr>
               <a:t>[各約3分]</a:t>
@@ -3497,7 +3505,7 @@
                   </a:txBody>
                   <a:tcPr>
                     <a:solidFill>
-                      <a:srgbClr val="1E40AF"/>
+                      <a:srgbClr val="1C1C1C"/>
                     </a:solidFill>
                   </a:tcPr>
                 </a:tc>
@@ -3519,7 +3527,7 @@
                   </a:txBody>
                   <a:tcPr>
                     <a:solidFill>
-                      <a:srgbClr val="1E40AF"/>
+                      <a:srgbClr val="1C1C1C"/>
                     </a:solidFill>
                   </a:tcPr>
                 </a:tc>
@@ -3534,7 +3542,7 @@
                       <a:r>
                         <a:rPr sz="1100">
                           <a:solidFill>
-                            <a:srgbClr val="1E293B"/>
+                            <a:srgbClr val="EEEEEE"/>
                           </a:solidFill>
                         </a:rPr>
                         <a:t>② CSV・データ整形</a:t>
@@ -3552,7 +3560,7 @@
                       <a:r>
                         <a:rPr sz="1100">
                           <a:solidFill>
-                            <a:srgbClr val="1E293B"/>
+                            <a:srgbClr val="EEEEEE"/>
                           </a:solidFill>
                         </a:rPr>
                         <a:t>「顧客リストから氏名・メールを抜き出して50音順に並べ直して」</a:t>
@@ -3572,7 +3580,7 @@
                       <a:r>
                         <a:rPr sz="1100">
                           <a:solidFill>
-                            <a:srgbClr val="1E293B"/>
+                            <a:srgbClr val="EEEEEE"/>
                           </a:solidFill>
                         </a:rPr>
                         <a:t>③ 定型文書の一括生成</a:t>
@@ -3594,7 +3602,7 @@
                       <a:r>
                         <a:rPr sz="1100">
                           <a:solidFill>
-                            <a:srgbClr val="1E293B"/>
+                            <a:srgbClr val="EEEEEE"/>
                           </a:solidFill>
                         </a:rPr>
                         <a:t>「このリストの各社名に向けた個別のお礼メールをテキストファイルで作って」</a:t>
@@ -3638,7 +3646,7 @@
             <a:r>
               <a:rPr sz="1400" b="1" i="0">
                 <a:solidFill>
-                  <a:srgbClr val="1E40AF"/>
+                  <a:srgbClr val="1C1C1C"/>
                 </a:solidFill>
               </a:rPr>
               <a:t>3つのユースケースで共通していること</a:t>
@@ -3661,7 +3669,7 @@
             <a:avLst/>
           </a:prstGeom>
           <a:solidFill>
-            <a:srgbClr val="EFF6FF"/>
+            <a:srgbClr val="2F2F2F"/>
           </a:solidFill>
           <a:ln>
             <a:noFill/>
@@ -3715,7 +3723,7 @@
             <a:r>
               <a:rPr sz="1300" b="1" i="0">
                 <a:solidFill>
-                  <a:srgbClr val="1E293B"/>
+                  <a:srgbClr val="EEEEEE"/>
                 </a:solidFill>
               </a:rPr>
               <a:t>「繰り返し作業」を自動化している。一度指示を覚えれば次回は数秒で完了する</a:t>
@@ -3737,7 +3745,7 @@
     <p:bg>
       <p:bgPr>
         <a:solidFill>
-          <a:srgbClr val="1E40AF"/>
+          <a:srgbClr val="1C1C1C"/>
         </a:solidFill>
         <a:effectLst/>
       </p:bgPr>
@@ -3886,7 +3894,7 @@
             <a:r>
               <a:rPr sz="1400" b="0" i="0">
                 <a:solidFill>
-                  <a:srgbClr val="93C5FD"/>
+                  <a:srgbClr val="DA7756"/>
                 </a:solidFill>
               </a:rPr>
               <a:t>[20分]</a:t>
@@ -3920,7 +3928,7 @@
             <a:r>
               <a:rPr sz="1500" b="0" i="0">
                 <a:solidFill>
-                  <a:srgbClr val="BFDBFE"/>
+                  <a:srgbClr val="B8A99A"/>
                 </a:solidFill>
               </a:rPr>
               <a:t>デスクトップ版起動・サインイン・動作確認</a:t>
@@ -3939,6 +3947,14 @@
 <file path=ppt/slides/slide12.xml><?xml version="1.0" encoding="utf-8"?>
 <p:sld xmlns:a="http://schemas.openxmlformats.org/drawingml/2006/main" xmlns:p="http://schemas.openxmlformats.org/presentationml/2006/main" xmlns:r="http://schemas.openxmlformats.org/officeDocument/2006/relationships">
   <p:cSld>
+    <p:bg>
+      <p:bgPr>
+        <a:solidFill>
+          <a:srgbClr val="1C1C1C"/>
+        </a:solidFill>
+        <a:effectLst/>
+      </p:bgPr>
+    </p:bg>
     <p:spTree>
       <p:nvGrpSpPr>
         <p:cNvPr id="1" name=""/>
@@ -3961,7 +3977,7 @@
             <a:avLst/>
           </a:prstGeom>
           <a:solidFill>
-            <a:srgbClr val="1E40AF"/>
+            <a:srgbClr val="252525"/>
           </a:solidFill>
           <a:ln>
             <a:noFill/>
@@ -4049,7 +4065,7 @@
             <a:r>
               <a:rPr sz="1200" b="0" i="0">
                 <a:solidFill>
-                  <a:srgbClr val="93C5FD"/>
+                  <a:srgbClr val="DA7756"/>
                 </a:solidFill>
               </a:rPr>
               <a:t>[20分]</a:t>
@@ -4099,7 +4115,7 @@
                   </a:txBody>
                   <a:tcPr>
                     <a:solidFill>
-                      <a:srgbClr val="1E40AF"/>
+                      <a:srgbClr val="1C1C1C"/>
                     </a:solidFill>
                   </a:tcPr>
                 </a:tc>
@@ -4121,7 +4137,7 @@
                   </a:txBody>
                   <a:tcPr>
                     <a:solidFill>
-                      <a:srgbClr val="1E40AF"/>
+                      <a:srgbClr val="1C1C1C"/>
                     </a:solidFill>
                   </a:tcPr>
                 </a:tc>
@@ -4143,7 +4159,7 @@
                   </a:txBody>
                   <a:tcPr>
                     <a:solidFill>
-                      <a:srgbClr val="1E40AF"/>
+                      <a:srgbClr val="1C1C1C"/>
                     </a:solidFill>
                   </a:tcPr>
                 </a:tc>
@@ -4158,7 +4174,7 @@
                       <a:r>
                         <a:rPr sz="1100">
                           <a:solidFill>
-                            <a:srgbClr val="1E293B"/>
+                            <a:srgbClr val="EEEEEE"/>
                           </a:solidFill>
                         </a:rPr>
                         <a:t>1 起動</a:t>
@@ -4176,7 +4192,7 @@
                       <a:r>
                         <a:rPr sz="1100">
                           <a:solidFill>
-                            <a:srgbClr val="1E293B"/>
+                            <a:srgbClr val="EEEEEE"/>
                           </a:solidFill>
                         </a:rPr>
                         <a:t>Claude Codeデスクトップ版を起動（未インストールの場合はその場でインストール）</a:t>
@@ -4194,7 +4210,7 @@
                       <a:r>
                         <a:rPr sz="1100">
                           <a:solidFill>
-                            <a:srgbClr val="1E293B"/>
+                            <a:srgbClr val="EEEEEE"/>
                           </a:solidFill>
                         </a:rPr>
                         <a:t>講師が個別サポート</a:t>
@@ -4214,7 +4230,7 @@
                       <a:r>
                         <a:rPr sz="1100">
                           <a:solidFill>
-                            <a:srgbClr val="1E293B"/>
+                            <a:srgbClr val="EEEEEE"/>
                           </a:solidFill>
                         </a:rPr>
                         <a:t>2 サインイン</a:t>
@@ -4236,7 +4252,7 @@
                       <a:r>
                         <a:rPr sz="1100">
                           <a:solidFill>
-                            <a:srgbClr val="1E293B"/>
+                            <a:srgbClr val="EEEEEE"/>
                           </a:solidFill>
                         </a:rPr>
                         <a:t>AnthropicアカウントでGoogle または メールアドレスでログイン</a:t>
@@ -4258,7 +4274,7 @@
                       <a:r>
                         <a:rPr sz="1100">
                           <a:solidFill>
-                            <a:srgbClr val="1E293B"/>
+                            <a:srgbClr val="EEEEEE"/>
                           </a:solidFill>
                         </a:rPr>
                         <a:t>アカウント未作成の場合は作成</a:t>
@@ -4282,7 +4298,7 @@
                       <a:r>
                         <a:rPr sz="1100">
                           <a:solidFill>
-                            <a:srgbClr val="1E293B"/>
+                            <a:srgbClr val="EEEEEE"/>
                           </a:solidFill>
                         </a:rPr>
                         <a:t>3 Proプラン確認</a:t>
@@ -4300,7 +4316,7 @@
                       <a:r>
                         <a:rPr sz="1100">
                           <a:solidFill>
-                            <a:srgbClr val="1E293B"/>
+                            <a:srgbClr val="EEEEEE"/>
                           </a:solidFill>
                         </a:rPr>
                         <a:t>設定画面またはプラン情報でProプラン以上が有効か確認</a:t>
@@ -4318,7 +4334,7 @@
                       <a:r>
                         <a:rPr sz="1100">
                           <a:solidFill>
-                            <a:srgbClr val="1E293B"/>
+                            <a:srgbClr val="EEEEEE"/>
                           </a:solidFill>
                         </a:rPr>
                         <a:t>未加入の場合は当日申し込み</a:t>
@@ -4338,7 +4354,7 @@
                       <a:r>
                         <a:rPr sz="1100">
                           <a:solidFill>
-                            <a:srgbClr val="1E293B"/>
+                            <a:srgbClr val="EEEEEE"/>
                           </a:solidFill>
                         </a:rPr>
                         <a:t>4 動作テスト</a:t>
@@ -4360,7 +4376,7 @@
                       <a:r>
                         <a:rPr sz="1100">
                           <a:solidFill>
-                            <a:srgbClr val="1E293B"/>
+                            <a:srgbClr val="EEEEEE"/>
                           </a:solidFill>
                         </a:rPr>
                         <a:t>日本語で「こんにちは、今日はよろしくお願いします」と話しかけて返答が来るまで確認</a:t>
@@ -4382,7 +4398,7 @@
                       <a:r>
                         <a:rPr sz="1100">
                           <a:solidFill>
-                            <a:srgbClr val="1E293B"/>
+                            <a:srgbClr val="EEEEEE"/>
                           </a:solidFill>
                         </a:rPr>
                         <a:t>アプリ再起動 → 再サインイン</a:t>
@@ -4448,7 +4464,7 @@
     <p:bg>
       <p:bgPr>
         <a:solidFill>
-          <a:srgbClr val="1E40AF"/>
+          <a:srgbClr val="1C1C1C"/>
         </a:solidFill>
         <a:effectLst/>
       </p:bgPr>
@@ -4486,7 +4502,7 @@
             <a:r>
               <a:rPr sz="4000" b="1" i="0">
                 <a:solidFill>
-                  <a:srgbClr val="BFDBFE"/>
+                  <a:srgbClr val="B8A99A"/>
                 </a:solidFill>
               </a:rPr>
               <a:t>- 休憩 -</a:t>
@@ -4520,7 +4536,7 @@
             <a:r>
               <a:rPr sz="1800" b="0" i="0">
                 <a:solidFill>
-                  <a:srgbClr val="93C5FD"/>
+                  <a:srgbClr val="DA7756"/>
                 </a:solidFill>
               </a:rPr>
               <a:t>5〜10分</a:t>
@@ -4542,7 +4558,7 @@
     <p:bg>
       <p:bgPr>
         <a:solidFill>
-          <a:srgbClr val="1E40AF"/>
+          <a:srgbClr val="1C1C1C"/>
         </a:solidFill>
         <a:effectLst/>
       </p:bgPr>
@@ -4691,7 +4707,7 @@
             <a:r>
               <a:rPr sz="1400" b="0" i="0">
                 <a:solidFill>
-                  <a:srgbClr val="93C5FD"/>
+                  <a:srgbClr val="DA7756"/>
                 </a:solidFill>
               </a:rPr>
               <a:t>[52分]</a:t>
@@ -4725,7 +4741,7 @@
             <a:r>
               <a:rPr sz="1500" b="0" i="0">
                 <a:solidFill>
-                  <a:srgbClr val="BFDBFE"/>
+                  <a:srgbClr val="B8A99A"/>
                 </a:solidFill>
               </a:rPr>
               <a:t>CLAUDE.md作成（PDFコピペ）→ AIトラブル対処（2分）→ 自社業務試行（40分）</a:t>
@@ -4744,6 +4760,14 @@
 <file path=ppt/slides/slide15.xml><?xml version="1.0" encoding="utf-8"?>
 <p:sld xmlns:a="http://schemas.openxmlformats.org/drawingml/2006/main" xmlns:p="http://schemas.openxmlformats.org/presentationml/2006/main" xmlns:r="http://schemas.openxmlformats.org/officeDocument/2006/relationships">
   <p:cSld>
+    <p:bg>
+      <p:bgPr>
+        <a:solidFill>
+          <a:srgbClr val="1C1C1C"/>
+        </a:solidFill>
+        <a:effectLst/>
+      </p:bgPr>
+    </p:bg>
     <p:spTree>
       <p:nvGrpSpPr>
         <p:cNvPr id="1" name=""/>
@@ -4766,7 +4790,7 @@
             <a:avLst/>
           </a:prstGeom>
           <a:solidFill>
-            <a:srgbClr val="1E40AF"/>
+            <a:srgbClr val="252525"/>
           </a:solidFill>
           <a:ln>
             <a:noFill/>
@@ -4854,7 +4878,7 @@
             <a:r>
               <a:rPr sz="1200" b="0" i="0">
                 <a:solidFill>
-                  <a:srgbClr val="93C5FD"/>
+                  <a:srgbClr val="DA7756"/>
                 </a:solidFill>
               </a:rPr>
               <a:t>[10分]</a:t>
@@ -4903,7 +4927,7 @@
                   </a:txBody>
                   <a:tcPr>
                     <a:solidFill>
-                      <a:srgbClr val="1E40AF"/>
+                      <a:srgbClr val="1C1C1C"/>
                     </a:solidFill>
                   </a:tcPr>
                 </a:tc>
@@ -4925,7 +4949,7 @@
                   </a:txBody>
                   <a:tcPr>
                     <a:solidFill>
-                      <a:srgbClr val="1E40AF"/>
+                      <a:srgbClr val="1C1C1C"/>
                     </a:solidFill>
                   </a:tcPr>
                 </a:tc>
@@ -4940,7 +4964,7 @@
                       <a:r>
                         <a:rPr sz="1100">
                           <a:solidFill>
-                            <a:srgbClr val="1E293B"/>
+                            <a:srgbClr val="EEEEEE"/>
                           </a:solidFill>
                         </a:rPr>
                         <a:t>事業者情報</a:t>
@@ -4958,7 +4982,7 @@
                       <a:r>
                         <a:rPr sz="1100">
                           <a:solidFill>
-                            <a:srgbClr val="1E293B"/>
+                            <a:srgbClr val="EEEEEE"/>
                           </a:solidFill>
                         </a:rPr>
                         <a:t>会社名・業種・拠点</a:t>
@@ -4978,7 +5002,7 @@
                       <a:r>
                         <a:rPr sz="1100">
                           <a:solidFill>
-                            <a:srgbClr val="1E293B"/>
+                            <a:srgbClr val="EEEEEE"/>
                           </a:solidFill>
                         </a:rPr>
                         <a:t>出力ルール</a:t>
@@ -5000,7 +5024,7 @@
                       <a:r>
                         <a:rPr sz="1100">
                           <a:solidFill>
-                            <a:srgbClr val="1E293B"/>
+                            <a:srgbClr val="EEEEEE"/>
                           </a:solidFill>
                         </a:rPr>
                         <a:t>「出力は必ず日本語で」「箇条書き優先」</a:t>
@@ -5024,7 +5048,7 @@
                       <a:r>
                         <a:rPr sz="1100">
                           <a:solidFill>
-                            <a:srgbClr val="1E293B"/>
+                            <a:srgbClr val="EEEEEE"/>
                           </a:solidFill>
                         </a:rPr>
                         <a:t>保存先</a:t>
@@ -5042,7 +5066,7 @@
                       <a:r>
                         <a:rPr sz="1100">
                           <a:solidFill>
-                            <a:srgbClr val="1E293B"/>
+                            <a:srgbClr val="EEEEEE"/>
                           </a:solidFill>
                         </a:rPr>
                         <a:t>「ファイルはDesktopに保存すること」</a:t>
@@ -5062,7 +5086,7 @@
                       <a:r>
                         <a:rPr sz="1100">
                           <a:solidFill>
-                            <a:srgbClr val="1E293B"/>
+                            <a:srgbClr val="EEEEEE"/>
                           </a:solidFill>
                         </a:rPr>
                         <a:t>禁止事項</a:t>
@@ -5084,7 +5108,7 @@
                       <a:r>
                         <a:rPr sz="1100">
                           <a:solidFill>
-                            <a:srgbClr val="1E293B"/>
+                            <a:srgbClr val="EEEEEE"/>
                           </a:solidFill>
                         </a:rPr>
                         <a:t>「個人情報・機密情報は扱わない」</a:t>
@@ -5108,7 +5132,7 @@
                       <a:r>
                         <a:rPr sz="1100">
                           <a:solidFill>
-                            <a:srgbClr val="1E293B"/>
+                            <a:srgbClr val="EEEEEE"/>
                           </a:solidFill>
                         </a:rPr>
                         <a:t>よく使う形式</a:t>
@@ -5126,7 +5150,7 @@
                       <a:r>
                         <a:rPr sz="1100">
                           <a:solidFill>
-                            <a:srgbClr val="1E293B"/>
+                            <a:srgbClr val="EEEEEE"/>
                           </a:solidFill>
                         </a:rPr>
                         <a:t>「文書はWord(.docx)・データはCSVで出力」</a:t>
@@ -5146,7 +5170,7 @@
                       <a:r>
                         <a:rPr sz="1100">
                           <a:solidFill>
-                            <a:srgbClr val="1E293B"/>
+                            <a:srgbClr val="EEEEEE"/>
                           </a:solidFill>
                         </a:rPr>
                         <a:t>口調</a:t>
@@ -5168,7 +5192,7 @@
                       <a:r>
                         <a:rPr sz="1100">
                           <a:solidFill>
-                            <a:srgbClr val="1E293B"/>
+                            <a:srgbClr val="EEEEEE"/>
                           </a:solidFill>
                         </a:rPr>
                         <a:t>「敬語・ですます調で出力」</a:t>
@@ -5192,7 +5216,7 @@
                       <a:r>
                         <a:rPr sz="1100">
                           <a:solidFill>
-                            <a:srgbClr val="1E293B"/>
+                            <a:srgbClr val="EEEEEE"/>
                           </a:solidFill>
                         </a:rPr>
                         <a:t>ハルシネーション対策</a:t>
@@ -5210,7 +5234,7 @@
                       <a:r>
                         <a:rPr sz="1100">
                           <a:solidFill>
-                            <a:srgbClr val="1E293B"/>
+                            <a:srgbClr val="EEEEEE"/>
                           </a:solidFill>
                         </a:rPr>
                         <a:t>「わからない場合は作業を止めて確認すること」「実行前に何をするか説明してから動くこと」</a:t>
@@ -5235,6 +5259,14 @@
 <file path=ppt/slides/slide16.xml><?xml version="1.0" encoding="utf-8"?>
 <p:sld xmlns:a="http://schemas.openxmlformats.org/drawingml/2006/main" xmlns:p="http://schemas.openxmlformats.org/presentationml/2006/main" xmlns:r="http://schemas.openxmlformats.org/officeDocument/2006/relationships">
   <p:cSld>
+    <p:bg>
+      <p:bgPr>
+        <a:solidFill>
+          <a:srgbClr val="1C1C1C"/>
+        </a:solidFill>
+        <a:effectLst/>
+      </p:bgPr>
+    </p:bg>
     <p:spTree>
       <p:nvGrpSpPr>
         <p:cNvPr id="1" name=""/>
@@ -5257,7 +5289,7 @@
             <a:avLst/>
           </a:prstGeom>
           <a:solidFill>
-            <a:srgbClr val="1E40AF"/>
+            <a:srgbClr val="252525"/>
           </a:solidFill>
           <a:ln>
             <a:noFill/>
@@ -5345,7 +5377,7 @@
             <a:r>
               <a:rPr sz="1200" b="0" i="0">
                 <a:solidFill>
-                  <a:srgbClr val="93C5FD"/>
+                  <a:srgbClr val="DA7756"/>
                 </a:solidFill>
               </a:rPr>
               <a:t>[2分]</a:t>
@@ -5378,7 +5410,7 @@
             <a:r>
               <a:rPr sz="1300" b="1" i="0">
                 <a:solidFill>
-                  <a:srgbClr val="1E40AF"/>
+                  <a:srgbClr val="1C1C1C"/>
                 </a:solidFill>
               </a:rPr>
               <a:t>止まったらこの7パターンのどれかで回復できます（持ち帰り資料を参照）</a:t>
@@ -5411,7 +5443,7 @@
             <a:r>
               <a:rPr sz="1200">
                 <a:solidFill>
-                  <a:srgbClr val="1E293B"/>
+                  <a:srgbClr val="EEEEEE"/>
                 </a:solidFill>
               </a:rPr>
               <a:t>返答が途中で止まった → 「続けてください」と入力</a:t>
@@ -5421,7 +5453,7 @@
             <a:r>
               <a:rPr sz="1200">
                 <a:solidFill>
-                  <a:srgbClr val="1E293B"/>
+                  <a:srgbClr val="EEEEEE"/>
                 </a:solidFill>
               </a:rPr>
               <a:t>「続けてよいですか？」と聞いてきた → 内容確認してOKなら「はい」</a:t>
@@ -5431,7 +5463,7 @@
             <a:r>
               <a:rPr sz="1200">
                 <a:solidFill>
-                  <a:srgbClr val="1E293B"/>
+                  <a:srgbClr val="EEEEEE"/>
                 </a:solidFill>
               </a:rPr>
               <a:t>意図と違う処理をした → 「待って」→ 意図を正確に伝え直す</a:t>
@@ -5441,7 +5473,7 @@
             <a:r>
               <a:rPr sz="1200">
                 <a:solidFill>
-                  <a:srgbClr val="1E293B"/>
+                  <a:srgbClr val="EEEEEE"/>
                 </a:solidFill>
               </a:rPr>
               <a:t>エラーが出た → メッセージをコピーして「これはどういう意味ですか？」</a:t>
@@ -5451,7 +5483,7 @@
             <a:r>
               <a:rPr sz="1200">
                 <a:solidFill>
-                  <a:srgbClr val="1E293B"/>
+                  <a:srgbClr val="EEEEEE"/>
                 </a:solidFill>
               </a:rPr>
               <a:t>返答が遅い・繰り返す → 「まとめてください」→ 新規セッションで継続</a:t>
@@ -5461,7 +5493,7 @@
             <a:r>
               <a:rPr sz="1200">
                 <a:solidFill>
-                  <a:srgbClr val="1E293B"/>
+                  <a:srgbClr val="EEEEEE"/>
                 </a:solidFill>
               </a:rPr>
               <a:t>応答しない・フリーズ → 数分待ってアプリ再起動</a:t>
@@ -5471,7 +5503,7 @@
             <a:r>
               <a:rPr sz="1200">
                 <a:solidFill>
-                  <a:srgbClr val="1E293B"/>
+                  <a:srgbClr val="EEEEEE"/>
                 </a:solidFill>
               </a:rPr>
               <a:t>どうしてもわからない → ブラウザ版Claude（claude.ai）に状況を説明</a:t>
@@ -5520,7 +5552,7 @@
                   </a:txBody>
                   <a:tcPr>
                     <a:solidFill>
-                      <a:srgbClr val="1E40AF"/>
+                      <a:srgbClr val="1C1C1C"/>
                     </a:solidFill>
                   </a:tcPr>
                 </a:tc>
@@ -5542,7 +5574,7 @@
                   </a:txBody>
                   <a:tcPr>
                     <a:solidFill>
-                      <a:srgbClr val="1E40AF"/>
+                      <a:srgbClr val="1C1C1C"/>
                     </a:solidFill>
                   </a:tcPr>
                 </a:tc>
@@ -5557,7 +5589,7 @@
                       <a:r>
                         <a:rPr sz="1100">
                           <a:solidFill>
-                            <a:srgbClr val="1E293B"/>
+                            <a:srgbClr val="EEEEEE"/>
                           </a:solidFill>
                         </a:rPr>
                         <a:t>返答が途中で止まった</a:t>
@@ -5575,7 +5607,7 @@
                       <a:r>
                         <a:rPr sz="1100">
                           <a:solidFill>
-                            <a:srgbClr val="1E293B"/>
+                            <a:srgbClr val="EEEEEE"/>
                           </a:solidFill>
                         </a:rPr>
                         <a:t>「続けてください」と入力</a:t>
@@ -5595,7 +5627,7 @@
                       <a:r>
                         <a:rPr sz="1100">
                           <a:solidFill>
-                            <a:srgbClr val="1E293B"/>
+                            <a:srgbClr val="EEEEEE"/>
                           </a:solidFill>
                         </a:rPr>
                         <a:t>意図と違う処理をした</a:t>
@@ -5617,7 +5649,7 @@
                       <a:r>
                         <a:rPr sz="1100">
                           <a:solidFill>
-                            <a:srgbClr val="1E293B"/>
+                            <a:srgbClr val="EEEEEE"/>
                           </a:solidFill>
                         </a:rPr>
                         <a:t>「待って」と入力 → 意図を正確に伝え直す</a:t>
@@ -5641,7 +5673,7 @@
                       <a:r>
                         <a:rPr sz="1100">
                           <a:solidFill>
-                            <a:srgbClr val="1E293B"/>
+                            <a:srgbClr val="EEEEEE"/>
                           </a:solidFill>
                         </a:rPr>
                         <a:t>エラーメッセージが出た</a:t>
@@ -5659,7 +5691,7 @@
                       <a:r>
                         <a:rPr sz="1100">
                           <a:solidFill>
-                            <a:srgbClr val="1E293B"/>
+                            <a:srgbClr val="EEEEEE"/>
                           </a:solidFill>
                         </a:rPr>
                         <a:t>メッセージをそのまま貼り付けて「これはどういう意味ですか？」と聞く</a:t>
@@ -5679,7 +5711,7 @@
                       <a:r>
                         <a:rPr sz="1100">
                           <a:solidFill>
-                            <a:srgbClr val="1E293B"/>
+                            <a:srgbClr val="EEEEEE"/>
                           </a:solidFill>
                         </a:rPr>
                         <a:t>コンテキストが長くなった</a:t>
@@ -5701,7 +5733,7 @@
                       <a:r>
                         <a:rPr sz="1100">
                           <a:solidFill>
-                            <a:srgbClr val="1E293B"/>
+                            <a:srgbClr val="EEEEEE"/>
                           </a:solidFill>
                         </a:rPr>
                         <a:t>「ここまでの作業内容をまとめてください」→ 新規セッションに貼り付け</a:t>
@@ -5725,7 +5757,7 @@
                       <a:r>
                         <a:rPr sz="1100">
                           <a:solidFill>
-                            <a:srgbClr val="1E293B"/>
+                            <a:srgbClr val="EEEEEE"/>
                           </a:solidFill>
                         </a:rPr>
                         <a:t>応答しない・フリーズ</a:t>
@@ -5743,7 +5775,7 @@
                       <a:r>
                         <a:rPr sz="1100">
                           <a:solidFill>
-                            <a:srgbClr val="1E293B"/>
+                            <a:srgbClr val="EEEEEE"/>
                           </a:solidFill>
                         </a:rPr>
                         <a:t>数分待ってアプリを再起動して再試行</a:t>
@@ -5768,6 +5800,14 @@
 <file path=ppt/slides/slide17.xml><?xml version="1.0" encoding="utf-8"?>
 <p:sld xmlns:a="http://schemas.openxmlformats.org/drawingml/2006/main" xmlns:p="http://schemas.openxmlformats.org/presentationml/2006/main" xmlns:r="http://schemas.openxmlformats.org/officeDocument/2006/relationships">
   <p:cSld>
+    <p:bg>
+      <p:bgPr>
+        <a:solidFill>
+          <a:srgbClr val="1C1C1C"/>
+        </a:solidFill>
+        <a:effectLst/>
+      </p:bgPr>
+    </p:bg>
     <p:spTree>
       <p:nvGrpSpPr>
         <p:cNvPr id="1" name=""/>
@@ -5790,7 +5830,7 @@
             <a:avLst/>
           </a:prstGeom>
           <a:solidFill>
-            <a:srgbClr val="1E40AF"/>
+            <a:srgbClr val="252525"/>
           </a:solidFill>
           <a:ln>
             <a:noFill/>
@@ -5878,7 +5918,7 @@
             <a:r>
               <a:rPr sz="1200" b="0" i="0">
                 <a:solidFill>
-                  <a:srgbClr val="93C5FD"/>
+                  <a:srgbClr val="DA7756"/>
                 </a:solidFill>
               </a:rPr>
               <a:t>[40分]</a:t>
@@ -5912,7 +5952,7 @@
             <a:r>
               <a:rPr sz="1400" b="0" i="0">
                 <a:solidFill>
-                  <a:srgbClr val="1E293B"/>
+                  <a:srgbClr val="EEEEEE"/>
                 </a:solidFill>
               </a:rPr>
               <a:t>効率化したい作業を Claude Code に相談しながら自由に試してください</a:t>
@@ -5961,7 +6001,7 @@
                   </a:txBody>
                   <a:tcPr>
                     <a:solidFill>
-                      <a:srgbClr val="1E40AF"/>
+                      <a:srgbClr val="1C1C1C"/>
                     </a:solidFill>
                   </a:tcPr>
                 </a:tc>
@@ -5983,7 +6023,7 @@
                   </a:txBody>
                   <a:tcPr>
                     <a:solidFill>
-                      <a:srgbClr val="1E40AF"/>
+                      <a:srgbClr val="1C1C1C"/>
                     </a:solidFill>
                   </a:tcPr>
                 </a:tc>
@@ -5998,7 +6038,7 @@
                       <a:r>
                         <a:rPr sz="1100">
                           <a:solidFill>
-                            <a:srgbClr val="1E293B"/>
+                            <a:srgbClr val="EEEEEE"/>
                           </a:solidFill>
                         </a:rPr>
                         <a:t>テーマが思いつかない</a:t>
@@ -6016,7 +6056,7 @@
                       <a:r>
                         <a:rPr sz="1100">
                           <a:solidFill>
-                            <a:srgbClr val="1E293B"/>
+                            <a:srgbClr val="EEEEEE"/>
                           </a:solidFill>
                         </a:rPr>
                         <a:t>セクション3のユースケースをさらに深める（自社のデータで試す）</a:t>
@@ -6036,7 +6076,7 @@
                       <a:r>
                         <a:rPr sz="1100">
                           <a:solidFill>
-                            <a:srgbClr val="1E293B"/>
+                            <a:srgbClr val="EEEEEE"/>
                           </a:solidFill>
                         </a:rPr>
                         <a:t>エラーが出た</a:t>
@@ -6058,7 +6098,7 @@
                       <a:r>
                         <a:rPr sz="1100">
                           <a:solidFill>
-                            <a:srgbClr val="1E293B"/>
+                            <a:srgbClr val="EEEEEE"/>
                           </a:solidFill>
                         </a:rPr>
                         <a:t>エラーメッセージを貼り付けて「これはどういう意味ですか？」</a:t>
@@ -6082,7 +6122,7 @@
                       <a:r>
                         <a:rPr sz="1100">
                           <a:solidFill>
-                            <a:srgbClr val="1E293B"/>
+                            <a:srgbClr val="EEEEEE"/>
                           </a:solidFill>
                         </a:rPr>
                         <a:t>完成しなくて大丈夫</a:t>
@@ -6100,7 +6140,7 @@
                       <a:r>
                         <a:rPr sz="1100">
                           <a:solidFill>
-                            <a:srgbClr val="1E293B"/>
+                            <a:srgbClr val="EEEEEE"/>
                           </a:solidFill>
                         </a:rPr>
                         <a:t>「設計まで到達できれば十分」— 完成が目標ではない</a:t>
@@ -6120,7 +6160,7 @@
                       <a:r>
                         <a:rPr sz="1100">
                           <a:solidFill>
-                            <a:srgbClr val="1E293B"/>
+                            <a:srgbClr val="EEEEEE"/>
                           </a:solidFill>
                         </a:rPr>
                         <a:t>どうしてもわからない</a:t>
@@ -6142,7 +6182,7 @@
                       <a:r>
                         <a:rPr sz="1100">
                           <a:solidFill>
-                            <a:srgbClr val="1E293B"/>
+                            <a:srgbClr val="EEEEEE"/>
                           </a:solidFill>
                         </a:rPr>
                         <a:t>ブラウザ版Claude（claude.ai）に状況を説明して解決策を聞く</a:t>
@@ -6251,7 +6291,7 @@
     <p:bg>
       <p:bgPr>
         <a:solidFill>
-          <a:srgbClr val="1E40AF"/>
+          <a:srgbClr val="1C1C1C"/>
         </a:solidFill>
         <a:effectLst/>
       </p:bgPr>
@@ -6400,7 +6440,7 @@
             <a:r>
               <a:rPr sz="1400" b="0" i="0">
                 <a:solidFill>
-                  <a:srgbClr val="93C5FD"/>
+                  <a:srgbClr val="DA7756"/>
                 </a:solidFill>
               </a:rPr>
               <a:t>[6分]</a:t>
@@ -6434,7 +6474,7 @@
             <a:r>
               <a:rPr sz="1500" b="0" i="0">
                 <a:solidFill>
-                  <a:srgbClr val="BFDBFE"/>
+                  <a:srgbClr val="B8A99A"/>
                 </a:solidFill>
               </a:rPr>
               <a:t>伴走サービス紹介 ＆ 質疑応答</a:t>
@@ -6453,6 +6493,14 @@
 <file path=ppt/slides/slide19.xml><?xml version="1.0" encoding="utf-8"?>
 <p:sld xmlns:a="http://schemas.openxmlformats.org/drawingml/2006/main" xmlns:p="http://schemas.openxmlformats.org/presentationml/2006/main" xmlns:r="http://schemas.openxmlformats.org/officeDocument/2006/relationships">
   <p:cSld>
+    <p:bg>
+      <p:bgPr>
+        <a:solidFill>
+          <a:srgbClr val="1C1C1C"/>
+        </a:solidFill>
+        <a:effectLst/>
+      </p:bgPr>
+    </p:bg>
     <p:spTree>
       <p:nvGrpSpPr>
         <p:cNvPr id="1" name=""/>
@@ -6475,7 +6523,7 @@
             <a:avLst/>
           </a:prstGeom>
           <a:solidFill>
-            <a:srgbClr val="1E40AF"/>
+            <a:srgbClr val="252525"/>
           </a:solidFill>
           <a:ln>
             <a:noFill/>
@@ -6563,7 +6611,7 @@
             <a:r>
               <a:rPr sz="1200" b="0" i="0">
                 <a:solidFill>
-                  <a:srgbClr val="93C5FD"/>
+                  <a:srgbClr val="DA7756"/>
                 </a:solidFill>
               </a:rPr>
               <a:t>[10分]</a:t>
@@ -6596,7 +6644,7 @@
             <a:r>
               <a:rPr sz="1300">
                 <a:solidFill>
-                  <a:srgbClr val="1E293B"/>
+                  <a:srgbClr val="EEEEEE"/>
                 </a:solidFill>
               </a:rPr>
               <a:t>[OK] Claude Codeが「実際に手を動かす」AIだとわかった</a:t>
@@ -6606,7 +6654,7 @@
             <a:r>
               <a:rPr sz="1300">
                 <a:solidFill>
-                  <a:srgbClr val="1E293B"/>
+                  <a:srgbClr val="EEEEEE"/>
                 </a:solidFill>
               </a:rPr>
               <a:t>[OK] フォルダ整理・CSV整形・文書生成を体験した</a:t>
@@ -6616,7 +6664,7 @@
             <a:r>
               <a:rPr sz="1300">
                 <a:solidFill>
-                  <a:srgbClr val="1E293B"/>
+                  <a:srgbClr val="EEEEEE"/>
                 </a:solidFill>
               </a:rPr>
               <a:t>[OK] CLAUDE.mdで指示を記録・再利用できるとわかった</a:t>
@@ -6626,7 +6674,7 @@
             <a:r>
               <a:rPr sz="1300">
                 <a:solidFill>
-                  <a:srgbClr val="1E293B"/>
+                  <a:srgbClr val="EEEEEE"/>
                 </a:solidFill>
               </a:rPr>
               <a:t>[OK] トラブル時の対処法を持ち帰れた</a:t>
@@ -6649,7 +6697,7 @@
             <a:avLst/>
           </a:prstGeom>
           <a:solidFill>
-            <a:srgbClr val="EFF6FF"/>
+            <a:srgbClr val="2F2F2F"/>
           </a:solidFill>
           <a:ln>
             <a:noFill/>
@@ -6703,7 +6751,7 @@
             <a:r>
               <a:rPr sz="1300" b="1" i="0">
                 <a:solidFill>
-                  <a:srgbClr val="1E40AF"/>
+                  <a:srgbClr val="1C1C1C"/>
                 </a:solidFill>
               </a:rPr>
               <a:t>AI開発伴走サービス</a:t>
@@ -6736,7 +6784,7 @@
             <a:r>
               <a:rPr sz="1200">
                 <a:solidFill>
-                  <a:srgbClr val="1E293B"/>
+                  <a:srgbClr val="EEEEEE"/>
                 </a:solidFill>
               </a:rPr>
               <a:t>「もっと深めたい」「自社業務に組み込みたい」</a:t>
@@ -6746,7 +6794,7 @@
             <a:r>
               <a:rPr sz="1200">
                 <a:solidFill>
-                  <a:srgbClr val="1E293B"/>
+                  <a:srgbClr val="EEEEEE"/>
                 </a:solidFill>
               </a:rPr>
               <a:t>ざつね屋と共同開発 → MTGで知見を統合</a:t>
@@ -6756,7 +6804,7 @@
             <a:r>
               <a:rPr sz="1200">
                 <a:solidFill>
-                  <a:srgbClr val="1E293B"/>
+                  <a:srgbClr val="EEEEEE"/>
                 </a:solidFill>
               </a:rPr>
               <a:t>月1回プラン：60,000円/月</a:t>
@@ -6766,7 +6814,7 @@
             <a:r>
               <a:rPr sz="1200">
                 <a:solidFill>
-                  <a:srgbClr val="1E293B"/>
+                  <a:srgbClr val="EEEEEE"/>
                 </a:solidFill>
               </a:rPr>
               <a:t>月2回プラン：100,000円/月</a:t>
@@ -6800,7 +6848,7 @@
             <a:r>
               <a:rPr sz="1400" b="1" i="0">
                 <a:solidFill>
-                  <a:srgbClr val="1E293B"/>
+                  <a:srgbClr val="EEEEEE"/>
                 </a:solidFill>
               </a:rPr>
               <a:t>Q&amp;A — 質問・相談はなんでもどうぞ</a:t>
@@ -6887,6 +6935,14 @@
 <file path=ppt/slides/slide2.xml><?xml version="1.0" encoding="utf-8"?>
 <p:sld xmlns:a="http://schemas.openxmlformats.org/drawingml/2006/main" xmlns:p="http://schemas.openxmlformats.org/presentationml/2006/main" xmlns:r="http://schemas.openxmlformats.org/officeDocument/2006/relationships">
   <p:cSld>
+    <p:bg>
+      <p:bgPr>
+        <a:solidFill>
+          <a:srgbClr val="1C1C1C"/>
+        </a:solidFill>
+        <a:effectLst/>
+      </p:bgPr>
+    </p:bg>
     <p:spTree>
       <p:nvGrpSpPr>
         <p:cNvPr id="1" name=""/>
@@ -6909,7 +6965,7 @@
             <a:avLst/>
           </a:prstGeom>
           <a:solidFill>
-            <a:srgbClr val="1E40AF"/>
+            <a:srgbClr val="252525"/>
           </a:solidFill>
           <a:ln>
             <a:noFill/>
@@ -7014,7 +7070,7 @@
                   </a:txBody>
                   <a:tcPr>
                     <a:solidFill>
-                      <a:srgbClr val="1E40AF"/>
+                      <a:srgbClr val="1C1C1C"/>
                     </a:solidFill>
                   </a:tcPr>
                 </a:tc>
@@ -7036,7 +7092,7 @@
                   </a:txBody>
                   <a:tcPr>
                     <a:solidFill>
-                      <a:srgbClr val="1E40AF"/>
+                      <a:srgbClr val="1C1C1C"/>
                     </a:solidFill>
                   </a:tcPr>
                 </a:tc>
@@ -7058,7 +7114,7 @@
                   </a:txBody>
                   <a:tcPr>
                     <a:solidFill>
-                      <a:srgbClr val="1E40AF"/>
+                      <a:srgbClr val="1C1C1C"/>
                     </a:solidFill>
                   </a:tcPr>
                 </a:tc>
@@ -7080,7 +7136,7 @@
                   </a:txBody>
                   <a:tcPr>
                     <a:solidFill>
-                      <a:srgbClr val="1E40AF"/>
+                      <a:srgbClr val="1C1C1C"/>
                     </a:solidFill>
                   </a:tcPr>
                 </a:tc>
@@ -7095,7 +7151,7 @@
                       <a:r>
                         <a:rPr sz="1100">
                           <a:solidFill>
-                            <a:srgbClr val="1E293B"/>
+                            <a:srgbClr val="EEEEEE"/>
                           </a:solidFill>
                         </a:rPr>
                         <a:t>1</a:t>
@@ -7113,7 +7169,7 @@
                       <a:r>
                         <a:rPr sz="1100">
                           <a:solidFill>
-                            <a:srgbClr val="1E293B"/>
+                            <a:srgbClr val="EEEEEE"/>
                           </a:solidFill>
                         </a:rPr>
                         <a:t>Claude Codeとは</a:t>
@@ -7131,7 +7187,7 @@
                       <a:r>
                         <a:rPr sz="1100">
                           <a:solidFill>
-                            <a:srgbClr val="1E293B"/>
+                            <a:srgbClr val="EEEEEE"/>
                           </a:solidFill>
                         </a:rPr>
                         <a:t>4軸マップ・他AIとの違い・できること/できないこと</a:t>
@@ -7149,7 +7205,7 @@
                       <a:r>
                         <a:rPr sz="1100">
                           <a:solidFill>
-                            <a:srgbClr val="1E293B"/>
+                            <a:srgbClr val="EEEEEE"/>
                           </a:solidFill>
                         </a:rPr>
                         <a:t>20分</a:t>
@@ -7169,7 +7225,7 @@
                       <a:r>
                         <a:rPr sz="1100">
                           <a:solidFill>
-                            <a:srgbClr val="1E293B"/>
+                            <a:srgbClr val="EEEEEE"/>
                           </a:solidFill>
                         </a:rPr>
                         <a:t>2</a:t>
@@ -7191,7 +7247,7 @@
                       <a:r>
                         <a:rPr sz="1100">
                           <a:solidFill>
-                            <a:srgbClr val="1E293B"/>
+                            <a:srgbClr val="EEEEEE"/>
                           </a:solidFill>
                         </a:rPr>
                         <a:t>セットアップ確認</a:t>
@@ -7213,7 +7269,7 @@
                       <a:r>
                         <a:rPr sz="1100">
                           <a:solidFill>
-                            <a:srgbClr val="1E293B"/>
+                            <a:srgbClr val="EEEEEE"/>
                           </a:solidFill>
                         </a:rPr>
                         <a:t>デスクトップ版起動・サインイン・動作確認</a:t>
@@ -7235,7 +7291,7 @@
                       <a:r>
                         <a:rPr sz="1100">
                           <a:solidFill>
-                            <a:srgbClr val="1E293B"/>
+                            <a:srgbClr val="EEEEEE"/>
                           </a:solidFill>
                         </a:rPr>
                         <a:t>30分</a:t>
@@ -7259,7 +7315,7 @@
                       <a:r>
                         <a:rPr sz="1100">
                           <a:solidFill>
-                            <a:srgbClr val="1E293B"/>
+                            <a:srgbClr val="EEEEEE"/>
                           </a:solidFill>
                         </a:rPr>
                         <a:t>3</a:t>
@@ -7277,7 +7333,7 @@
                       <a:r>
                         <a:rPr sz="1100">
                           <a:solidFill>
-                            <a:srgbClr val="1E293B"/>
+                            <a:srgbClr val="EEEEEE"/>
                           </a:solidFill>
                         </a:rPr>
                         <a:t>ユースケース</a:t>
@@ -7295,7 +7351,7 @@
                       <a:r>
                         <a:rPr sz="1100">
                           <a:solidFill>
-                            <a:srgbClr val="1E293B"/>
+                            <a:srgbClr val="EEEEEE"/>
                           </a:solidFill>
                         </a:rPr>
                         <a:t>フォルダ整理・CSV整形・定型文書生成（各3分）</a:t>
@@ -7313,7 +7369,7 @@
                       <a:r>
                         <a:rPr sz="1100">
                           <a:solidFill>
-                            <a:srgbClr val="1E293B"/>
+                            <a:srgbClr val="EEEEEE"/>
                           </a:solidFill>
                         </a:rPr>
                         <a:t>10分</a:t>
@@ -7333,7 +7389,7 @@
                       <a:r>
                         <a:rPr sz="1100">
                           <a:solidFill>
-                            <a:srgbClr val="1E293B"/>
+                            <a:srgbClr val="EEEEEE"/>
                           </a:solidFill>
                         </a:rPr>
                         <a:t>—</a:t>
@@ -7355,7 +7411,7 @@
                       <a:r>
                         <a:rPr sz="1100">
                           <a:solidFill>
-                            <a:srgbClr val="1E293B"/>
+                            <a:srgbClr val="EEEEEE"/>
                           </a:solidFill>
                         </a:rPr>
                         <a:t>休憩</a:t>
@@ -7377,7 +7433,7 @@
                       <a:r>
                         <a:rPr sz="1100">
                           <a:solidFill>
-                            <a:srgbClr val="1E293B"/>
+                            <a:srgbClr val="EEEEEE"/>
                           </a:solidFill>
                         </a:rPr>
                         <a:t/>
@@ -7399,7 +7455,7 @@
                       <a:r>
                         <a:rPr sz="1100">
                           <a:solidFill>
-                            <a:srgbClr val="1E293B"/>
+                            <a:srgbClr val="EEEEEE"/>
                           </a:solidFill>
                         </a:rPr>
                         <a:t>10分</a:t>
@@ -7423,7 +7479,7 @@
                       <a:r>
                         <a:rPr sz="1100">
                           <a:solidFill>
-                            <a:srgbClr val="1E293B"/>
+                            <a:srgbClr val="EEEEEE"/>
                           </a:solidFill>
                         </a:rPr>
                         <a:t>4</a:t>
@@ -7441,7 +7497,7 @@
                       <a:r>
                         <a:rPr sz="1100">
                           <a:solidFill>
-                            <a:srgbClr val="1E293B"/>
+                            <a:srgbClr val="EEEEEE"/>
                           </a:solidFill>
                         </a:rPr>
                         <a:t>応用ワーク</a:t>
@@ -7459,7 +7515,7 @@
                       <a:r>
                         <a:rPr sz="1100">
                           <a:solidFill>
-                            <a:srgbClr val="1E293B"/>
+                            <a:srgbClr val="EEEEEE"/>
                           </a:solidFill>
                         </a:rPr>
                         <a:t>CLAUDE.md作成・テンプレート化・自社業務試行</a:t>
@@ -7477,7 +7533,7 @@
                       <a:r>
                         <a:rPr sz="1100">
                           <a:solidFill>
-                            <a:srgbClr val="1E293B"/>
+                            <a:srgbClr val="EEEEEE"/>
                           </a:solidFill>
                         </a:rPr>
                         <a:t>40分</a:t>
@@ -7497,7 +7553,7 @@
                       <a:r>
                         <a:rPr sz="1100">
                           <a:solidFill>
-                            <a:srgbClr val="1E293B"/>
+                            <a:srgbClr val="EEEEEE"/>
                           </a:solidFill>
                         </a:rPr>
                         <a:t>5</a:t>
@@ -7519,7 +7575,7 @@
                       <a:r>
                         <a:rPr sz="1100">
                           <a:solidFill>
-                            <a:srgbClr val="1E293B"/>
+                            <a:srgbClr val="EEEEEE"/>
                           </a:solidFill>
                         </a:rPr>
                         <a:t>まとめ・Q&amp;A</a:t>
@@ -7541,7 +7597,7 @@
                       <a:r>
                         <a:rPr sz="1100">
                           <a:solidFill>
-                            <a:srgbClr val="1E293B"/>
+                            <a:srgbClr val="EEEEEE"/>
                           </a:solidFill>
                         </a:rPr>
                         <a:t>伴走サービス紹介・質疑応答</a:t>
@@ -7563,7 +7619,7 @@
                       <a:r>
                         <a:rPr sz="1100">
                           <a:solidFill>
-                            <a:srgbClr val="1E293B"/>
+                            <a:srgbClr val="EEEEEE"/>
                           </a:solidFill>
                         </a:rPr>
                         <a:t>10分</a:t>
@@ -7595,7 +7651,7 @@
     <p:bg>
       <p:bgPr>
         <a:solidFill>
-          <a:srgbClr val="1E40AF"/>
+          <a:srgbClr val="1C1C1C"/>
         </a:solidFill>
         <a:effectLst/>
       </p:bgPr>
@@ -7744,7 +7800,7 @@
             <a:r>
               <a:rPr sz="1400" b="0" i="0">
                 <a:solidFill>
-                  <a:srgbClr val="93C5FD"/>
+                  <a:srgbClr val="DA7756"/>
                 </a:solidFill>
               </a:rPr>
               <a:t>[20分]</a:t>
@@ -7778,7 +7834,7 @@
             <a:r>
               <a:rPr sz="1500" b="0" i="0">
                 <a:solidFill>
-                  <a:srgbClr val="BFDBFE"/>
+                  <a:srgbClr val="B8A99A"/>
                 </a:solidFill>
               </a:rPr>
               <a:t>4軸マップでの位置確認 ＆ 他ツールとの違い</a:t>
@@ -7797,6 +7853,14 @@
 <file path=ppt/slides/slide4.xml><?xml version="1.0" encoding="utf-8"?>
 <p:sld xmlns:a="http://schemas.openxmlformats.org/drawingml/2006/main" xmlns:p="http://schemas.openxmlformats.org/presentationml/2006/main" xmlns:r="http://schemas.openxmlformats.org/officeDocument/2006/relationships">
   <p:cSld>
+    <p:bg>
+      <p:bgPr>
+        <a:solidFill>
+          <a:srgbClr val="1C1C1C"/>
+        </a:solidFill>
+        <a:effectLst/>
+      </p:bgPr>
+    </p:bg>
     <p:spTree>
       <p:nvGrpSpPr>
         <p:cNvPr id="1" name=""/>
@@ -7819,7 +7883,7 @@
             <a:avLst/>
           </a:prstGeom>
           <a:solidFill>
-            <a:srgbClr val="1E40AF"/>
+            <a:srgbClr val="252525"/>
           </a:solidFill>
           <a:ln>
             <a:noFill/>
@@ -7907,7 +7971,7 @@
             <a:r>
               <a:rPr sz="1200" b="0" i="0">
                 <a:solidFill>
-                  <a:srgbClr val="93C5FD"/>
+                  <a:srgbClr val="DA7756"/>
                 </a:solidFill>
               </a:rPr>
               <a:t>[3分]</a:t>
@@ -7958,7 +8022,7 @@
                   </a:txBody>
                   <a:tcPr>
                     <a:solidFill>
-                      <a:srgbClr val="1E40AF"/>
+                      <a:srgbClr val="1C1C1C"/>
                     </a:solidFill>
                   </a:tcPr>
                 </a:tc>
@@ -7980,7 +8044,7 @@
                   </a:txBody>
                   <a:tcPr>
                     <a:solidFill>
-                      <a:srgbClr val="1E40AF"/>
+                      <a:srgbClr val="1C1C1C"/>
                     </a:solidFill>
                   </a:tcPr>
                 </a:tc>
@@ -8002,7 +8066,7 @@
                   </a:txBody>
                   <a:tcPr>
                     <a:solidFill>
-                      <a:srgbClr val="1E40AF"/>
+                      <a:srgbClr val="1C1C1C"/>
                     </a:solidFill>
                   </a:tcPr>
                 </a:tc>
@@ -8024,7 +8088,7 @@
                   </a:txBody>
                   <a:tcPr>
                     <a:solidFill>
-                      <a:srgbClr val="1E40AF"/>
+                      <a:srgbClr val="1C1C1C"/>
                     </a:solidFill>
                   </a:tcPr>
                 </a:tc>
@@ -8039,7 +8103,7 @@
                       <a:r>
                         <a:rPr sz="1100">
                           <a:solidFill>
-                            <a:srgbClr val="1E293B"/>
+                            <a:srgbClr val="EEEEEE"/>
                           </a:solidFill>
                         </a:rPr>
                         <a:t>文書・テキスト</a:t>
@@ -8057,7 +8121,7 @@
                       <a:r>
                         <a:rPr sz="1100">
                           <a:solidFill>
-                            <a:srgbClr val="1E293B"/>
+                            <a:srgbClr val="EEEEEE"/>
                           </a:solidFill>
                         </a:rPr>
                         <a:t>全スタッフ</a:t>
@@ -8075,7 +8139,7 @@
                       <a:r>
                         <a:rPr sz="1100">
                           <a:solidFill>
-                            <a:srgbClr val="1E293B"/>
+                            <a:srgbClr val="EEEEEE"/>
                           </a:solidFill>
                         </a:rPr>
                         <a:t>メール・報告書・広報文</a:t>
@@ -8093,7 +8157,7 @@
                       <a:r>
                         <a:rPr sz="1100">
                           <a:solidFill>
-                            <a:srgbClr val="1E293B"/>
+                            <a:srgbClr val="EEEEEE"/>
                           </a:solidFill>
                         </a:rPr>
                         <a:t>ChatGPT / Gemini / Claude</a:t>
@@ -8113,7 +8177,7 @@
                       <a:r>
                         <a:rPr sz="1100">
                           <a:solidFill>
-                            <a:srgbClr val="1E293B"/>
+                            <a:srgbClr val="EEEEEE"/>
                           </a:solidFill>
                         </a:rPr>
                         <a:t>画像・ビジュアル</a:t>
@@ -8135,7 +8199,7 @@
                       <a:r>
                         <a:rPr sz="1100">
                           <a:solidFill>
-                            <a:srgbClr val="1E293B"/>
+                            <a:srgbClr val="EEEEEE"/>
                           </a:solidFill>
                         </a:rPr>
                         <a:t>広報・SNS担当</a:t>
@@ -8157,7 +8221,7 @@
                       <a:r>
                         <a:rPr sz="1100">
                           <a:solidFill>
-                            <a:srgbClr val="1E293B"/>
+                            <a:srgbClr val="EEEEEE"/>
                           </a:solidFill>
                         </a:rPr>
                         <a:t>SNS画像・チラシ</a:t>
@@ -8179,7 +8243,7 @@
                       <a:r>
                         <a:rPr sz="1100">
                           <a:solidFill>
-                            <a:srgbClr val="1E293B"/>
+                            <a:srgbClr val="EEEEEE"/>
                           </a:solidFill>
                         </a:rPr>
                         <a:t>Canva / Firefly</a:t>
@@ -8203,7 +8267,7 @@
                       <a:r>
                         <a:rPr sz="1100">
                           <a:solidFill>
-                            <a:srgbClr val="1E293B"/>
+                            <a:srgbClr val="EEEEEE"/>
                           </a:solidFill>
                         </a:rPr>
                         <a:t>動画・映像</a:t>
@@ -8221,7 +8285,7 @@
                       <a:r>
                         <a:rPr sz="1100">
                           <a:solidFill>
-                            <a:srgbClr val="1E293B"/>
+                            <a:srgbClr val="EEEEEE"/>
                           </a:solidFill>
                         </a:rPr>
                         <a:t>広報・採用担当</a:t>
@@ -8239,7 +8303,7 @@
                       <a:r>
                         <a:rPr sz="1100">
                           <a:solidFill>
-                            <a:srgbClr val="1E293B"/>
+                            <a:srgbClr val="EEEEEE"/>
                           </a:solidFill>
                         </a:rPr>
                         <a:t>SNS動画・採用動画</a:t>
@@ -8257,7 +8321,7 @@
                       <a:r>
                         <a:rPr sz="1100">
                           <a:solidFill>
-                            <a:srgbClr val="1E293B"/>
+                            <a:srgbClr val="EEEEEE"/>
                           </a:solidFill>
                         </a:rPr>
                         <a:t>CapCut / Canva</a:t>
@@ -8277,7 +8341,7 @@
                       <a:r>
                         <a:rPr sz="1100">
                           <a:solidFill>
-                            <a:srgbClr val="1E293B"/>
+                            <a:srgbClr val="EEEEEE"/>
                           </a:solidFill>
                         </a:rPr>
                         <a:t>自動化・開発 ← ここ</a:t>
@@ -8299,7 +8363,7 @@
                       <a:r>
                         <a:rPr sz="1100">
                           <a:solidFill>
-                            <a:srgbClr val="1E293B"/>
+                            <a:srgbClr val="EEEEEE"/>
                           </a:solidFill>
                         </a:rPr>
                         <a:t>経営者・業務改善担当</a:t>
@@ -8321,7 +8385,7 @@
                       <a:r>
                         <a:rPr sz="1100">
                           <a:solidFill>
-                            <a:srgbClr val="1E293B"/>
+                            <a:srgbClr val="EEEEEE"/>
                           </a:solidFill>
                         </a:rPr>
                         <a:t>繰り返し作業の自動化・仕組み化</a:t>
@@ -8343,7 +8407,7 @@
                       <a:r>
                         <a:rPr sz="1100">
                           <a:solidFill>
-                            <a:srgbClr val="1E293B"/>
+                            <a:srgbClr val="EEEEEE"/>
                           </a:solidFill>
                         </a:rPr>
                         <a:t>Claude Code</a:t>
@@ -8376,7 +8440,7 @@
             <a:avLst/>
           </a:prstGeom>
           <a:solidFill>
-            <a:srgbClr val="EFF6FF"/>
+            <a:srgbClr val="2F2F2F"/>
           </a:solidFill>
           <a:ln>
             <a:noFill/>
@@ -8430,7 +8494,7 @@
             <a:r>
               <a:rPr sz="1300" b="0" i="0">
                 <a:solidFill>
-                  <a:srgbClr val="1E293B"/>
+                  <a:srgbClr val="EEEEEE"/>
                 </a:solidFill>
               </a:rPr>
               <a:t>「自動化・開発」領域だけがAPIキーや環境設定が必要。Claude Codeはその敷居を最も下げたツールです</a:t>
@@ -8449,6 +8513,14 @@
 <file path=ppt/slides/slide5.xml><?xml version="1.0" encoding="utf-8"?>
 <p:sld xmlns:a="http://schemas.openxmlformats.org/drawingml/2006/main" xmlns:p="http://schemas.openxmlformats.org/presentationml/2006/main" xmlns:r="http://schemas.openxmlformats.org/officeDocument/2006/relationships">
   <p:cSld>
+    <p:bg>
+      <p:bgPr>
+        <a:solidFill>
+          <a:srgbClr val="1C1C1C"/>
+        </a:solidFill>
+        <a:effectLst/>
+      </p:bgPr>
+    </p:bg>
     <p:spTree>
       <p:nvGrpSpPr>
         <p:cNvPr id="1" name=""/>
@@ -8471,7 +8543,7 @@
             <a:avLst/>
           </a:prstGeom>
           <a:solidFill>
-            <a:srgbClr val="1E40AF"/>
+            <a:srgbClr val="252525"/>
           </a:solidFill>
           <a:ln>
             <a:noFill/>
@@ -8559,7 +8631,7 @@
             <a:r>
               <a:rPr sz="1200" b="0" i="0">
                 <a:solidFill>
-                  <a:srgbClr val="93C5FD"/>
+                  <a:srgbClr val="DA7756"/>
                 </a:solidFill>
               </a:rPr>
               <a:t>[4分]</a:t>
@@ -8609,7 +8681,7 @@
                   </a:txBody>
                   <a:tcPr>
                     <a:solidFill>
-                      <a:srgbClr val="1E40AF"/>
+                      <a:srgbClr val="1C1C1C"/>
                     </a:solidFill>
                   </a:tcPr>
                 </a:tc>
@@ -8631,7 +8703,7 @@
                   </a:txBody>
                   <a:tcPr>
                     <a:solidFill>
-                      <a:srgbClr val="1E40AF"/>
+                      <a:srgbClr val="1C1C1C"/>
                     </a:solidFill>
                   </a:tcPr>
                 </a:tc>
@@ -8653,7 +8725,7 @@
                   </a:txBody>
                   <a:tcPr>
                     <a:solidFill>
-                      <a:srgbClr val="1E40AF"/>
+                      <a:srgbClr val="1C1C1C"/>
                     </a:solidFill>
                   </a:tcPr>
                 </a:tc>
@@ -8668,7 +8740,7 @@
                       <a:r>
                         <a:rPr sz="1100">
                           <a:solidFill>
-                            <a:srgbClr val="1E293B"/>
+                            <a:srgbClr val="EEEEEE"/>
                           </a:solidFill>
                         </a:rPr>
                         <a:t>種類</a:t>
@@ -8686,7 +8758,7 @@
                       <a:r>
                         <a:rPr sz="1100">
                           <a:solidFill>
-                            <a:srgbClr val="1E293B"/>
+                            <a:srgbClr val="EEEEEE"/>
                           </a:solidFill>
                         </a:rPr>
                         <a:t>会話型AI</a:t>
@@ -8704,7 +8776,7 @@
                       <a:r>
                         <a:rPr sz="1100">
                           <a:solidFill>
-                            <a:srgbClr val="1E293B"/>
+                            <a:srgbClr val="EEEEEE"/>
                           </a:solidFill>
                         </a:rPr>
                         <a:t>AIエージェント</a:t>
@@ -8724,7 +8796,7 @@
                       <a:r>
                         <a:rPr sz="1100">
                           <a:solidFill>
-                            <a:srgbClr val="1E293B"/>
+                            <a:srgbClr val="EEEEEE"/>
                           </a:solidFill>
                         </a:rPr>
                         <a:t>使い方</a:t>
@@ -8746,7 +8818,7 @@
                       <a:r>
                         <a:rPr sz="1100">
                           <a:solidFill>
-                            <a:srgbClr val="1E293B"/>
+                            <a:srgbClr val="EEEEEE"/>
                           </a:solidFill>
                         </a:rPr>
                         <a:t>ブラウザでチャット</a:t>
@@ -8768,7 +8840,7 @@
                       <a:r>
                         <a:rPr sz="1100">
                           <a:solidFill>
-                            <a:srgbClr val="1E293B"/>
+                            <a:srgbClr val="EEEEEE"/>
                           </a:solidFill>
                         </a:rPr>
                         <a:t>デスクトップアプリ</a:t>
@@ -8792,7 +8864,7 @@
                       <a:r>
                         <a:rPr sz="1100">
                           <a:solidFill>
-                            <a:srgbClr val="1E293B"/>
+                            <a:srgbClr val="EEEEEE"/>
                           </a:solidFill>
                         </a:rPr>
                         <a:t>できること</a:t>
@@ -8810,7 +8882,7 @@
                       <a:r>
                         <a:rPr sz="1100">
                           <a:solidFill>
-                            <a:srgbClr val="1E293B"/>
+                            <a:srgbClr val="EEEEEE"/>
                           </a:solidFill>
                         </a:rPr>
                         <a:t>答える・書く・提案する</a:t>
@@ -8828,7 +8900,7 @@
                       <a:r>
                         <a:rPr sz="1100">
                           <a:solidFill>
-                            <a:srgbClr val="1E293B"/>
+                            <a:srgbClr val="EEEEEE"/>
                           </a:solidFill>
                         </a:rPr>
                         <a:t>ファイルを作る・動かす・整理する</a:t>
@@ -8848,7 +8920,7 @@
                       <a:r>
                         <a:rPr sz="1100">
                           <a:solidFill>
-                            <a:srgbClr val="1E293B"/>
+                            <a:srgbClr val="EEEEEE"/>
                           </a:solidFill>
                         </a:rPr>
                         <a:t>イメージ</a:t>
@@ -8870,7 +8942,7 @@
                       <a:r>
                         <a:rPr sz="1100">
                           <a:solidFill>
-                            <a:srgbClr val="1E293B"/>
+                            <a:srgbClr val="EEEEEE"/>
                           </a:solidFill>
                         </a:rPr>
                         <a:t>優秀な相談相手</a:t>
@@ -8892,7 +8964,7 @@
                       <a:r>
                         <a:rPr sz="1100">
                           <a:solidFill>
-                            <a:srgbClr val="1E293B"/>
+                            <a:srgbClr val="EEEEEE"/>
                           </a:solidFill>
                         </a:rPr>
                         <a:t>実際に手を動かす部下</a:t>
@@ -8925,7 +8997,7 @@
             <a:avLst/>
           </a:prstGeom>
           <a:solidFill>
-            <a:srgbClr val="EFF6FF"/>
+            <a:srgbClr val="2F2F2F"/>
           </a:solidFill>
           <a:ln>
             <a:noFill/>
@@ -8979,7 +9051,7 @@
             <a:r>
               <a:rPr sz="1300" b="0" i="0">
                 <a:solidFill>
-                  <a:srgbClr val="1E293B"/>
+                  <a:srgbClr val="EEEEEE"/>
                 </a:solidFill>
               </a:rPr>
               <a:t>Claude Codeは「答えを出す」だけでなく「実際にファイルを操作・生成する」ところが決定的な違いです</a:t>
@@ -8998,6 +9070,14 @@
 <file path=ppt/slides/slide6.xml><?xml version="1.0" encoding="utf-8"?>
 <p:sld xmlns:a="http://schemas.openxmlformats.org/drawingml/2006/main" xmlns:p="http://schemas.openxmlformats.org/presentationml/2006/main" xmlns:r="http://schemas.openxmlformats.org/officeDocument/2006/relationships">
   <p:cSld>
+    <p:bg>
+      <p:bgPr>
+        <a:solidFill>
+          <a:srgbClr val="1C1C1C"/>
+        </a:solidFill>
+        <a:effectLst/>
+      </p:bgPr>
+    </p:bg>
     <p:spTree>
       <p:nvGrpSpPr>
         <p:cNvPr id="1" name=""/>
@@ -9020,7 +9100,7 @@
             <a:avLst/>
           </a:prstGeom>
           <a:solidFill>
-            <a:srgbClr val="1E40AF"/>
+            <a:srgbClr val="252525"/>
           </a:solidFill>
           <a:ln>
             <a:noFill/>
@@ -9108,7 +9188,7 @@
             <a:r>
               <a:rPr sz="1200" b="0" i="0">
                 <a:solidFill>
-                  <a:srgbClr val="93C5FD"/>
+                  <a:srgbClr val="DA7756"/>
                 </a:solidFill>
               </a:rPr>
               <a:t>[4分]</a:t>
@@ -9157,7 +9237,7 @@
                   </a:txBody>
                   <a:tcPr>
                     <a:solidFill>
-                      <a:srgbClr val="1E40AF"/>
+                      <a:srgbClr val="1C1C1C"/>
                     </a:solidFill>
                   </a:tcPr>
                 </a:tc>
@@ -9179,7 +9259,7 @@
                   </a:txBody>
                   <a:tcPr>
                     <a:solidFill>
-                      <a:srgbClr val="1E40AF"/>
+                      <a:srgbClr val="1C1C1C"/>
                     </a:solidFill>
                   </a:tcPr>
                 </a:tc>
@@ -9194,7 +9274,7 @@
                       <a:r>
                         <a:rPr sz="1100">
                           <a:solidFill>
-                            <a:srgbClr val="1E293B"/>
+                            <a:srgbClr val="EEEEEE"/>
                           </a:solidFill>
                         </a:rPr>
                         <a:t>ファイル・フォルダ操作</a:t>
@@ -9212,7 +9292,7 @@
                       <a:r>
                         <a:rPr sz="1100">
                           <a:solidFill>
-                            <a:srgbClr val="1E293B"/>
+                            <a:srgbClr val="EEEEEE"/>
                           </a:solidFill>
                         </a:rPr>
                         <a:t>ネット上の操作（注文・送信・フォーム入力など）</a:t>
@@ -9232,7 +9312,7 @@
                       <a:r>
                         <a:rPr sz="1100">
                           <a:solidFill>
-                            <a:srgbClr val="1E293B"/>
+                            <a:srgbClr val="EEEEEE"/>
                           </a:solidFill>
                         </a:rPr>
                         <a:t>CSV・データの整形・集計</a:t>
@@ -9254,7 +9334,7 @@
                       <a:r>
                         <a:rPr sz="1100">
                           <a:solidFill>
-                            <a:srgbClr val="1E293B"/>
+                            <a:srgbClr val="EEEEEE"/>
                           </a:solidFill>
                         </a:rPr>
                         <a:t>完全な自動実行（毎回指示は必要）</a:t>
@@ -9278,7 +9358,7 @@
                       <a:r>
                         <a:rPr sz="1100">
                           <a:solidFill>
-                            <a:srgbClr val="1E293B"/>
+                            <a:srgbClr val="EEEEEE"/>
                           </a:solidFill>
                         </a:rPr>
                         <a:t>定型文書の一括生成</a:t>
@@ -9296,7 +9376,7 @@
                       <a:r>
                         <a:rPr sz="1100">
                           <a:solidFill>
-                            <a:srgbClr val="1E293B"/>
+                            <a:srgbClr val="EEEEEE"/>
                           </a:solidFill>
                         </a:rPr>
                         <a:t>複雑なシステム連携（別途開発が必要）</a:t>
@@ -9336,7 +9416,7 @@
             <a:r>
               <a:rPr sz="1400" b="1" i="0">
                 <a:solidFill>
-                  <a:srgbClr val="1E293B"/>
+                  <a:srgbClr val="EEEEEE"/>
                 </a:solidFill>
               </a:rPr>
               <a:t>利用条件</a:t>
@@ -9385,7 +9465,7 @@
                   </a:txBody>
                   <a:tcPr>
                     <a:solidFill>
-                      <a:srgbClr val="1E40AF"/>
+                      <a:srgbClr val="1C1C1C"/>
                     </a:solidFill>
                   </a:tcPr>
                 </a:tc>
@@ -9407,7 +9487,7 @@
                   </a:txBody>
                   <a:tcPr>
                     <a:solidFill>
-                      <a:srgbClr val="1E40AF"/>
+                      <a:srgbClr val="1C1C1C"/>
                     </a:solidFill>
                   </a:tcPr>
                 </a:tc>
@@ -9422,7 +9502,7 @@
                       <a:r>
                         <a:rPr sz="1100">
                           <a:solidFill>
-                            <a:srgbClr val="1E293B"/>
+                            <a:srgbClr val="EEEEEE"/>
                           </a:solidFill>
                         </a:rPr>
                         <a:t>PC（Windows / Mac）</a:t>
@@ -9440,7 +9520,7 @@
                       <a:r>
                         <a:rPr sz="1100">
                           <a:solidFill>
-                            <a:srgbClr val="1E293B"/>
+                            <a:srgbClr val="EEEEEE"/>
                           </a:solidFill>
                         </a:rPr>
                         <a:t>タブレット・スマホは不可</a:t>
@@ -9460,7 +9540,7 @@
                       <a:r>
                         <a:rPr sz="1100">
                           <a:solidFill>
-                            <a:srgbClr val="1E293B"/>
+                            <a:srgbClr val="EEEEEE"/>
                           </a:solidFill>
                         </a:rPr>
                         <a:t>Claude Code デスクトップ版</a:t>
@@ -9482,7 +9562,7 @@
                       <a:r>
                         <a:rPr sz="1100">
                           <a:solidFill>
-                            <a:srgbClr val="1E293B"/>
+                            <a:srgbClr val="EEEEEE"/>
                           </a:solidFill>
                         </a:rPr>
                         <a:t>無料インストール（claude.ai/download）</a:t>
@@ -9506,7 +9586,7 @@
                       <a:r>
                         <a:rPr sz="1100">
                           <a:solidFill>
-                            <a:srgbClr val="1E293B"/>
+                            <a:srgbClr val="EEEEEE"/>
                           </a:solidFill>
                         </a:rPr>
                         <a:t>Anthropicアカウント + Proプラン</a:t>
@@ -9524,7 +9604,7 @@
                       <a:r>
                         <a:rPr sz="1100">
                           <a:solidFill>
-                            <a:srgbClr val="1E293B"/>
+                            <a:srgbClr val="EEEEEE"/>
                           </a:solidFill>
                         </a:rPr>
                         <a:t>$20/月・約3,000円・APIキー不要（対話的利用のため）</a:t>
@@ -9549,6 +9629,14 @@
 <file path=ppt/slides/slide7.xml><?xml version="1.0" encoding="utf-8"?>
 <p:sld xmlns:a="http://schemas.openxmlformats.org/drawingml/2006/main" xmlns:p="http://schemas.openxmlformats.org/presentationml/2006/main" xmlns:r="http://schemas.openxmlformats.org/officeDocument/2006/relationships">
   <p:cSld>
+    <p:bg>
+      <p:bgPr>
+        <a:solidFill>
+          <a:srgbClr val="1C1C1C"/>
+        </a:solidFill>
+        <a:effectLst/>
+      </p:bgPr>
+    </p:bg>
     <p:spTree>
       <p:nvGrpSpPr>
         <p:cNvPr id="1" name=""/>
@@ -9571,7 +9659,7 @@
             <a:avLst/>
           </a:prstGeom>
           <a:solidFill>
-            <a:srgbClr val="1E40AF"/>
+            <a:srgbClr val="252525"/>
           </a:solidFill>
           <a:ln>
             <a:noFill/>
@@ -9659,7 +9747,7 @@
             <a:r>
               <a:rPr sz="1200" b="0" i="0">
                 <a:solidFill>
-                  <a:srgbClr val="93C5FD"/>
+                  <a:srgbClr val="DA7756"/>
                 </a:solidFill>
               </a:rPr>
               <a:t>[10分]</a:t>
@@ -9709,7 +9797,7 @@
                   </a:txBody>
                   <a:tcPr>
                     <a:solidFill>
-                      <a:srgbClr val="1E40AF"/>
+                      <a:srgbClr val="1C1C1C"/>
                     </a:solidFill>
                   </a:tcPr>
                 </a:tc>
@@ -9731,7 +9819,7 @@
                   </a:txBody>
                   <a:tcPr>
                     <a:solidFill>
-                      <a:srgbClr val="1E40AF"/>
+                      <a:srgbClr val="1C1C1C"/>
                     </a:solidFill>
                   </a:tcPr>
                 </a:tc>
@@ -9753,7 +9841,7 @@
                   </a:txBody>
                   <a:tcPr>
                     <a:solidFill>
-                      <a:srgbClr val="1E40AF"/>
+                      <a:srgbClr val="1C1C1C"/>
                     </a:solidFill>
                   </a:tcPr>
                 </a:tc>
@@ -9768,7 +9856,7 @@
                       <a:r>
                         <a:rPr sz="1100">
                           <a:solidFill>
-                            <a:srgbClr val="1E293B"/>
+                            <a:srgbClr val="EEEEEE"/>
                           </a:solidFill>
                         </a:rPr>
                         <a:t>対話的利用（本日の研修）</a:t>
@@ -9786,7 +9874,7 @@
                       <a:r>
                         <a:rPr sz="1100">
                           <a:solidFill>
-                            <a:srgbClr val="1E293B"/>
+                            <a:srgbClr val="EEEEEE"/>
                           </a:solidFill>
                         </a:rPr>
                         <a:t>Anthropicアカウント + Proプラン</a:t>
@@ -9804,7 +9892,7 @@
                       <a:r>
                         <a:rPr sz="1100">
                           <a:solidFill>
-                            <a:srgbClr val="1E293B"/>
+                            <a:srgbClr val="EEEEEE"/>
                           </a:solidFill>
                         </a:rPr>
                         <a:t>ファイル整理・CSV整形・文書生成</a:t>
@@ -9824,7 +9912,7 @@
                       <a:r>
                         <a:rPr sz="1100">
                           <a:solidFill>
-                            <a:srgbClr val="1E293B"/>
+                            <a:srgbClr val="EEEEEE"/>
                           </a:solidFill>
                         </a:rPr>
                         <a:t>開発・システム連携</a:t>
@@ -9846,7 +9934,7 @@
                       <a:r>
                         <a:rPr sz="1100">
                           <a:solidFill>
-                            <a:srgbClr val="1E293B"/>
+                            <a:srgbClr val="EEEEEE"/>
                           </a:solidFill>
                         </a:rPr>
                         <a:t>APIキー（別途従量課金）</a:t>
@@ -9868,7 +9956,7 @@
                       <a:r>
                         <a:rPr sz="1100">
                           <a:solidFill>
-                            <a:srgbClr val="1E293B"/>
+                            <a:srgbClr val="EEEEEE"/>
                           </a:solidFill>
                         </a:rPr>
                         <a:t>Excelボタンで動く仕組み・LINE Bot・自社アプリ組み込み</a:t>
@@ -9989,7 +10077,7 @@
             <a:r>
               <a:rPr sz="1200" b="0" i="0">
                 <a:solidFill>
-                  <a:srgbClr val="1E293B"/>
+                  <a:srgbClr val="EEEEEE"/>
                 </a:solidFill>
               </a:rPr>
               <a:t>Claude Codeも自信満々に間違えます。重要なファイル操作の前は必ず「何をするか教えてから動いてください」と指示を加えましょう。CLAUDE.mdで防止策を書いておくのが有効です（セクション4で実践します）</a:t>
@@ -10011,7 +10099,7 @@
     <p:bg>
       <p:bgPr>
         <a:solidFill>
-          <a:srgbClr val="1E40AF"/>
+          <a:srgbClr val="1C1C1C"/>
         </a:solidFill>
         <a:effectLst/>
       </p:bgPr>
@@ -10160,7 +10248,7 @@
             <a:r>
               <a:rPr sz="1400" b="0" i="0">
                 <a:solidFill>
-                  <a:srgbClr val="93C5FD"/>
+                  <a:srgbClr val="DA7756"/>
                 </a:solidFill>
               </a:rPr>
               <a:t>[10分]</a:t>
@@ -10194,7 +10282,7 @@
             <a:r>
               <a:rPr sz="1500" b="0" i="0">
                 <a:solidFill>
-                  <a:srgbClr val="BFDBFE"/>
+                  <a:srgbClr val="B8A99A"/>
                 </a:solidFill>
               </a:rPr>
               <a:t>3つの実用シーンを各3分でデモ体験</a:t>
@@ -10213,6 +10301,14 @@
 <file path=ppt/slides/slide9.xml><?xml version="1.0" encoding="utf-8"?>
 <p:sld xmlns:a="http://schemas.openxmlformats.org/drawingml/2006/main" xmlns:p="http://schemas.openxmlformats.org/presentationml/2006/main" xmlns:r="http://schemas.openxmlformats.org/officeDocument/2006/relationships">
   <p:cSld>
+    <p:bg>
+      <p:bgPr>
+        <a:solidFill>
+          <a:srgbClr val="1C1C1C"/>
+        </a:solidFill>
+        <a:effectLst/>
+      </p:bgPr>
+    </p:bg>
     <p:spTree>
       <p:nvGrpSpPr>
         <p:cNvPr id="1" name=""/>
@@ -10235,7 +10331,7 @@
             <a:avLst/>
           </a:prstGeom>
           <a:solidFill>
-            <a:srgbClr val="1E40AF"/>
+            <a:srgbClr val="252525"/>
           </a:solidFill>
           <a:ln>
             <a:noFill/>
@@ -10323,7 +10419,7 @@
             <a:r>
               <a:rPr sz="1200" b="0" i="0">
                 <a:solidFill>
-                  <a:srgbClr val="93C5FD"/>
+                  <a:srgbClr val="DA7756"/>
                 </a:solidFill>
               </a:rPr>
               <a:t>[約3分]</a:t>
@@ -10346,7 +10442,7 @@
             <a:avLst/>
           </a:prstGeom>
           <a:solidFill>
-            <a:srgbClr val="EFF6FF"/>
+            <a:srgbClr val="2F2F2F"/>
           </a:solidFill>
           <a:ln>
             <a:noFill/>
@@ -10400,7 +10496,7 @@
             <a:r>
               <a:rPr sz="1400" b="1" i="0">
                 <a:solidFill>
-                  <a:srgbClr val="1E293B"/>
+                  <a:srgbClr val="EEEEEE"/>
                 </a:solidFill>
               </a:rPr>
               <a:t>指示例：「Downloadsにある画像・PDF・Wordを種類ごとにフォルダ分けして」</a:t>
@@ -10468,7 +10564,7 @@
             <a:r>
               <a:rPr sz="1400" b="0" i="0">
                 <a:solidFill>
-                  <a:srgbClr val="1E293B"/>
+                  <a:srgbClr val="EEEEEE"/>
                 </a:solidFill>
               </a:rPr>
               <a:t>Claude Codeが実際にファイルを動かしてくれる様子を確認してください</a:t>
@@ -10491,7 +10587,7 @@
             <a:avLst/>
           </a:prstGeom>
           <a:solidFill>
-            <a:srgbClr val="EFF6FF"/>
+            <a:srgbClr val="2F2F2F"/>
           </a:solidFill>
           <a:ln>
             <a:noFill/>
@@ -10545,7 +10641,7 @@
             <a:r>
               <a:rPr sz="1300" b="0" i="0">
                 <a:solidFill>
-                  <a:srgbClr val="1E40AF"/>
+                  <a:srgbClr val="1C1C1C"/>
                 </a:solidFill>
               </a:rPr>
               <a:t>確認ポイント：実行前に「どのフォルダを作りますか？」と確認してから動くかどうか</a:t>

--- a/00-01_han-ai/training-materials/course05_jissen_claude_code.pptx
+++ b/00-01_han-ai/training-materials/course05_jissen_claude_code.pptx
@@ -3479,9 +3479,7 @@
         <a:graphic>
           <a:graphicData uri="http://schemas.openxmlformats.org/drawingml/2006/table">
             <a:tbl>
-              <a:tblPr firstRow="1" bandRow="1">
-                <a:tableStyleId>{5C22544A-7EE6-4342-B048-85BDC9FD1C3A}</a:tableStyleId>
-              </a:tblPr>
+              <a:tblPr/>
               <a:tblGrid>
                 <a:gridCol w="2304288"/>
                 <a:gridCol w="5925312"/>
@@ -4088,9 +4086,7 @@
         <a:graphic>
           <a:graphicData uri="http://schemas.openxmlformats.org/drawingml/2006/table">
             <a:tbl>
-              <a:tblPr firstRow="1" bandRow="1">
-                <a:tableStyleId>{5C22544A-7EE6-4342-B048-85BDC9FD1C3A}</a:tableStyleId>
-              </a:tblPr>
+              <a:tblPr/>
               <a:tblGrid>
                 <a:gridCol w="1645920"/>
                 <a:gridCol w="4279392"/>
@@ -4901,9 +4897,7 @@
         <a:graphic>
           <a:graphicData uri="http://schemas.openxmlformats.org/drawingml/2006/table">
             <a:tbl>
-              <a:tblPr firstRow="1" bandRow="1">
-                <a:tableStyleId>{5C22544A-7EE6-4342-B048-85BDC9FD1C3A}</a:tableStyleId>
-              </a:tblPr>
+              <a:tblPr/>
               <a:tblGrid>
                 <a:gridCol w="2304288"/>
                 <a:gridCol w="5925312"/>
@@ -5526,9 +5520,7 @@
         <a:graphic>
           <a:graphicData uri="http://schemas.openxmlformats.org/drawingml/2006/table">
             <a:tbl>
-              <a:tblPr firstRow="1" bandRow="1">
-                <a:tableStyleId>{5C22544A-7EE6-4342-B048-85BDC9FD1C3A}</a:tableStyleId>
-              </a:tblPr>
+              <a:tblPr/>
               <a:tblGrid>
                 <a:gridCol w="1755648"/>
                 <a:gridCol w="2633472"/>
@@ -5975,9 +5967,7 @@
         <a:graphic>
           <a:graphicData uri="http://schemas.openxmlformats.org/drawingml/2006/table">
             <a:tbl>
-              <a:tblPr firstRow="1" bandRow="1">
-                <a:tableStyleId>{5C22544A-7EE6-4342-B048-85BDC9FD1C3A}</a:tableStyleId>
-              </a:tblPr>
+              <a:tblPr/>
               <a:tblGrid>
                 <a:gridCol w="2468880"/>
                 <a:gridCol w="5760720"/>
@@ -7042,9 +7032,7 @@
         <a:graphic>
           <a:graphicData uri="http://schemas.openxmlformats.org/drawingml/2006/table">
             <a:tbl>
-              <a:tblPr firstRow="1" bandRow="1">
-                <a:tableStyleId>{5C22544A-7EE6-4342-B048-85BDC9FD1C3A}</a:tableStyleId>
-              </a:tblPr>
+              <a:tblPr/>
               <a:tblGrid>
                 <a:gridCol w="493776"/>
                 <a:gridCol w="1810512"/>
@@ -7994,9 +7982,7 @@
         <a:graphic>
           <a:graphicData uri="http://schemas.openxmlformats.org/drawingml/2006/table">
             <a:tbl>
-              <a:tblPr firstRow="1" bandRow="1">
-                <a:tableStyleId>{5C22544A-7EE6-4342-B048-85BDC9FD1C3A}</a:tableStyleId>
-              </a:tblPr>
+              <a:tblPr/>
               <a:tblGrid>
                 <a:gridCol w="2057400"/>
                 <a:gridCol w="1810512"/>
@@ -8654,9 +8640,7 @@
         <a:graphic>
           <a:graphicData uri="http://schemas.openxmlformats.org/drawingml/2006/table">
             <a:tbl>
-              <a:tblPr firstRow="1" bandRow="1">
-                <a:tableStyleId>{5C22544A-7EE6-4342-B048-85BDC9FD1C3A}</a:tableStyleId>
-              </a:tblPr>
+              <a:tblPr/>
               <a:tblGrid>
                 <a:gridCol w="1481328"/>
                 <a:gridCol w="3374136"/>
@@ -9211,9 +9195,7 @@
         <a:graphic>
           <a:graphicData uri="http://schemas.openxmlformats.org/drawingml/2006/table">
             <a:tbl>
-              <a:tblPr firstRow="1" bandRow="1">
-                <a:tableStyleId>{5C22544A-7EE6-4342-B048-85BDC9FD1C3A}</a:tableStyleId>
-              </a:tblPr>
+              <a:tblPr/>
               <a:tblGrid>
                 <a:gridCol w="3456432"/>
                 <a:gridCol w="4773168"/>
@@ -9439,9 +9421,7 @@
         <a:graphic>
           <a:graphicData uri="http://schemas.openxmlformats.org/drawingml/2006/table">
             <a:tbl>
-              <a:tblPr firstRow="1" bandRow="1">
-                <a:tableStyleId>{5C22544A-7EE6-4342-B048-85BDC9FD1C3A}</a:tableStyleId>
-              </a:tblPr>
+              <a:tblPr/>
               <a:tblGrid>
                 <a:gridCol w="2880360"/>
                 <a:gridCol w="5349240"/>
@@ -9770,9 +9750,7 @@
         <a:graphic>
           <a:graphicData uri="http://schemas.openxmlformats.org/drawingml/2006/table">
             <a:tbl>
-              <a:tblPr firstRow="1" bandRow="1">
-                <a:tableStyleId>{5C22544A-7EE6-4342-B048-85BDC9FD1C3A}</a:tableStyleId>
-              </a:tblPr>
+              <a:tblPr/>
               <a:tblGrid>
                 <a:gridCol w="2304288"/>
                 <a:gridCol w="2633472"/>

--- a/00-01_han-ai/training-materials/course05_jissen_claude_code.pptx
+++ b/00-01_han-ai/training-materials/course05_jissen_claude_code.pptx
@@ -127,6 +127,14 @@
 
 <file path=ppt/slideLayouts/slideLayout1.xml><?xml version="1.0" encoding="utf-8"?>
 <p:sldLayout xmlns:a="http://schemas.openxmlformats.org/drawingml/2006/main" xmlns:r="http://schemas.openxmlformats.org/officeDocument/2006/relationships" xmlns:p="http://schemas.openxmlformats.org/presentationml/2006/main" type="title" preserve="1">
+  <p:bg>
+    <p:bgPr>
+      <a:solidFill>
+        <a:srgbClr val="1C1C1C"/>
+      </a:solidFill>
+      <a:effectLst/>
+    </p:bgPr>
+  </p:bg>
   <p:cSld name="Title Slide">
     <p:spTree>
       <p:nvGrpSpPr>
@@ -369,6 +377,14 @@
 
 <file path=ppt/slideLayouts/slideLayout10.xml><?xml version="1.0" encoding="utf-8"?>
 <p:sldLayout xmlns:a="http://schemas.openxmlformats.org/drawingml/2006/main" xmlns:r="http://schemas.openxmlformats.org/officeDocument/2006/relationships" xmlns:p="http://schemas.openxmlformats.org/presentationml/2006/main" type="vertTx" preserve="1">
+  <p:bg>
+    <p:bgPr>
+      <a:solidFill>
+        <a:srgbClr val="1C1C1C"/>
+      </a:solidFill>
+      <a:effectLst/>
+    </p:bgPr>
+  </p:bg>
   <p:cSld name="Title and Vertical Text">
     <p:spTree>
       <p:nvGrpSpPr>
@@ -539,6 +555,14 @@
 
 <file path=ppt/slideLayouts/slideLayout11.xml><?xml version="1.0" encoding="utf-8"?>
 <p:sldLayout xmlns:a="http://schemas.openxmlformats.org/drawingml/2006/main" xmlns:r="http://schemas.openxmlformats.org/officeDocument/2006/relationships" xmlns:p="http://schemas.openxmlformats.org/presentationml/2006/main" type="vertTitleAndTx" preserve="1">
+  <p:bg>
+    <p:bgPr>
+      <a:solidFill>
+        <a:srgbClr val="1C1C1C"/>
+      </a:solidFill>
+      <a:effectLst/>
+    </p:bgPr>
+  </p:bg>
   <p:cSld name="Vertical Title and Text">
     <p:spTree>
       <p:nvGrpSpPr>
@@ -719,6 +743,14 @@
 
 <file path=ppt/slideLayouts/slideLayout2.xml><?xml version="1.0" encoding="utf-8"?>
 <p:sldLayout xmlns:a="http://schemas.openxmlformats.org/drawingml/2006/main" xmlns:r="http://schemas.openxmlformats.org/officeDocument/2006/relationships" xmlns:p="http://schemas.openxmlformats.org/presentationml/2006/main" type="obj" preserve="1">
+  <p:bg>
+    <p:bgPr>
+      <a:solidFill>
+        <a:srgbClr val="1C1C1C"/>
+      </a:solidFill>
+      <a:effectLst/>
+    </p:bgPr>
+  </p:bg>
   <p:cSld name="Title and Content">
     <p:spTree>
       <p:nvGrpSpPr>
@@ -889,6 +921,14 @@
 
 <file path=ppt/slideLayouts/slideLayout3.xml><?xml version="1.0" encoding="utf-8"?>
 <p:sldLayout xmlns:a="http://schemas.openxmlformats.org/drawingml/2006/main" xmlns:r="http://schemas.openxmlformats.org/officeDocument/2006/relationships" xmlns:p="http://schemas.openxmlformats.org/presentationml/2006/main" type="secHead" preserve="1">
+  <p:bg>
+    <p:bgPr>
+      <a:solidFill>
+        <a:srgbClr val="1C1C1C"/>
+      </a:solidFill>
+      <a:effectLst/>
+    </p:bgPr>
+  </p:bg>
   <p:cSld name="Section Header">
     <p:spTree>
       <p:nvGrpSpPr>
@@ -1135,6 +1175,14 @@
 
 <file path=ppt/slideLayouts/slideLayout4.xml><?xml version="1.0" encoding="utf-8"?>
 <p:sldLayout xmlns:a="http://schemas.openxmlformats.org/drawingml/2006/main" xmlns:r="http://schemas.openxmlformats.org/officeDocument/2006/relationships" xmlns:p="http://schemas.openxmlformats.org/presentationml/2006/main" type="twoObj" preserve="1">
+  <p:bg>
+    <p:bgPr>
+      <a:solidFill>
+        <a:srgbClr val="1C1C1C"/>
+      </a:solidFill>
+      <a:effectLst/>
+    </p:bgPr>
+  </p:bg>
   <p:cSld name="Two Content">
     <p:spTree>
       <p:nvGrpSpPr>
@@ -1423,6 +1471,14 @@
 
 <file path=ppt/slideLayouts/slideLayout5.xml><?xml version="1.0" encoding="utf-8"?>
 <p:sldLayout xmlns:a="http://schemas.openxmlformats.org/drawingml/2006/main" xmlns:r="http://schemas.openxmlformats.org/officeDocument/2006/relationships" xmlns:p="http://schemas.openxmlformats.org/presentationml/2006/main" type="twoTxTwoObj" preserve="1">
+  <p:bg>
+    <p:bgPr>
+      <a:solidFill>
+        <a:srgbClr val="1C1C1C"/>
+      </a:solidFill>
+      <a:effectLst/>
+    </p:bgPr>
+  </p:bg>
   <p:cSld name="Comparison">
     <p:spTree>
       <p:nvGrpSpPr>
@@ -1845,6 +1901,14 @@
 
 <file path=ppt/slideLayouts/slideLayout6.xml><?xml version="1.0" encoding="utf-8"?>
 <p:sldLayout xmlns:a="http://schemas.openxmlformats.org/drawingml/2006/main" xmlns:r="http://schemas.openxmlformats.org/officeDocument/2006/relationships" xmlns:p="http://schemas.openxmlformats.org/presentationml/2006/main" type="titleOnly" preserve="1">
+  <p:bg>
+    <p:bgPr>
+      <a:solidFill>
+        <a:srgbClr val="1C1C1C"/>
+      </a:solidFill>
+      <a:effectLst/>
+    </p:bgPr>
+  </p:bg>
   <p:cSld name="Title Only">
     <p:spTree>
       <p:nvGrpSpPr>
@@ -1963,6 +2027,14 @@
 
 <file path=ppt/slideLayouts/slideLayout7.xml><?xml version="1.0" encoding="utf-8"?>
 <p:sldLayout xmlns:a="http://schemas.openxmlformats.org/drawingml/2006/main" xmlns:r="http://schemas.openxmlformats.org/officeDocument/2006/relationships" xmlns:p="http://schemas.openxmlformats.org/presentationml/2006/main" type="blank" preserve="1">
+  <p:bg>
+    <p:bgPr>
+      <a:solidFill>
+        <a:srgbClr val="1C1C1C"/>
+      </a:solidFill>
+      <a:effectLst/>
+    </p:bgPr>
+  </p:bg>
   <p:cSld name="Blank">
     <p:spTree>
       <p:nvGrpSpPr>
@@ -2058,6 +2130,14 @@
 
 <file path=ppt/slideLayouts/slideLayout8.xml><?xml version="1.0" encoding="utf-8"?>
 <p:sldLayout xmlns:a="http://schemas.openxmlformats.org/drawingml/2006/main" xmlns:r="http://schemas.openxmlformats.org/officeDocument/2006/relationships" xmlns:p="http://schemas.openxmlformats.org/presentationml/2006/main" type="objTx" preserve="1">
+  <p:bg>
+    <p:bgPr>
+      <a:solidFill>
+        <a:srgbClr val="1C1C1C"/>
+      </a:solidFill>
+      <a:effectLst/>
+    </p:bgPr>
+  </p:bg>
   <p:cSld name="Content with Caption">
     <p:spTree>
       <p:nvGrpSpPr>
@@ -2335,6 +2415,14 @@
 
 <file path=ppt/slideLayouts/slideLayout9.xml><?xml version="1.0" encoding="utf-8"?>
 <p:sldLayout xmlns:a="http://schemas.openxmlformats.org/drawingml/2006/main" xmlns:r="http://schemas.openxmlformats.org/officeDocument/2006/relationships" xmlns:p="http://schemas.openxmlformats.org/presentationml/2006/main" type="picTx" preserve="1">
+  <p:bg>
+    <p:bgPr>
+      <a:solidFill>
+        <a:srgbClr val="1C1C1C"/>
+      </a:solidFill>
+      <a:effectLst/>
+    </p:bgPr>
+  </p:bg>
   <p:cSld name="Picture with Caption">
     <p:spTree>
       <p:nvGrpSpPr>
@@ -2590,9 +2678,12 @@
 <p:sldMaster xmlns:a="http://schemas.openxmlformats.org/drawingml/2006/main" xmlns:r="http://schemas.openxmlformats.org/officeDocument/2006/relationships" xmlns:p="http://schemas.openxmlformats.org/presentationml/2006/main">
   <p:cSld>
     <p:bg>
-      <p:bgRef idx="1001">
-        <a:schemeClr val="bg1"/>
-      </p:bgRef>
+      <p:bgPr>
+        <a:solidFill>
+          <a:srgbClr val="1C1C1C"/>
+        </a:solidFill>
+        <a:effectLst/>
+      </p:bgPr>
     </p:bg>
     <p:spTree>
       <p:nvGrpSpPr>
@@ -2829,7 +2920,7 @@
       </p:ext>
     </p:extLst>
   </p:cSld>
-  <p:clrMap bg1="lt1" tx1="dk1" bg2="lt2" tx2="dk2" accent1="accent1" accent2="accent2" accent3="accent3" accent4="accent4" accent5="accent5" accent6="accent6" hlink="hlink" folHlink="folHlink"/>
+  <p:clrMap bg1="dk1" tx1="dk1" bg2="lt2" tx2="dk2" accent1="accent1" accent2="accent2" accent3="accent3" accent4="accent4" accent5="accent5" accent6="accent6" hlink="hlink" folHlink="folHlink"/>
   <p:sldLayoutIdLst>
     <p:sldLayoutId id="2147483649" r:id="rId1"/>
     <p:sldLayoutId id="2147483650" r:id="rId2"/>
@@ -10646,13 +10737,13 @@
         <a:sysClr val="window" lastClr="FFFFFF"/>
       </a:lt1>
       <a:dk2>
-        <a:srgbClr val="1F497D"/>
+        <a:srgbClr val="252525"/>
       </a:dk2>
       <a:lt2>
         <a:srgbClr val="EEECE1"/>
       </a:lt2>
       <a:accent1>
-        <a:srgbClr val="4F81BD"/>
+        <a:srgbClr val="DA7756"/>
       </a:accent1>
       <a:accent2>
         <a:srgbClr val="C0504D"/>

--- a/00-01_han-ai/training-materials/course05_jissen_claude_code.pptx
+++ b/00-01_han-ai/training-materials/course05_jissen_claude_code.pptx
@@ -3205,6 +3205,35 @@
         <p:nvPr/>
       </p:nvGrpSpPr>
       <p:grpSpPr/>
+      <p:sp xmlns:a="http://schemas.openxmlformats.org/drawingml/2006/main" xmlns:p="http://schemas.openxmlformats.org/presentationml/2006/main">
+        <p:nvSpPr>
+          <p:cNvPr id="9900" name="_BG_DARK_"/>
+          <p:cNvSpPr>
+            <a:spLocks noSelect="1" noMove="1" noResize="1"/>
+          </p:cNvSpPr>
+          <p:nvPr/>
+        </p:nvSpPr>
+        <p:spPr>
+          <a:xfrm>
+            <a:off x="0" y="0"/>
+            <a:ext cx="9144000" cy="5143500"/>
+          </a:xfrm>
+          <a:prstGeom prst="rect">
+            <a:avLst/>
+          </a:prstGeom>
+          <a:solidFill>
+            <a:srgbClr val="1C1C1C"/>
+          </a:solidFill>
+          <a:ln>
+            <a:noFill/>
+          </a:ln>
+        </p:spPr>
+        <p:txBody>
+          <a:bodyPr/>
+          <a:lstStyle/>
+          <a:p/>
+        </p:txBody>
+      </p:sp>
       <p:sp>
         <p:nvSpPr>
           <p:cNvPr id="2" name="Rectangle 1"/>
@@ -3444,6 +3473,35 @@
         <p:nvPr/>
       </p:nvGrpSpPr>
       <p:grpSpPr/>
+      <p:sp xmlns:a="http://schemas.openxmlformats.org/drawingml/2006/main" xmlns:p="http://schemas.openxmlformats.org/presentationml/2006/main">
+        <p:nvSpPr>
+          <p:cNvPr id="9900" name="_BG_DARK_"/>
+          <p:cNvSpPr>
+            <a:spLocks noSelect="1" noMove="1" noResize="1"/>
+          </p:cNvSpPr>
+          <p:nvPr/>
+        </p:nvSpPr>
+        <p:spPr>
+          <a:xfrm>
+            <a:off x="0" y="0"/>
+            <a:ext cx="9144000" cy="5143500"/>
+          </a:xfrm>
+          <a:prstGeom prst="rect">
+            <a:avLst/>
+          </a:prstGeom>
+          <a:solidFill>
+            <a:srgbClr val="1C1C1C"/>
+          </a:solidFill>
+          <a:ln>
+            <a:noFill/>
+          </a:ln>
+        </p:spPr>
+        <p:txBody>
+          <a:bodyPr/>
+          <a:lstStyle/>
+          <a:p/>
+        </p:txBody>
+      </p:sp>
       <p:sp>
         <p:nvSpPr>
           <p:cNvPr id="2" name="Rectangle 1"/>
@@ -3846,6 +3904,35 @@
         <p:nvPr/>
       </p:nvGrpSpPr>
       <p:grpSpPr/>
+      <p:sp xmlns:a="http://schemas.openxmlformats.org/drawingml/2006/main" xmlns:p="http://schemas.openxmlformats.org/presentationml/2006/main">
+        <p:nvSpPr>
+          <p:cNvPr id="9900" name="_BG_DARK_"/>
+          <p:cNvSpPr>
+            <a:spLocks noSelect="1" noMove="1" noResize="1"/>
+          </p:cNvSpPr>
+          <p:nvPr/>
+        </p:nvSpPr>
+        <p:spPr>
+          <a:xfrm>
+            <a:off x="0" y="0"/>
+            <a:ext cx="9144000" cy="5143500"/>
+          </a:xfrm>
+          <a:prstGeom prst="rect">
+            <a:avLst/>
+          </a:prstGeom>
+          <a:solidFill>
+            <a:srgbClr val="1C1C1C"/>
+          </a:solidFill>
+          <a:ln>
+            <a:noFill/>
+          </a:ln>
+        </p:spPr>
+        <p:txBody>
+          <a:bodyPr/>
+          <a:lstStyle/>
+          <a:p/>
+        </p:txBody>
+      </p:sp>
       <p:sp>
         <p:nvSpPr>
           <p:cNvPr id="2" name="Rectangle 1"/>
@@ -4051,6 +4138,35 @@
         <p:nvPr/>
       </p:nvGrpSpPr>
       <p:grpSpPr/>
+      <p:sp xmlns:a="http://schemas.openxmlformats.org/drawingml/2006/main" xmlns:p="http://schemas.openxmlformats.org/presentationml/2006/main">
+        <p:nvSpPr>
+          <p:cNvPr id="9900" name="_BG_DARK_"/>
+          <p:cNvSpPr>
+            <a:spLocks noSelect="1" noMove="1" noResize="1"/>
+          </p:cNvSpPr>
+          <p:nvPr/>
+        </p:nvSpPr>
+        <p:spPr>
+          <a:xfrm>
+            <a:off x="0" y="0"/>
+            <a:ext cx="9144000" cy="5143500"/>
+          </a:xfrm>
+          <a:prstGeom prst="rect">
+            <a:avLst/>
+          </a:prstGeom>
+          <a:solidFill>
+            <a:srgbClr val="1C1C1C"/>
+          </a:solidFill>
+          <a:ln>
+            <a:noFill/>
+          </a:ln>
+        </p:spPr>
+        <p:txBody>
+          <a:bodyPr/>
+          <a:lstStyle/>
+          <a:p/>
+        </p:txBody>
+      </p:sp>
       <p:sp>
         <p:nvSpPr>
           <p:cNvPr id="2" name="Rectangle 1"/>
@@ -4563,6 +4679,35 @@
         <p:nvPr/>
       </p:nvGrpSpPr>
       <p:grpSpPr/>
+      <p:sp xmlns:a="http://schemas.openxmlformats.org/drawingml/2006/main" xmlns:p="http://schemas.openxmlformats.org/presentationml/2006/main">
+        <p:nvSpPr>
+          <p:cNvPr id="9900" name="_BG_DARK_"/>
+          <p:cNvSpPr>
+            <a:spLocks noSelect="1" noMove="1" noResize="1"/>
+          </p:cNvSpPr>
+          <p:nvPr/>
+        </p:nvSpPr>
+        <p:spPr>
+          <a:xfrm>
+            <a:off x="0" y="0"/>
+            <a:ext cx="9144000" cy="5143500"/>
+          </a:xfrm>
+          <a:prstGeom prst="rect">
+            <a:avLst/>
+          </a:prstGeom>
+          <a:solidFill>
+            <a:srgbClr val="1C1C1C"/>
+          </a:solidFill>
+          <a:ln>
+            <a:noFill/>
+          </a:ln>
+        </p:spPr>
+        <p:txBody>
+          <a:bodyPr/>
+          <a:lstStyle/>
+          <a:p/>
+        </p:txBody>
+      </p:sp>
       <p:sp>
         <p:nvSpPr>
           <p:cNvPr id="2" name="TextBox 1"/>
@@ -4657,6 +4802,35 @@
         <p:nvPr/>
       </p:nvGrpSpPr>
       <p:grpSpPr/>
+      <p:sp xmlns:a="http://schemas.openxmlformats.org/drawingml/2006/main" xmlns:p="http://schemas.openxmlformats.org/presentationml/2006/main">
+        <p:nvSpPr>
+          <p:cNvPr id="9900" name="_BG_DARK_"/>
+          <p:cNvSpPr>
+            <a:spLocks noSelect="1" noMove="1" noResize="1"/>
+          </p:cNvSpPr>
+          <p:nvPr/>
+        </p:nvSpPr>
+        <p:spPr>
+          <a:xfrm>
+            <a:off x="0" y="0"/>
+            <a:ext cx="9144000" cy="5143500"/>
+          </a:xfrm>
+          <a:prstGeom prst="rect">
+            <a:avLst/>
+          </a:prstGeom>
+          <a:solidFill>
+            <a:srgbClr val="1C1C1C"/>
+          </a:solidFill>
+          <a:ln>
+            <a:noFill/>
+          </a:ln>
+        </p:spPr>
+        <p:txBody>
+          <a:bodyPr/>
+          <a:lstStyle/>
+          <a:p/>
+        </p:txBody>
+      </p:sp>
       <p:sp>
         <p:nvSpPr>
           <p:cNvPr id="2" name="Rectangle 1"/>
@@ -4862,6 +5036,35 @@
         <p:nvPr/>
       </p:nvGrpSpPr>
       <p:grpSpPr/>
+      <p:sp xmlns:a="http://schemas.openxmlformats.org/drawingml/2006/main" xmlns:p="http://schemas.openxmlformats.org/presentationml/2006/main">
+        <p:nvSpPr>
+          <p:cNvPr id="9900" name="_BG_DARK_"/>
+          <p:cNvSpPr>
+            <a:spLocks noSelect="1" noMove="1" noResize="1"/>
+          </p:cNvSpPr>
+          <p:nvPr/>
+        </p:nvSpPr>
+        <p:spPr>
+          <a:xfrm>
+            <a:off x="0" y="0"/>
+            <a:ext cx="9144000" cy="5143500"/>
+          </a:xfrm>
+          <a:prstGeom prst="rect">
+            <a:avLst/>
+          </a:prstGeom>
+          <a:solidFill>
+            <a:srgbClr val="1C1C1C"/>
+          </a:solidFill>
+          <a:ln>
+            <a:noFill/>
+          </a:ln>
+        </p:spPr>
+        <p:txBody>
+          <a:bodyPr/>
+          <a:lstStyle/>
+          <a:p/>
+        </p:txBody>
+      </p:sp>
       <p:sp>
         <p:nvSpPr>
           <p:cNvPr id="2" name="Rectangle 1"/>
@@ -5359,6 +5562,35 @@
         <p:nvPr/>
       </p:nvGrpSpPr>
       <p:grpSpPr/>
+      <p:sp xmlns:a="http://schemas.openxmlformats.org/drawingml/2006/main" xmlns:p="http://schemas.openxmlformats.org/presentationml/2006/main">
+        <p:nvSpPr>
+          <p:cNvPr id="9900" name="_BG_DARK_"/>
+          <p:cNvSpPr>
+            <a:spLocks noSelect="1" noMove="1" noResize="1"/>
+          </p:cNvSpPr>
+          <p:nvPr/>
+        </p:nvSpPr>
+        <p:spPr>
+          <a:xfrm>
+            <a:off x="0" y="0"/>
+            <a:ext cx="9144000" cy="5143500"/>
+          </a:xfrm>
+          <a:prstGeom prst="rect">
+            <a:avLst/>
+          </a:prstGeom>
+          <a:solidFill>
+            <a:srgbClr val="1C1C1C"/>
+          </a:solidFill>
+          <a:ln>
+            <a:noFill/>
+          </a:ln>
+        </p:spPr>
+        <p:txBody>
+          <a:bodyPr/>
+          <a:lstStyle/>
+          <a:p/>
+        </p:txBody>
+      </p:sp>
       <p:sp>
         <p:nvSpPr>
           <p:cNvPr id="2" name="Rectangle 1"/>
@@ -5898,6 +6130,35 @@
         <p:nvPr/>
       </p:nvGrpSpPr>
       <p:grpSpPr/>
+      <p:sp xmlns:a="http://schemas.openxmlformats.org/drawingml/2006/main" xmlns:p="http://schemas.openxmlformats.org/presentationml/2006/main">
+        <p:nvSpPr>
+          <p:cNvPr id="9900" name="_BG_DARK_"/>
+          <p:cNvSpPr>
+            <a:spLocks noSelect="1" noMove="1" noResize="1"/>
+          </p:cNvSpPr>
+          <p:nvPr/>
+        </p:nvSpPr>
+        <p:spPr>
+          <a:xfrm>
+            <a:off x="0" y="0"/>
+            <a:ext cx="9144000" cy="5143500"/>
+          </a:xfrm>
+          <a:prstGeom prst="rect">
+            <a:avLst/>
+          </a:prstGeom>
+          <a:solidFill>
+            <a:srgbClr val="1C1C1C"/>
+          </a:solidFill>
+          <a:ln>
+            <a:noFill/>
+          </a:ln>
+        </p:spPr>
+        <p:txBody>
+          <a:bodyPr/>
+          <a:lstStyle/>
+          <a:p/>
+        </p:txBody>
+      </p:sp>
       <p:sp>
         <p:nvSpPr>
           <p:cNvPr id="2" name="Rectangle 1"/>
@@ -6384,6 +6645,35 @@
         <p:nvPr/>
       </p:nvGrpSpPr>
       <p:grpSpPr/>
+      <p:sp xmlns:a="http://schemas.openxmlformats.org/drawingml/2006/main" xmlns:p="http://schemas.openxmlformats.org/presentationml/2006/main">
+        <p:nvSpPr>
+          <p:cNvPr id="9900" name="_BG_DARK_"/>
+          <p:cNvSpPr>
+            <a:spLocks noSelect="1" noMove="1" noResize="1"/>
+          </p:cNvSpPr>
+          <p:nvPr/>
+        </p:nvSpPr>
+        <p:spPr>
+          <a:xfrm>
+            <a:off x="0" y="0"/>
+            <a:ext cx="9144000" cy="5143500"/>
+          </a:xfrm>
+          <a:prstGeom prst="rect">
+            <a:avLst/>
+          </a:prstGeom>
+          <a:solidFill>
+            <a:srgbClr val="1C1C1C"/>
+          </a:solidFill>
+          <a:ln>
+            <a:noFill/>
+          </a:ln>
+        </p:spPr>
+        <p:txBody>
+          <a:bodyPr/>
+          <a:lstStyle/>
+          <a:p/>
+        </p:txBody>
+      </p:sp>
       <p:sp>
         <p:nvSpPr>
           <p:cNvPr id="2" name="Rectangle 1"/>
@@ -6589,6 +6879,35 @@
         <p:nvPr/>
       </p:nvGrpSpPr>
       <p:grpSpPr/>
+      <p:sp xmlns:a="http://schemas.openxmlformats.org/drawingml/2006/main" xmlns:p="http://schemas.openxmlformats.org/presentationml/2006/main">
+        <p:nvSpPr>
+          <p:cNvPr id="9900" name="_BG_DARK_"/>
+          <p:cNvSpPr>
+            <a:spLocks noSelect="1" noMove="1" noResize="1"/>
+          </p:cNvSpPr>
+          <p:nvPr/>
+        </p:nvSpPr>
+        <p:spPr>
+          <a:xfrm>
+            <a:off x="0" y="0"/>
+            <a:ext cx="9144000" cy="5143500"/>
+          </a:xfrm>
+          <a:prstGeom prst="rect">
+            <a:avLst/>
+          </a:prstGeom>
+          <a:solidFill>
+            <a:srgbClr val="1C1C1C"/>
+          </a:solidFill>
+          <a:ln>
+            <a:noFill/>
+          </a:ln>
+        </p:spPr>
+        <p:txBody>
+          <a:bodyPr/>
+          <a:lstStyle/>
+          <a:p/>
+        </p:txBody>
+      </p:sp>
       <p:sp>
         <p:nvSpPr>
           <p:cNvPr id="2" name="Rectangle 1"/>
@@ -7031,6 +7350,35 @@
         <p:nvPr/>
       </p:nvGrpSpPr>
       <p:grpSpPr/>
+      <p:sp xmlns:a="http://schemas.openxmlformats.org/drawingml/2006/main" xmlns:p="http://schemas.openxmlformats.org/presentationml/2006/main">
+        <p:nvSpPr>
+          <p:cNvPr id="9900" name="_BG_DARK_"/>
+          <p:cNvSpPr>
+            <a:spLocks noSelect="1" noMove="1" noResize="1"/>
+          </p:cNvSpPr>
+          <p:nvPr/>
+        </p:nvSpPr>
+        <p:spPr>
+          <a:xfrm>
+            <a:off x="0" y="0"/>
+            <a:ext cx="9144000" cy="5143500"/>
+          </a:xfrm>
+          <a:prstGeom prst="rect">
+            <a:avLst/>
+          </a:prstGeom>
+          <a:solidFill>
+            <a:srgbClr val="1C1C1C"/>
+          </a:solidFill>
+          <a:ln>
+            <a:noFill/>
+          </a:ln>
+        </p:spPr>
+        <p:txBody>
+          <a:bodyPr/>
+          <a:lstStyle/>
+          <a:p/>
+        </p:txBody>
+      </p:sp>
       <p:sp>
         <p:nvSpPr>
           <p:cNvPr id="2" name="Rectangle 1"/>
@@ -7742,6 +8090,35 @@
         <p:nvPr/>
       </p:nvGrpSpPr>
       <p:grpSpPr/>
+      <p:sp xmlns:a="http://schemas.openxmlformats.org/drawingml/2006/main" xmlns:p="http://schemas.openxmlformats.org/presentationml/2006/main">
+        <p:nvSpPr>
+          <p:cNvPr id="9900" name="_BG_DARK_"/>
+          <p:cNvSpPr>
+            <a:spLocks noSelect="1" noMove="1" noResize="1"/>
+          </p:cNvSpPr>
+          <p:nvPr/>
+        </p:nvSpPr>
+        <p:spPr>
+          <a:xfrm>
+            <a:off x="0" y="0"/>
+            <a:ext cx="9144000" cy="5143500"/>
+          </a:xfrm>
+          <a:prstGeom prst="rect">
+            <a:avLst/>
+          </a:prstGeom>
+          <a:solidFill>
+            <a:srgbClr val="1C1C1C"/>
+          </a:solidFill>
+          <a:ln>
+            <a:noFill/>
+          </a:ln>
+        </p:spPr>
+        <p:txBody>
+          <a:bodyPr/>
+          <a:lstStyle/>
+          <a:p/>
+        </p:txBody>
+      </p:sp>
       <p:sp>
         <p:nvSpPr>
           <p:cNvPr id="2" name="Rectangle 1"/>
@@ -7947,6 +8324,35 @@
         <p:nvPr/>
       </p:nvGrpSpPr>
       <p:grpSpPr/>
+      <p:sp xmlns:a="http://schemas.openxmlformats.org/drawingml/2006/main" xmlns:p="http://schemas.openxmlformats.org/presentationml/2006/main">
+        <p:nvSpPr>
+          <p:cNvPr id="9900" name="_BG_DARK_"/>
+          <p:cNvSpPr>
+            <a:spLocks noSelect="1" noMove="1" noResize="1"/>
+          </p:cNvSpPr>
+          <p:nvPr/>
+        </p:nvSpPr>
+        <p:spPr>
+          <a:xfrm>
+            <a:off x="0" y="0"/>
+            <a:ext cx="9144000" cy="5143500"/>
+          </a:xfrm>
+          <a:prstGeom prst="rect">
+            <a:avLst/>
+          </a:prstGeom>
+          <a:solidFill>
+            <a:srgbClr val="1C1C1C"/>
+          </a:solidFill>
+          <a:ln>
+            <a:noFill/>
+          </a:ln>
+        </p:spPr>
+        <p:txBody>
+          <a:bodyPr/>
+          <a:lstStyle/>
+          <a:p/>
+        </p:txBody>
+      </p:sp>
       <p:sp>
         <p:nvSpPr>
           <p:cNvPr id="2" name="Rectangle 1"/>
@@ -8605,6 +9011,35 @@
         <p:nvPr/>
       </p:nvGrpSpPr>
       <p:grpSpPr/>
+      <p:sp xmlns:a="http://schemas.openxmlformats.org/drawingml/2006/main" xmlns:p="http://schemas.openxmlformats.org/presentationml/2006/main">
+        <p:nvSpPr>
+          <p:cNvPr id="9900" name="_BG_DARK_"/>
+          <p:cNvSpPr>
+            <a:spLocks noSelect="1" noMove="1" noResize="1"/>
+          </p:cNvSpPr>
+          <p:nvPr/>
+        </p:nvSpPr>
+        <p:spPr>
+          <a:xfrm>
+            <a:off x="0" y="0"/>
+            <a:ext cx="9144000" cy="5143500"/>
+          </a:xfrm>
+          <a:prstGeom prst="rect">
+            <a:avLst/>
+          </a:prstGeom>
+          <a:solidFill>
+            <a:srgbClr val="1C1C1C"/>
+          </a:solidFill>
+          <a:ln>
+            <a:noFill/>
+          </a:ln>
+        </p:spPr>
+        <p:txBody>
+          <a:bodyPr/>
+          <a:lstStyle/>
+          <a:p/>
+        </p:txBody>
+      </p:sp>
       <p:sp>
         <p:nvSpPr>
           <p:cNvPr id="2" name="Rectangle 1"/>
@@ -9160,6 +9595,35 @@
         <p:nvPr/>
       </p:nvGrpSpPr>
       <p:grpSpPr/>
+      <p:sp xmlns:a="http://schemas.openxmlformats.org/drawingml/2006/main" xmlns:p="http://schemas.openxmlformats.org/presentationml/2006/main">
+        <p:nvSpPr>
+          <p:cNvPr id="9900" name="_BG_DARK_"/>
+          <p:cNvSpPr>
+            <a:spLocks noSelect="1" noMove="1" noResize="1"/>
+          </p:cNvSpPr>
+          <p:nvPr/>
+        </p:nvSpPr>
+        <p:spPr>
+          <a:xfrm>
+            <a:off x="0" y="0"/>
+            <a:ext cx="9144000" cy="5143500"/>
+          </a:xfrm>
+          <a:prstGeom prst="rect">
+            <a:avLst/>
+          </a:prstGeom>
+          <a:solidFill>
+            <a:srgbClr val="1C1C1C"/>
+          </a:solidFill>
+          <a:ln>
+            <a:noFill/>
+          </a:ln>
+        </p:spPr>
+        <p:txBody>
+          <a:bodyPr/>
+          <a:lstStyle/>
+          <a:p/>
+        </p:txBody>
+      </p:sp>
       <p:sp>
         <p:nvSpPr>
           <p:cNvPr id="2" name="Rectangle 1"/>
@@ -9715,6 +10179,35 @@
         <p:nvPr/>
       </p:nvGrpSpPr>
       <p:grpSpPr/>
+      <p:sp xmlns:a="http://schemas.openxmlformats.org/drawingml/2006/main" xmlns:p="http://schemas.openxmlformats.org/presentationml/2006/main">
+        <p:nvSpPr>
+          <p:cNvPr id="9900" name="_BG_DARK_"/>
+          <p:cNvSpPr>
+            <a:spLocks noSelect="1" noMove="1" noResize="1"/>
+          </p:cNvSpPr>
+          <p:nvPr/>
+        </p:nvSpPr>
+        <p:spPr>
+          <a:xfrm>
+            <a:off x="0" y="0"/>
+            <a:ext cx="9144000" cy="5143500"/>
+          </a:xfrm>
+          <a:prstGeom prst="rect">
+            <a:avLst/>
+          </a:prstGeom>
+          <a:solidFill>
+            <a:srgbClr val="1C1C1C"/>
+          </a:solidFill>
+          <a:ln>
+            <a:noFill/>
+          </a:ln>
+        </p:spPr>
+        <p:txBody>
+          <a:bodyPr/>
+          <a:lstStyle/>
+          <a:p/>
+        </p:txBody>
+      </p:sp>
       <p:sp>
         <p:nvSpPr>
           <p:cNvPr id="2" name="Rectangle 1"/>
@@ -10180,6 +10673,35 @@
         <p:nvPr/>
       </p:nvGrpSpPr>
       <p:grpSpPr/>
+      <p:sp xmlns:a="http://schemas.openxmlformats.org/drawingml/2006/main" xmlns:p="http://schemas.openxmlformats.org/presentationml/2006/main">
+        <p:nvSpPr>
+          <p:cNvPr id="9900" name="_BG_DARK_"/>
+          <p:cNvSpPr>
+            <a:spLocks noSelect="1" noMove="1" noResize="1"/>
+          </p:cNvSpPr>
+          <p:nvPr/>
+        </p:nvSpPr>
+        <p:spPr>
+          <a:xfrm>
+            <a:off x="0" y="0"/>
+            <a:ext cx="9144000" cy="5143500"/>
+          </a:xfrm>
+          <a:prstGeom prst="rect">
+            <a:avLst/>
+          </a:prstGeom>
+          <a:solidFill>
+            <a:srgbClr val="1C1C1C"/>
+          </a:solidFill>
+          <a:ln>
+            <a:noFill/>
+          </a:ln>
+        </p:spPr>
+        <p:txBody>
+          <a:bodyPr/>
+          <a:lstStyle/>
+          <a:p/>
+        </p:txBody>
+      </p:sp>
       <p:sp>
         <p:nvSpPr>
           <p:cNvPr id="2" name="Rectangle 1"/>
@@ -10385,6 +10907,35 @@
         <p:nvPr/>
       </p:nvGrpSpPr>
       <p:grpSpPr/>
+      <p:sp xmlns:a="http://schemas.openxmlformats.org/drawingml/2006/main" xmlns:p="http://schemas.openxmlformats.org/presentationml/2006/main">
+        <p:nvSpPr>
+          <p:cNvPr id="9900" name="_BG_DARK_"/>
+          <p:cNvSpPr>
+            <a:spLocks noSelect="1" noMove="1" noResize="1"/>
+          </p:cNvSpPr>
+          <p:nvPr/>
+        </p:nvSpPr>
+        <p:spPr>
+          <a:xfrm>
+            <a:off x="0" y="0"/>
+            <a:ext cx="9144000" cy="5143500"/>
+          </a:xfrm>
+          <a:prstGeom prst="rect">
+            <a:avLst/>
+          </a:prstGeom>
+          <a:solidFill>
+            <a:srgbClr val="1C1C1C"/>
+          </a:solidFill>
+          <a:ln>
+            <a:noFill/>
+          </a:ln>
+        </p:spPr>
+        <p:txBody>
+          <a:bodyPr/>
+          <a:lstStyle/>
+          <a:p/>
+        </p:txBody>
+      </p:sp>
       <p:sp>
         <p:nvSpPr>
           <p:cNvPr id="2" name="Rectangle 1"/>

--- a/00-01_han-ai/training-materials/course05_jissen_claude_code.pptx
+++ b/00-01_han-ai/training-materials/course05_jissen_claude_code.pptx
@@ -3205,12 +3205,10 @@
         <p:nvPr/>
       </p:nvGrpSpPr>
       <p:grpSpPr/>
-      <p:sp xmlns:a="http://schemas.openxmlformats.org/drawingml/2006/main" xmlns:p="http://schemas.openxmlformats.org/presentationml/2006/main">
+      <p:sp>
         <p:nvSpPr>
           <p:cNvPr id="9900" name="_BG_DARK_"/>
-          <p:cNvSpPr>
-            <a:spLocks noSelect="1" noMove="1" noResize="1"/>
-          </p:cNvSpPr>
+          <p:cNvSpPr/>
           <p:nvPr/>
         </p:nvSpPr>
         <p:spPr>
@@ -3228,6 +3226,20 @@
             <a:noFill/>
           </a:ln>
         </p:spPr>
+        <p:style>
+          <a:lnRef idx="1">
+            <a:srgbClr val="1C1C1C"/>
+          </a:lnRef>
+          <a:fillRef idx="1">
+            <a:srgbClr val="1C1C1C"/>
+          </a:fillRef>
+          <a:effectRef idx="0">
+            <a:srgbClr val="1C1C1C"/>
+          </a:effectRef>
+          <a:fontRef idx="minor">
+            <a:srgbClr val="EEEEEE"/>
+          </a:fontRef>
+        </p:style>
         <p:txBody>
           <a:bodyPr/>
           <a:lstStyle/>
@@ -3473,12 +3485,10 @@
         <p:nvPr/>
       </p:nvGrpSpPr>
       <p:grpSpPr/>
-      <p:sp xmlns:a="http://schemas.openxmlformats.org/drawingml/2006/main" xmlns:p="http://schemas.openxmlformats.org/presentationml/2006/main">
+      <p:sp>
         <p:nvSpPr>
           <p:cNvPr id="9900" name="_BG_DARK_"/>
-          <p:cNvSpPr>
-            <a:spLocks noSelect="1" noMove="1" noResize="1"/>
-          </p:cNvSpPr>
+          <p:cNvSpPr/>
           <p:nvPr/>
         </p:nvSpPr>
         <p:spPr>
@@ -3496,6 +3506,20 @@
             <a:noFill/>
           </a:ln>
         </p:spPr>
+        <p:style>
+          <a:lnRef idx="1">
+            <a:srgbClr val="1C1C1C"/>
+          </a:lnRef>
+          <a:fillRef idx="1">
+            <a:srgbClr val="1C1C1C"/>
+          </a:fillRef>
+          <a:effectRef idx="0">
+            <a:srgbClr val="1C1C1C"/>
+          </a:effectRef>
+          <a:fontRef idx="minor">
+            <a:srgbClr val="EEEEEE"/>
+          </a:fontRef>
+        </p:style>
         <p:txBody>
           <a:bodyPr/>
           <a:lstStyle/>
@@ -3904,12 +3928,10 @@
         <p:nvPr/>
       </p:nvGrpSpPr>
       <p:grpSpPr/>
-      <p:sp xmlns:a="http://schemas.openxmlformats.org/drawingml/2006/main" xmlns:p="http://schemas.openxmlformats.org/presentationml/2006/main">
+      <p:sp>
         <p:nvSpPr>
           <p:cNvPr id="9900" name="_BG_DARK_"/>
-          <p:cNvSpPr>
-            <a:spLocks noSelect="1" noMove="1" noResize="1"/>
-          </p:cNvSpPr>
+          <p:cNvSpPr/>
           <p:nvPr/>
         </p:nvSpPr>
         <p:spPr>
@@ -3927,6 +3949,20 @@
             <a:noFill/>
           </a:ln>
         </p:spPr>
+        <p:style>
+          <a:lnRef idx="1">
+            <a:srgbClr val="1C1C1C"/>
+          </a:lnRef>
+          <a:fillRef idx="1">
+            <a:srgbClr val="1C1C1C"/>
+          </a:fillRef>
+          <a:effectRef idx="0">
+            <a:srgbClr val="1C1C1C"/>
+          </a:effectRef>
+          <a:fontRef idx="minor">
+            <a:srgbClr val="EEEEEE"/>
+          </a:fontRef>
+        </p:style>
         <p:txBody>
           <a:bodyPr/>
           <a:lstStyle/>
@@ -4138,12 +4174,10 @@
         <p:nvPr/>
       </p:nvGrpSpPr>
       <p:grpSpPr/>
-      <p:sp xmlns:a="http://schemas.openxmlformats.org/drawingml/2006/main" xmlns:p="http://schemas.openxmlformats.org/presentationml/2006/main">
+      <p:sp>
         <p:nvSpPr>
           <p:cNvPr id="9900" name="_BG_DARK_"/>
-          <p:cNvSpPr>
-            <a:spLocks noSelect="1" noMove="1" noResize="1"/>
-          </p:cNvSpPr>
+          <p:cNvSpPr/>
           <p:nvPr/>
         </p:nvSpPr>
         <p:spPr>
@@ -4161,6 +4195,20 @@
             <a:noFill/>
           </a:ln>
         </p:spPr>
+        <p:style>
+          <a:lnRef idx="1">
+            <a:srgbClr val="1C1C1C"/>
+          </a:lnRef>
+          <a:fillRef idx="1">
+            <a:srgbClr val="1C1C1C"/>
+          </a:fillRef>
+          <a:effectRef idx="0">
+            <a:srgbClr val="1C1C1C"/>
+          </a:effectRef>
+          <a:fontRef idx="minor">
+            <a:srgbClr val="EEEEEE"/>
+          </a:fontRef>
+        </p:style>
         <p:txBody>
           <a:bodyPr/>
           <a:lstStyle/>
@@ -4679,12 +4727,10 @@
         <p:nvPr/>
       </p:nvGrpSpPr>
       <p:grpSpPr/>
-      <p:sp xmlns:a="http://schemas.openxmlformats.org/drawingml/2006/main" xmlns:p="http://schemas.openxmlformats.org/presentationml/2006/main">
+      <p:sp>
         <p:nvSpPr>
           <p:cNvPr id="9900" name="_BG_DARK_"/>
-          <p:cNvSpPr>
-            <a:spLocks noSelect="1" noMove="1" noResize="1"/>
-          </p:cNvSpPr>
+          <p:cNvSpPr/>
           <p:nvPr/>
         </p:nvSpPr>
         <p:spPr>
@@ -4702,6 +4748,20 @@
             <a:noFill/>
           </a:ln>
         </p:spPr>
+        <p:style>
+          <a:lnRef idx="1">
+            <a:srgbClr val="1C1C1C"/>
+          </a:lnRef>
+          <a:fillRef idx="1">
+            <a:srgbClr val="1C1C1C"/>
+          </a:fillRef>
+          <a:effectRef idx="0">
+            <a:srgbClr val="1C1C1C"/>
+          </a:effectRef>
+          <a:fontRef idx="minor">
+            <a:srgbClr val="EEEEEE"/>
+          </a:fontRef>
+        </p:style>
         <p:txBody>
           <a:bodyPr/>
           <a:lstStyle/>
@@ -4802,12 +4862,10 @@
         <p:nvPr/>
       </p:nvGrpSpPr>
       <p:grpSpPr/>
-      <p:sp xmlns:a="http://schemas.openxmlformats.org/drawingml/2006/main" xmlns:p="http://schemas.openxmlformats.org/presentationml/2006/main">
+      <p:sp>
         <p:nvSpPr>
           <p:cNvPr id="9900" name="_BG_DARK_"/>
-          <p:cNvSpPr>
-            <a:spLocks noSelect="1" noMove="1" noResize="1"/>
-          </p:cNvSpPr>
+          <p:cNvSpPr/>
           <p:nvPr/>
         </p:nvSpPr>
         <p:spPr>
@@ -4825,6 +4883,20 @@
             <a:noFill/>
           </a:ln>
         </p:spPr>
+        <p:style>
+          <a:lnRef idx="1">
+            <a:srgbClr val="1C1C1C"/>
+          </a:lnRef>
+          <a:fillRef idx="1">
+            <a:srgbClr val="1C1C1C"/>
+          </a:fillRef>
+          <a:effectRef idx="0">
+            <a:srgbClr val="1C1C1C"/>
+          </a:effectRef>
+          <a:fontRef idx="minor">
+            <a:srgbClr val="EEEEEE"/>
+          </a:fontRef>
+        </p:style>
         <p:txBody>
           <a:bodyPr/>
           <a:lstStyle/>
@@ -5036,12 +5108,10 @@
         <p:nvPr/>
       </p:nvGrpSpPr>
       <p:grpSpPr/>
-      <p:sp xmlns:a="http://schemas.openxmlformats.org/drawingml/2006/main" xmlns:p="http://schemas.openxmlformats.org/presentationml/2006/main">
+      <p:sp>
         <p:nvSpPr>
           <p:cNvPr id="9900" name="_BG_DARK_"/>
-          <p:cNvSpPr>
-            <a:spLocks noSelect="1" noMove="1" noResize="1"/>
-          </p:cNvSpPr>
+          <p:cNvSpPr/>
           <p:nvPr/>
         </p:nvSpPr>
         <p:spPr>
@@ -5059,6 +5129,20 @@
             <a:noFill/>
           </a:ln>
         </p:spPr>
+        <p:style>
+          <a:lnRef idx="1">
+            <a:srgbClr val="1C1C1C"/>
+          </a:lnRef>
+          <a:fillRef idx="1">
+            <a:srgbClr val="1C1C1C"/>
+          </a:fillRef>
+          <a:effectRef idx="0">
+            <a:srgbClr val="1C1C1C"/>
+          </a:effectRef>
+          <a:fontRef idx="minor">
+            <a:srgbClr val="EEEEEE"/>
+          </a:fontRef>
+        </p:style>
         <p:txBody>
           <a:bodyPr/>
           <a:lstStyle/>
@@ -5562,12 +5646,10 @@
         <p:nvPr/>
       </p:nvGrpSpPr>
       <p:grpSpPr/>
-      <p:sp xmlns:a="http://schemas.openxmlformats.org/drawingml/2006/main" xmlns:p="http://schemas.openxmlformats.org/presentationml/2006/main">
+      <p:sp>
         <p:nvSpPr>
           <p:cNvPr id="9900" name="_BG_DARK_"/>
-          <p:cNvSpPr>
-            <a:spLocks noSelect="1" noMove="1" noResize="1"/>
-          </p:cNvSpPr>
+          <p:cNvSpPr/>
           <p:nvPr/>
         </p:nvSpPr>
         <p:spPr>
@@ -5585,6 +5667,20 @@
             <a:noFill/>
           </a:ln>
         </p:spPr>
+        <p:style>
+          <a:lnRef idx="1">
+            <a:srgbClr val="1C1C1C"/>
+          </a:lnRef>
+          <a:fillRef idx="1">
+            <a:srgbClr val="1C1C1C"/>
+          </a:fillRef>
+          <a:effectRef idx="0">
+            <a:srgbClr val="1C1C1C"/>
+          </a:effectRef>
+          <a:fontRef idx="minor">
+            <a:srgbClr val="EEEEEE"/>
+          </a:fontRef>
+        </p:style>
         <p:txBody>
           <a:bodyPr/>
           <a:lstStyle/>
@@ -6130,12 +6226,10 @@
         <p:nvPr/>
       </p:nvGrpSpPr>
       <p:grpSpPr/>
-      <p:sp xmlns:a="http://schemas.openxmlformats.org/drawingml/2006/main" xmlns:p="http://schemas.openxmlformats.org/presentationml/2006/main">
+      <p:sp>
         <p:nvSpPr>
           <p:cNvPr id="9900" name="_BG_DARK_"/>
-          <p:cNvSpPr>
-            <a:spLocks noSelect="1" noMove="1" noResize="1"/>
-          </p:cNvSpPr>
+          <p:cNvSpPr/>
           <p:nvPr/>
         </p:nvSpPr>
         <p:spPr>
@@ -6153,6 +6247,20 @@
             <a:noFill/>
           </a:ln>
         </p:spPr>
+        <p:style>
+          <a:lnRef idx="1">
+            <a:srgbClr val="1C1C1C"/>
+          </a:lnRef>
+          <a:fillRef idx="1">
+            <a:srgbClr val="1C1C1C"/>
+          </a:fillRef>
+          <a:effectRef idx="0">
+            <a:srgbClr val="1C1C1C"/>
+          </a:effectRef>
+          <a:fontRef idx="minor">
+            <a:srgbClr val="EEEEEE"/>
+          </a:fontRef>
+        </p:style>
         <p:txBody>
           <a:bodyPr/>
           <a:lstStyle/>
@@ -6645,12 +6753,10 @@
         <p:nvPr/>
       </p:nvGrpSpPr>
       <p:grpSpPr/>
-      <p:sp xmlns:a="http://schemas.openxmlformats.org/drawingml/2006/main" xmlns:p="http://schemas.openxmlformats.org/presentationml/2006/main">
+      <p:sp>
         <p:nvSpPr>
           <p:cNvPr id="9900" name="_BG_DARK_"/>
-          <p:cNvSpPr>
-            <a:spLocks noSelect="1" noMove="1" noResize="1"/>
-          </p:cNvSpPr>
+          <p:cNvSpPr/>
           <p:nvPr/>
         </p:nvSpPr>
         <p:spPr>
@@ -6668,6 +6774,20 @@
             <a:noFill/>
           </a:ln>
         </p:spPr>
+        <p:style>
+          <a:lnRef idx="1">
+            <a:srgbClr val="1C1C1C"/>
+          </a:lnRef>
+          <a:fillRef idx="1">
+            <a:srgbClr val="1C1C1C"/>
+          </a:fillRef>
+          <a:effectRef idx="0">
+            <a:srgbClr val="1C1C1C"/>
+          </a:effectRef>
+          <a:fontRef idx="minor">
+            <a:srgbClr val="EEEEEE"/>
+          </a:fontRef>
+        </p:style>
         <p:txBody>
           <a:bodyPr/>
           <a:lstStyle/>
@@ -6879,12 +6999,10 @@
         <p:nvPr/>
       </p:nvGrpSpPr>
       <p:grpSpPr/>
-      <p:sp xmlns:a="http://schemas.openxmlformats.org/drawingml/2006/main" xmlns:p="http://schemas.openxmlformats.org/presentationml/2006/main">
+      <p:sp>
         <p:nvSpPr>
           <p:cNvPr id="9900" name="_BG_DARK_"/>
-          <p:cNvSpPr>
-            <a:spLocks noSelect="1" noMove="1" noResize="1"/>
-          </p:cNvSpPr>
+          <p:cNvSpPr/>
           <p:nvPr/>
         </p:nvSpPr>
         <p:spPr>
@@ -6902,6 +7020,20 @@
             <a:noFill/>
           </a:ln>
         </p:spPr>
+        <p:style>
+          <a:lnRef idx="1">
+            <a:srgbClr val="1C1C1C"/>
+          </a:lnRef>
+          <a:fillRef idx="1">
+            <a:srgbClr val="1C1C1C"/>
+          </a:fillRef>
+          <a:effectRef idx="0">
+            <a:srgbClr val="1C1C1C"/>
+          </a:effectRef>
+          <a:fontRef idx="minor">
+            <a:srgbClr val="EEEEEE"/>
+          </a:fontRef>
+        </p:style>
         <p:txBody>
           <a:bodyPr/>
           <a:lstStyle/>
@@ -7350,12 +7482,10 @@
         <p:nvPr/>
       </p:nvGrpSpPr>
       <p:grpSpPr/>
-      <p:sp xmlns:a="http://schemas.openxmlformats.org/drawingml/2006/main" xmlns:p="http://schemas.openxmlformats.org/presentationml/2006/main">
+      <p:sp>
         <p:nvSpPr>
           <p:cNvPr id="9900" name="_BG_DARK_"/>
-          <p:cNvSpPr>
-            <a:spLocks noSelect="1" noMove="1" noResize="1"/>
-          </p:cNvSpPr>
+          <p:cNvSpPr/>
           <p:nvPr/>
         </p:nvSpPr>
         <p:spPr>
@@ -7373,6 +7503,20 @@
             <a:noFill/>
           </a:ln>
         </p:spPr>
+        <p:style>
+          <a:lnRef idx="1">
+            <a:srgbClr val="1C1C1C"/>
+          </a:lnRef>
+          <a:fillRef idx="1">
+            <a:srgbClr val="1C1C1C"/>
+          </a:fillRef>
+          <a:effectRef idx="0">
+            <a:srgbClr val="1C1C1C"/>
+          </a:effectRef>
+          <a:fontRef idx="minor">
+            <a:srgbClr val="EEEEEE"/>
+          </a:fontRef>
+        </p:style>
         <p:txBody>
           <a:bodyPr/>
           <a:lstStyle/>
@@ -8090,12 +8234,10 @@
         <p:nvPr/>
       </p:nvGrpSpPr>
       <p:grpSpPr/>
-      <p:sp xmlns:a="http://schemas.openxmlformats.org/drawingml/2006/main" xmlns:p="http://schemas.openxmlformats.org/presentationml/2006/main">
+      <p:sp>
         <p:nvSpPr>
           <p:cNvPr id="9900" name="_BG_DARK_"/>
-          <p:cNvSpPr>
-            <a:spLocks noSelect="1" noMove="1" noResize="1"/>
-          </p:cNvSpPr>
+          <p:cNvSpPr/>
           <p:nvPr/>
         </p:nvSpPr>
         <p:spPr>
@@ -8113,6 +8255,20 @@
             <a:noFill/>
           </a:ln>
         </p:spPr>
+        <p:style>
+          <a:lnRef idx="1">
+            <a:srgbClr val="1C1C1C"/>
+          </a:lnRef>
+          <a:fillRef idx="1">
+            <a:srgbClr val="1C1C1C"/>
+          </a:fillRef>
+          <a:effectRef idx="0">
+            <a:srgbClr val="1C1C1C"/>
+          </a:effectRef>
+          <a:fontRef idx="minor">
+            <a:srgbClr val="EEEEEE"/>
+          </a:fontRef>
+        </p:style>
         <p:txBody>
           <a:bodyPr/>
           <a:lstStyle/>
@@ -8324,12 +8480,10 @@
         <p:nvPr/>
       </p:nvGrpSpPr>
       <p:grpSpPr/>
-      <p:sp xmlns:a="http://schemas.openxmlformats.org/drawingml/2006/main" xmlns:p="http://schemas.openxmlformats.org/presentationml/2006/main">
+      <p:sp>
         <p:nvSpPr>
           <p:cNvPr id="9900" name="_BG_DARK_"/>
-          <p:cNvSpPr>
-            <a:spLocks noSelect="1" noMove="1" noResize="1"/>
-          </p:cNvSpPr>
+          <p:cNvSpPr/>
           <p:nvPr/>
         </p:nvSpPr>
         <p:spPr>
@@ -8347,6 +8501,20 @@
             <a:noFill/>
           </a:ln>
         </p:spPr>
+        <p:style>
+          <a:lnRef idx="1">
+            <a:srgbClr val="1C1C1C"/>
+          </a:lnRef>
+          <a:fillRef idx="1">
+            <a:srgbClr val="1C1C1C"/>
+          </a:fillRef>
+          <a:effectRef idx="0">
+            <a:srgbClr val="1C1C1C"/>
+          </a:effectRef>
+          <a:fontRef idx="minor">
+            <a:srgbClr val="EEEEEE"/>
+          </a:fontRef>
+        </p:style>
         <p:txBody>
           <a:bodyPr/>
           <a:lstStyle/>
@@ -9011,12 +9179,10 @@
         <p:nvPr/>
       </p:nvGrpSpPr>
       <p:grpSpPr/>
-      <p:sp xmlns:a="http://schemas.openxmlformats.org/drawingml/2006/main" xmlns:p="http://schemas.openxmlformats.org/presentationml/2006/main">
+      <p:sp>
         <p:nvSpPr>
           <p:cNvPr id="9900" name="_BG_DARK_"/>
-          <p:cNvSpPr>
-            <a:spLocks noSelect="1" noMove="1" noResize="1"/>
-          </p:cNvSpPr>
+          <p:cNvSpPr/>
           <p:nvPr/>
         </p:nvSpPr>
         <p:spPr>
@@ -9034,6 +9200,20 @@
             <a:noFill/>
           </a:ln>
         </p:spPr>
+        <p:style>
+          <a:lnRef idx="1">
+            <a:srgbClr val="1C1C1C"/>
+          </a:lnRef>
+          <a:fillRef idx="1">
+            <a:srgbClr val="1C1C1C"/>
+          </a:fillRef>
+          <a:effectRef idx="0">
+            <a:srgbClr val="1C1C1C"/>
+          </a:effectRef>
+          <a:fontRef idx="minor">
+            <a:srgbClr val="EEEEEE"/>
+          </a:fontRef>
+        </p:style>
         <p:txBody>
           <a:bodyPr/>
           <a:lstStyle/>
@@ -9595,12 +9775,10 @@
         <p:nvPr/>
       </p:nvGrpSpPr>
       <p:grpSpPr/>
-      <p:sp xmlns:a="http://schemas.openxmlformats.org/drawingml/2006/main" xmlns:p="http://schemas.openxmlformats.org/presentationml/2006/main">
+      <p:sp>
         <p:nvSpPr>
           <p:cNvPr id="9900" name="_BG_DARK_"/>
-          <p:cNvSpPr>
-            <a:spLocks noSelect="1" noMove="1" noResize="1"/>
-          </p:cNvSpPr>
+          <p:cNvSpPr/>
           <p:nvPr/>
         </p:nvSpPr>
         <p:spPr>
@@ -9618,6 +9796,20 @@
             <a:noFill/>
           </a:ln>
         </p:spPr>
+        <p:style>
+          <a:lnRef idx="1">
+            <a:srgbClr val="1C1C1C"/>
+          </a:lnRef>
+          <a:fillRef idx="1">
+            <a:srgbClr val="1C1C1C"/>
+          </a:fillRef>
+          <a:effectRef idx="0">
+            <a:srgbClr val="1C1C1C"/>
+          </a:effectRef>
+          <a:fontRef idx="minor">
+            <a:srgbClr val="EEEEEE"/>
+          </a:fontRef>
+        </p:style>
         <p:txBody>
           <a:bodyPr/>
           <a:lstStyle/>
@@ -10179,12 +10371,10 @@
         <p:nvPr/>
       </p:nvGrpSpPr>
       <p:grpSpPr/>
-      <p:sp xmlns:a="http://schemas.openxmlformats.org/drawingml/2006/main" xmlns:p="http://schemas.openxmlformats.org/presentationml/2006/main">
+      <p:sp>
         <p:nvSpPr>
           <p:cNvPr id="9900" name="_BG_DARK_"/>
-          <p:cNvSpPr>
-            <a:spLocks noSelect="1" noMove="1" noResize="1"/>
-          </p:cNvSpPr>
+          <p:cNvSpPr/>
           <p:nvPr/>
         </p:nvSpPr>
         <p:spPr>
@@ -10202,6 +10392,20 @@
             <a:noFill/>
           </a:ln>
         </p:spPr>
+        <p:style>
+          <a:lnRef idx="1">
+            <a:srgbClr val="1C1C1C"/>
+          </a:lnRef>
+          <a:fillRef idx="1">
+            <a:srgbClr val="1C1C1C"/>
+          </a:fillRef>
+          <a:effectRef idx="0">
+            <a:srgbClr val="1C1C1C"/>
+          </a:effectRef>
+          <a:fontRef idx="minor">
+            <a:srgbClr val="EEEEEE"/>
+          </a:fontRef>
+        </p:style>
         <p:txBody>
           <a:bodyPr/>
           <a:lstStyle/>
@@ -10673,12 +10877,10 @@
         <p:nvPr/>
       </p:nvGrpSpPr>
       <p:grpSpPr/>
-      <p:sp xmlns:a="http://schemas.openxmlformats.org/drawingml/2006/main" xmlns:p="http://schemas.openxmlformats.org/presentationml/2006/main">
+      <p:sp>
         <p:nvSpPr>
           <p:cNvPr id="9900" name="_BG_DARK_"/>
-          <p:cNvSpPr>
-            <a:spLocks noSelect="1" noMove="1" noResize="1"/>
-          </p:cNvSpPr>
+          <p:cNvSpPr/>
           <p:nvPr/>
         </p:nvSpPr>
         <p:spPr>
@@ -10696,6 +10898,20 @@
             <a:noFill/>
           </a:ln>
         </p:spPr>
+        <p:style>
+          <a:lnRef idx="1">
+            <a:srgbClr val="1C1C1C"/>
+          </a:lnRef>
+          <a:fillRef idx="1">
+            <a:srgbClr val="1C1C1C"/>
+          </a:fillRef>
+          <a:effectRef idx="0">
+            <a:srgbClr val="1C1C1C"/>
+          </a:effectRef>
+          <a:fontRef idx="minor">
+            <a:srgbClr val="EEEEEE"/>
+          </a:fontRef>
+        </p:style>
         <p:txBody>
           <a:bodyPr/>
           <a:lstStyle/>
@@ -10907,12 +11123,10 @@
         <p:nvPr/>
       </p:nvGrpSpPr>
       <p:grpSpPr/>
-      <p:sp xmlns:a="http://schemas.openxmlformats.org/drawingml/2006/main" xmlns:p="http://schemas.openxmlformats.org/presentationml/2006/main">
+      <p:sp>
         <p:nvSpPr>
           <p:cNvPr id="9900" name="_BG_DARK_"/>
-          <p:cNvSpPr>
-            <a:spLocks noSelect="1" noMove="1" noResize="1"/>
-          </p:cNvSpPr>
+          <p:cNvSpPr/>
           <p:nvPr/>
         </p:nvSpPr>
         <p:spPr>
@@ -10930,6 +11144,20 @@
             <a:noFill/>
           </a:ln>
         </p:spPr>
+        <p:style>
+          <a:lnRef idx="1">
+            <a:srgbClr val="1C1C1C"/>
+          </a:lnRef>
+          <a:fillRef idx="1">
+            <a:srgbClr val="1C1C1C"/>
+          </a:fillRef>
+          <a:effectRef idx="0">
+            <a:srgbClr val="1C1C1C"/>
+          </a:effectRef>
+          <a:fontRef idx="minor">
+            <a:srgbClr val="EEEEEE"/>
+          </a:fontRef>
+        </p:style>
         <p:txBody>
           <a:bodyPr/>
           <a:lstStyle/>

--- a/00-01_han-ai/training-materials/course05_jissen_claude_code.pptx
+++ b/00-01_han-ai/training-materials/course05_jissen_claude_code.pptx
@@ -7821,7 +7821,7 @@
                             <a:srgbClr val="EEEEEE"/>
                           </a:solidFill>
                         </a:rPr>
-                        <a:t>セットアップ確認</a:t>
+                        <a:t>ユースケース</a:t>
                       </a:r>
                     </a:p>
                   </a:txBody>
@@ -7843,7 +7843,7 @@
                             <a:srgbClr val="EEEEEE"/>
                           </a:solidFill>
                         </a:rPr>
-                        <a:t>デスクトップ版起動・サインイン・動作確認</a:t>
+                        <a:t>フォルダ整理・PDF情報抽出・定型文書生成（各約3分）</a:t>
                       </a:r>
                     </a:p>
                   </a:txBody>
@@ -7865,7 +7865,7 @@
                             <a:srgbClr val="EEEEEE"/>
                           </a:solidFill>
                         </a:rPr>
-                        <a:t>30分</a:t>
+                        <a:t>10分</a:t>
                       </a:r>
                     </a:p>
                   </a:txBody>
@@ -7907,7 +7907,7 @@
                             <a:srgbClr val="EEEEEE"/>
                           </a:solidFill>
                         </a:rPr>
-                        <a:t>ユースケース</a:t>
+                        <a:t>セットアップ確認</a:t>
                       </a:r>
                     </a:p>
                   </a:txBody>
@@ -7925,7 +7925,7 @@
                             <a:srgbClr val="EEEEEE"/>
                           </a:solidFill>
                         </a:rPr>
-                        <a:t>フォルダ整理・CSV整形・定型文書生成（各3分）</a:t>
+                        <a:t>デスクトップ版起動・サインイン・動作確認</a:t>
                       </a:r>
                     </a:p>
                   </a:txBody>
@@ -7943,7 +7943,7 @@
                             <a:srgbClr val="EEEEEE"/>
                           </a:solidFill>
                         </a:rPr>
-                        <a:t>10分</a:t>
+                        <a:t>20分</a:t>
                       </a:r>
                     </a:p>
                   </a:txBody>
@@ -8071,7 +8071,7 @@
                             <a:srgbClr val="EEEEEE"/>
                           </a:solidFill>
                         </a:rPr>
-                        <a:t>応用ワーク</a:t>
+                        <a:t>実践ワーク</a:t>
                       </a:r>
                     </a:p>
                   </a:txBody>
@@ -8089,7 +8089,7 @@
                             <a:srgbClr val="EEEEEE"/>
                           </a:solidFill>
                         </a:rPr>
-                        <a:t>CLAUDE.md作成・テンプレート化・自社業務試行</a:t>
+                        <a:t>CLAUDE.md作成・トラブル対処・自社業務試行</a:t>
                       </a:r>
                     </a:p>
                   </a:txBody>
@@ -8107,7 +8107,7 @@
                             <a:srgbClr val="EEEEEE"/>
                           </a:solidFill>
                         </a:rPr>
-                        <a:t>40分</a:t>
+                        <a:t>52分</a:t>
                       </a:r>
                     </a:p>
                   </a:txBody>
@@ -8193,7 +8193,7 @@
                             <a:srgbClr val="EEEEEE"/>
                           </a:solidFill>
                         </a:rPr>
-                        <a:t>10分</a:t>
+                        <a:t>6分</a:t>
                       </a:r>
                     </a:p>
                   </a:txBody>

--- a/00-01_han-ai/training-materials/course05_jissen_claude_code.pptx
+++ b/00-01_han-ai/training-materials/course05_jissen_claude_code.pptx
@@ -3716,7 +3716,7 @@
                             <a:srgbClr val="EEEEEE"/>
                           </a:solidFill>
                         </a:rPr>
-                        <a:t>② CSV・データ整形</a:t>
+                        <a:t>② PDF情報抽出</a:t>
                       </a:r>
                     </a:p>
                   </a:txBody>
@@ -3734,7 +3734,7 @@
                             <a:srgbClr val="EEEEEE"/>
                           </a:solidFill>
                         </a:rPr>
-                        <a:t>「顧客リストから氏名・メールを抜き出して50音順に並べ直して」</a:t>
+                        <a:t>「invoicesフォルダの請求書PDFから会社名・金額・日付を読み取ってCSVにまとめて」</a:t>
                       </a:r>
                     </a:p>
                   </a:txBody>
@@ -3776,7 +3776,7 @@
                             <a:srgbClr val="EEEEEE"/>
                           </a:solidFill>
                         </a:rPr>
-                        <a:t>「このリストの各社名に向けた個別のお礼メールをテキストファイルで作って」</a:t>
+                        <a:t>「companies.csv のリストの各社に向けた個別のお礼メールをテキストで作って」</a:t>
                       </a:r>
                     </a:p>
                   </a:txBody>
@@ -5924,282 +5924,6 @@
           </a:p>
         </p:txBody>
       </p:sp>
-      <p:graphicFrame>
-        <p:nvGraphicFramePr>
-          <p:cNvPr id="7" name="Table 6"/>
-          <p:cNvGraphicFramePr>
-            <a:graphicFrameLocks noGrp="1"/>
-          </p:cNvGraphicFramePr>
-          <p:nvPr/>
-        </p:nvGraphicFramePr>
-        <p:xfrm>
-          <a:off x="4572000" y="749808"/>
-          <a:ext cx="4389120" cy="4160520"/>
-        </p:xfrm>
-        <a:graphic>
-          <a:graphicData uri="http://schemas.openxmlformats.org/drawingml/2006/table">
-            <a:tbl>
-              <a:tblPr/>
-              <a:tblGrid>
-                <a:gridCol w="1755648"/>
-                <a:gridCol w="2633472"/>
-              </a:tblGrid>
-              <a:tr h="693420">
-                <a:tc>
-                  <a:txBody>
-                    <a:bodyPr wrap="square"/>
-                    <a:lstStyle/>
-                    <a:p>
-                      <a:pPr algn="ctr"/>
-                      <a:r>
-                        <a:rPr b="1" sz="1200">
-                          <a:solidFill>
-                            <a:srgbClr val="FFFFFF"/>
-                          </a:solidFill>
-                        </a:rPr>
-                        <a:t>トラブル</a:t>
-                      </a:r>
-                    </a:p>
-                  </a:txBody>
-                  <a:tcPr>
-                    <a:solidFill>
-                      <a:srgbClr val="1C1C1C"/>
-                    </a:solidFill>
-                  </a:tcPr>
-                </a:tc>
-                <a:tc>
-                  <a:txBody>
-                    <a:bodyPr wrap="square"/>
-                    <a:lstStyle/>
-                    <a:p>
-                      <a:pPr algn="ctr"/>
-                      <a:r>
-                        <a:rPr b="1" sz="1200">
-                          <a:solidFill>
-                            <a:srgbClr val="FFFFFF"/>
-                          </a:solidFill>
-                        </a:rPr>
-                        <a:t>対処</a:t>
-                      </a:r>
-                    </a:p>
-                  </a:txBody>
-                  <a:tcPr>
-                    <a:solidFill>
-                      <a:srgbClr val="1C1C1C"/>
-                    </a:solidFill>
-                  </a:tcPr>
-                </a:tc>
-              </a:tr>
-              <a:tr h="693420">
-                <a:tc>
-                  <a:txBody>
-                    <a:bodyPr wrap="square"/>
-                    <a:lstStyle/>
-                    <a:p>
-                      <a:pPr algn="l"/>
-                      <a:r>
-                        <a:rPr sz="1100">
-                          <a:solidFill>
-                            <a:srgbClr val="EEEEEE"/>
-                          </a:solidFill>
-                        </a:rPr>
-                        <a:t>返答が途中で止まった</a:t>
-                      </a:r>
-                    </a:p>
-                  </a:txBody>
-                  <a:tcPr/>
-                </a:tc>
-                <a:tc>
-                  <a:txBody>
-                    <a:bodyPr wrap="square"/>
-                    <a:lstStyle/>
-                    <a:p>
-                      <a:pPr algn="l"/>
-                      <a:r>
-                        <a:rPr sz="1100">
-                          <a:solidFill>
-                            <a:srgbClr val="EEEEEE"/>
-                          </a:solidFill>
-                        </a:rPr>
-                        <a:t>「続けてください」と入力</a:t>
-                      </a:r>
-                    </a:p>
-                  </a:txBody>
-                  <a:tcPr/>
-                </a:tc>
-              </a:tr>
-              <a:tr h="693420">
-                <a:tc>
-                  <a:txBody>
-                    <a:bodyPr wrap="square"/>
-                    <a:lstStyle/>
-                    <a:p>
-                      <a:pPr algn="l"/>
-                      <a:r>
-                        <a:rPr sz="1100">
-                          <a:solidFill>
-                            <a:srgbClr val="EEEEEE"/>
-                          </a:solidFill>
-                        </a:rPr>
-                        <a:t>意図と違う処理をした</a:t>
-                      </a:r>
-                    </a:p>
-                  </a:txBody>
-                  <a:tcPr>
-                    <a:solidFill>
-                      <a:srgbClr val="F8FAFC"/>
-                    </a:solidFill>
-                  </a:tcPr>
-                </a:tc>
-                <a:tc>
-                  <a:txBody>
-                    <a:bodyPr wrap="square"/>
-                    <a:lstStyle/>
-                    <a:p>
-                      <a:pPr algn="l"/>
-                      <a:r>
-                        <a:rPr sz="1100">
-                          <a:solidFill>
-                            <a:srgbClr val="EEEEEE"/>
-                          </a:solidFill>
-                        </a:rPr>
-                        <a:t>「待って」と入力 → 意図を正確に伝え直す</a:t>
-                      </a:r>
-                    </a:p>
-                  </a:txBody>
-                  <a:tcPr>
-                    <a:solidFill>
-                      <a:srgbClr val="F8FAFC"/>
-                    </a:solidFill>
-                  </a:tcPr>
-                </a:tc>
-              </a:tr>
-              <a:tr h="693420">
-                <a:tc>
-                  <a:txBody>
-                    <a:bodyPr wrap="square"/>
-                    <a:lstStyle/>
-                    <a:p>
-                      <a:pPr algn="l"/>
-                      <a:r>
-                        <a:rPr sz="1100">
-                          <a:solidFill>
-                            <a:srgbClr val="EEEEEE"/>
-                          </a:solidFill>
-                        </a:rPr>
-                        <a:t>エラーメッセージが出た</a:t>
-                      </a:r>
-                    </a:p>
-                  </a:txBody>
-                  <a:tcPr/>
-                </a:tc>
-                <a:tc>
-                  <a:txBody>
-                    <a:bodyPr wrap="square"/>
-                    <a:lstStyle/>
-                    <a:p>
-                      <a:pPr algn="l"/>
-                      <a:r>
-                        <a:rPr sz="1100">
-                          <a:solidFill>
-                            <a:srgbClr val="EEEEEE"/>
-                          </a:solidFill>
-                        </a:rPr>
-                        <a:t>メッセージをそのまま貼り付けて「これはどういう意味ですか？」と聞く</a:t>
-                      </a:r>
-                    </a:p>
-                  </a:txBody>
-                  <a:tcPr/>
-                </a:tc>
-              </a:tr>
-              <a:tr h="693420">
-                <a:tc>
-                  <a:txBody>
-                    <a:bodyPr wrap="square"/>
-                    <a:lstStyle/>
-                    <a:p>
-                      <a:pPr algn="l"/>
-                      <a:r>
-                        <a:rPr sz="1100">
-                          <a:solidFill>
-                            <a:srgbClr val="EEEEEE"/>
-                          </a:solidFill>
-                        </a:rPr>
-                        <a:t>コンテキストが長くなった</a:t>
-                      </a:r>
-                    </a:p>
-                  </a:txBody>
-                  <a:tcPr>
-                    <a:solidFill>
-                      <a:srgbClr val="F8FAFC"/>
-                    </a:solidFill>
-                  </a:tcPr>
-                </a:tc>
-                <a:tc>
-                  <a:txBody>
-                    <a:bodyPr wrap="square"/>
-                    <a:lstStyle/>
-                    <a:p>
-                      <a:pPr algn="l"/>
-                      <a:r>
-                        <a:rPr sz="1100">
-                          <a:solidFill>
-                            <a:srgbClr val="EEEEEE"/>
-                          </a:solidFill>
-                        </a:rPr>
-                        <a:t>「ここまでの作業内容をまとめてください」→ 新規セッションに貼り付け</a:t>
-                      </a:r>
-                    </a:p>
-                  </a:txBody>
-                  <a:tcPr>
-                    <a:solidFill>
-                      <a:srgbClr val="F8FAFC"/>
-                    </a:solidFill>
-                  </a:tcPr>
-                </a:tc>
-              </a:tr>
-              <a:tr h="693420">
-                <a:tc>
-                  <a:txBody>
-                    <a:bodyPr wrap="square"/>
-                    <a:lstStyle/>
-                    <a:p>
-                      <a:pPr algn="l"/>
-                      <a:r>
-                        <a:rPr sz="1100">
-                          <a:solidFill>
-                            <a:srgbClr val="EEEEEE"/>
-                          </a:solidFill>
-                        </a:rPr>
-                        <a:t>応答しない・フリーズ</a:t>
-                      </a:r>
-                    </a:p>
-                  </a:txBody>
-                  <a:tcPr/>
-                </a:tc>
-                <a:tc>
-                  <a:txBody>
-                    <a:bodyPr wrap="square"/>
-                    <a:lstStyle/>
-                    <a:p>
-                      <a:pPr algn="l"/>
-                      <a:r>
-                        <a:rPr sz="1100">
-                          <a:solidFill>
-                            <a:srgbClr val="EEEEEE"/>
-                          </a:solidFill>
-                        </a:rPr>
-                        <a:t>数分待ってアプリを再起動して再試行</a:t>
-                      </a:r>
-                    </a:p>
-                  </a:txBody>
-                  <a:tcPr/>
-                </a:tc>
-              </a:tr>
-            </a:tbl>
-          </a:graphicData>
-        </a:graphic>
-      </p:graphicFrame>
     </p:spTree>
   </p:cSld>
   <p:clrMapOvr>
@@ -6509,7 +6233,7 @@
                             <a:srgbClr val="EEEEEE"/>
                           </a:solidFill>
                         </a:rPr>
-                        <a:t>セクション3のユースケースをさらに深める（自社のデータで試す）</a:t>
+                        <a:t>セクション2のユースケースをさらに深める（自社のデータで試す）</a:t>
                       </a:r>
                     </a:p>
                   </a:txBody>
@@ -7189,7 +6913,7 @@
                   <a:srgbClr val="EEEEEE"/>
                 </a:solidFill>
               </a:rPr>
-              <a:t>[OK] フォルダ整理・CSV整形・文書生成を体験した</a:t>
+              <a:t>[OK] フォルダ整理・PDF情報抽出・文書生成を体験した</a:t>
             </a:r>
           </a:p>
           <a:p>
@@ -10661,7 +10385,7 @@
                             <a:srgbClr val="EEEEEE"/>
                           </a:solidFill>
                         </a:rPr>
-                        <a:t>ファイル整理・CSV整形・文書生成</a:t>
+                        <a:t>ファイル整理・PDF情報抽出・文書生成</a:t>
                       </a:r>
                     </a:p>
                   </a:txBody>
@@ -11347,7 +11071,7 @@
                   <a:srgbClr val="EEEEEE"/>
                 </a:solidFill>
               </a:rPr>
-              <a:t>指示例：「Downloadsにある画像・PDF・Wordを種類ごとにフォルダ分けして」</a:t>
+              <a:t>指示例：「Downloads_mock にある画像・PDF・Wordを種類ごとにフォルダ分けして」</a:t>
             </a:r>
           </a:p>
         </p:txBody>
